--- a/presentations/Самигуллин_ВКР_серверное-решение.pptx
+++ b/presentations/Самигуллин_ВКР_серверное-решение.pptx
@@ -4,22 +4,22 @@
   <p:sldMasterIdLst>
     <p:sldMasterId id="2147483648" r:id="rId1"/>
   </p:sldMasterIdLst>
+  <p:notesMasterIdLst>
+    <p:notesMasterId r:id="rId13"/>
+  </p:notesMasterIdLst>
   <p:sldIdLst>
     <p:sldId id="256" r:id="rId2"/>
     <p:sldId id="257" r:id="rId3"/>
-    <p:sldId id="266" r:id="rId17"/>
-    <p:sldId id="258" r:id="rId4"/>
-    <p:sldId id="259" r:id="rId5"/>
-    <p:sldId id="260" r:id="rId6"/>
-    <p:sldId id="261" r:id="rId7"/>
-    <p:sldId id="262" r:id="rId8"/>
-    <p:sldId id="263" r:id="rId9"/>
-    <p:sldId id="264" r:id="rId10"/>
-    <p:sldId id="265" r:id="rId11"/>
+    <p:sldId id="266" r:id="rId4"/>
+    <p:sldId id="258" r:id="rId5"/>
+    <p:sldId id="259" r:id="rId6"/>
+    <p:sldId id="260" r:id="rId7"/>
+    <p:sldId id="261" r:id="rId8"/>
+    <p:sldId id="262" r:id="rId9"/>
+    <p:sldId id="263" r:id="rId10"/>
+    <p:sldId id="264" r:id="rId11"/>
+    <p:sldId id="265" r:id="rId12"/>
   </p:sldIdLst>
-  <p:notesMasterIdLst>
-    <p:notesMasterId r:id="rId12"/>
-  </p:notesMasterIdLst>
   <p:sldSz cx="12192000" cy="6858000"/>
   <p:notesSz cx="6858000" cy="12192000"/>
   <p:defaultTextStyle>
@@ -114,6 +114,11 @@
       </a:defRPr>
     </a:lvl9pPr>
   </p:defaultTextStyle>
+  <p:extLst>
+    <p:ext uri="{EFAFB233-063F-42B5-8137-9DF3F51BA10A}">
+      <p15:sldGuideLst xmlns:p15="http://schemas.microsoft.com/office/powerpoint/2012/main"/>
+    </p:ext>
+  </p:extLst>
 </p:presentation>
 </file>
 
@@ -139,234 +144,10 @@
           <a:chExt cx="0" cy="0"/>
         </a:xfrm>
       </p:grpSpPr>
-      <p:sp>
-        <p:nvSpPr>
-          <p:cNvPr id="2" name="Header Placeholder 1"/>
-          <p:cNvSpPr>
-            <a:spLocks noGrp="1"/>
-          </p:cNvSpPr>
-          <p:nvPr>
-            <p:ph type="hdr" sz="quarter"/>
-          </p:nvPr>
-        </p:nvSpPr>
-        <p:spPr>
-          <a:xfrm>
-            <a:off x="0" y="0"/>
-            <a:ext cx="2971800" cy="458788"/>
-          </a:xfrm>
-          <a:prstGeom prst="rect">
-            <a:avLst/>
-          </a:prstGeom>
-        </p:spPr>
-        <p:txBody>
-          <a:bodyPr vert="horz" lIns="91440" tIns="45720" rIns="91440" bIns="45720" rtlCol="0"/>
-          <a:lstStyle>
-            <a:lvl1pPr algn="l">
-              <a:defRPr sz="1200"/>
-            </a:lvl1pPr>
-          </a:lstStyle>
-          <a:p>
-            <a:endParaRPr lang="en-US"/>
-          </a:p>
-        </p:txBody>
-      </p:sp>
-      <p:sp>
-        <p:nvSpPr>
-          <p:cNvPr id="3" name="Date Placeholder 2"/>
-          <p:cNvSpPr>
-            <a:spLocks noGrp="1"/>
-          </p:cNvSpPr>
-          <p:nvPr>
-            <p:ph type="dt" idx="1"/>
-          </p:nvPr>
-        </p:nvSpPr>
-        <p:spPr>
-          <a:xfrm>
-            <a:off x="3884613" y="0"/>
-            <a:ext cx="2971800" cy="458788"/>
-          </a:xfrm>
-          <a:prstGeom prst="rect">
-            <a:avLst/>
-          </a:prstGeom>
-        </p:spPr>
-        <p:txBody>
-          <a:bodyPr vert="horz" lIns="91440" tIns="45720" rIns="91440" bIns="45720" rtlCol="0"/>
-          <a:lstStyle>
-            <a:lvl1pPr algn="r">
-              <a:defRPr sz="1200"/>
-            </a:lvl1pPr>
-          </a:lstStyle>
-          <a:p>
-            <a:fld id="{5282F153-3F37-0F45-9E97-73ACFA13230C}" type="datetimeFigureOut">
-              <a:rPr lang="en-US"/>
-              <a:t>7/23/19</a:t>
-            </a:fld>
-            <a:endParaRPr lang="en-US"/>
-          </a:p>
-        </p:txBody>
-      </p:sp>
-      <p:sp>
-        <p:nvSpPr>
-          <p:cNvPr id="4" name="Slide Image Placeholder 3"/>
-          <p:cNvSpPr>
-            <a:spLocks noGrp="1" noRot="1" noChangeAspect="1"/>
-          </p:cNvSpPr>
-          <p:nvPr>
-            <p:ph type="sldImg" idx="2"/>
-          </p:nvPr>
-        </p:nvSpPr>
-        <p:spPr>
-          <a:xfrm>
-            <a:off x="685800" y="1143000"/>
-            <a:ext cx="5486400" cy="3086100"/>
-          </a:xfrm>
-          <a:prstGeom prst="rect">
-            <a:avLst/>
-          </a:prstGeom>
-          <a:noFill/>
-          <a:ln w="12700">
-            <a:solidFill>
-              <a:prstClr val="black"/>
-            </a:solidFill>
-          </a:ln>
-        </p:spPr>
-        <p:txBody>
-          <a:bodyPr vert="horz" lIns="91440" tIns="45720" rIns="91440" bIns="45720" rtlCol="0" anchor="ctr"/>
-          <a:lstStyle/>
-          <a:p>
-            <a:endParaRPr lang="en-US"/>
-          </a:p>
-        </p:txBody>
-      </p:sp>
-      <p:sp>
-        <p:nvSpPr>
-          <p:cNvPr id="5" name="Notes Placeholder 4"/>
-          <p:cNvSpPr>
-            <a:spLocks noGrp="1"/>
-          </p:cNvSpPr>
-          <p:nvPr>
-            <p:ph type="body" sz="quarter" idx="3"/>
-          </p:nvPr>
-        </p:nvSpPr>
-        <p:spPr>
-          <a:xfrm>
-            <a:off x="685800" y="4400550"/>
-            <a:ext cx="5486400" cy="3600450"/>
-          </a:xfrm>
-          <a:prstGeom prst="rect">
-            <a:avLst/>
-          </a:prstGeom>
-        </p:spPr>
-        <p:txBody>
-          <a:bodyPr vert="horz" lIns="91440" tIns="45720" rIns="91440" bIns="45720" rtlCol="0"/>
-          <a:lstStyle/>
-          <a:p>
-            <a:pPr lvl="0"/>
-            <a:r>
-              <a:rPr lang="en-US"/>
-              <a:t>Click to edit Master text styles</a:t>
-            </a:r>
-          </a:p>
-          <a:p>
-            <a:pPr lvl="1"/>
-            <a:r>
-              <a:rPr lang="en-US"/>
-              <a:t>Second level</a:t>
-            </a:r>
-          </a:p>
-          <a:p>
-            <a:pPr lvl="2"/>
-            <a:r>
-              <a:rPr lang="en-US"/>
-              <a:t>Third level</a:t>
-            </a:r>
-          </a:p>
-          <a:p>
-            <a:pPr lvl="3"/>
-            <a:r>
-              <a:rPr lang="en-US"/>
-              <a:t>Fourth level</a:t>
-            </a:r>
-          </a:p>
-          <a:p>
-            <a:pPr lvl="4"/>
-            <a:r>
-              <a:rPr lang="en-US"/>
-              <a:t>Fifth level</a:t>
-            </a:r>
-          </a:p>
-        </p:txBody>
-      </p:sp>
-      <p:sp>
-        <p:nvSpPr>
-          <p:cNvPr id="6" name="Footer Placeholder 5"/>
-          <p:cNvSpPr>
-            <a:spLocks noGrp="1"/>
-          </p:cNvSpPr>
-          <p:nvPr>
-            <p:ph type="ftr" sz="quarter" idx="4"/>
-          </p:nvPr>
-        </p:nvSpPr>
-        <p:spPr>
-          <a:xfrm>
-            <a:off x="0" y="8685213"/>
-            <a:ext cx="2971800" cy="458787"/>
-          </a:xfrm>
-          <a:prstGeom prst="rect">
-            <a:avLst/>
-          </a:prstGeom>
-        </p:spPr>
-        <p:txBody>
-          <a:bodyPr vert="horz" lIns="91440" tIns="45720" rIns="91440" bIns="45720" rtlCol="0" anchor="b"/>
-          <a:lstStyle>
-            <a:lvl1pPr algn="l">
-              <a:defRPr sz="1200"/>
-            </a:lvl1pPr>
-          </a:lstStyle>
-          <a:p>
-            <a:endParaRPr lang="en-US"/>
-          </a:p>
-        </p:txBody>
-      </p:sp>
-      <p:sp>
-        <p:nvSpPr>
-          <p:cNvPr id="7" name="Slide Number Placeholder 6"/>
-          <p:cNvSpPr>
-            <a:spLocks noGrp="1"/>
-          </p:cNvSpPr>
-          <p:nvPr>
-            <p:ph type="sldNum" sz="quarter" idx="5"/>
-          </p:nvPr>
-        </p:nvSpPr>
-        <p:spPr>
-          <a:xfrm>
-            <a:off x="3884613" y="8685213"/>
-            <a:ext cx="2971800" cy="458787"/>
-          </a:xfrm>
-          <a:prstGeom prst="rect">
-            <a:avLst/>
-          </a:prstGeom>
-        </p:spPr>
-        <p:txBody>
-          <a:bodyPr vert="horz" lIns="91440" tIns="45720" rIns="91440" bIns="45720" rtlCol="0" anchor="b"/>
-          <a:lstStyle>
-            <a:lvl1pPr algn="r">
-              <a:defRPr sz="1200"/>
-            </a:lvl1pPr>
-          </a:lstStyle>
-          <a:p>
-            <a:fld id="{CE5E9CC1-C706-0F49-92D6-E571CC5EEA8F}" type="slidenum">
-              <a:rPr lang="en-US"/>
-              <a:t>‹#›</a:t>
-            </a:fld>
-            <a:endParaRPr lang="en-US"/>
-          </a:p>
-        </p:txBody>
-      </p:sp>
     </p:spTree>
     <p:extLst>
       <p:ext uri="{BB962C8B-B14F-4D97-AF65-F5344CB8AC3E}">
-        <p14:creationId xmlns:p14="http://schemas.microsoft.com/office/powerpoint/2010/main" val="1024086991"/>
+        <p14:creationId xmlns:p14="http://schemas.microsoft.com/office/powerpoint/2010/main" val="2679309854"/>
       </p:ext>
     </p:extLst>
   </p:cSld>
@@ -514,7 +295,6 @@
               <a:rPr lang="en-US" dirty="0"/>
               <a:t>Здравствуйте. Я отвечал за серверную часть проекта — backend и базу данных. Сервер принимает телеметрию от игры, сохраняет её, строит признаки и обращается к ML-сервису, а затем возвращает игре параметры адаптации. Главной целью для меня было сделать систему масштабируемой и поддерживаемой, поэтому я расскажу про выбор PostgreSQL и FastAPI, про устройство эндпоинтов и про то, как процессы устроены внутри, включая контейнеризацию в Docker.</a:t>
             </a:r>
-            <a:endParaRPr lang="en-US" dirty="0"/>
           </a:p>
         </p:txBody>
       </p:sp>
@@ -602,7 +382,6 @@
               <a:rPr lang="en-US" dirty="0"/>
               <a:t>Итог по backend. Сервер на FastAPI и PostgreSQL в Docker — это центральный узел системы: он принимает телеметрию, строит признаки, связывается с ML и возвращает адаптацию. Благодаря слоистой архитектуре, служебным эндпоинтам, миграциям и тестам систему легко масштабировать и поддерживать. Спасибо за внимание.</a:t>
             </a:r>
-            <a:endParaRPr lang="en-US" dirty="0"/>
           </a:p>
         </p:txBody>
       </p:sp>
@@ -623,7 +402,7 @@
           <a:p>
             <a:fld id="{F7021451-1387-4CA6-816F-3879F97B5CBC}" type="slidenum">
               <a:rPr lang="en-US"/>
-              <a:t>10</a:t>
+              <a:t>11</a:t>
             </a:fld>
             <a:endParaRPr lang="en-US"/>
           </a:p>
@@ -690,7 +469,6 @@
               <a:rPr lang="en-US" dirty="0"/>
               <a:t>Зачем вообще нужен сервер. Телеметрию нельзя держать на клиенте: данные многих игроков надо собирать централизованно, надёжно хранить и отдавать модели. Сервер — это единое хранилище и источник правды: он валидирует входные данные и хранит историю предсказаний. И именно сюда вынесена вся тяжёлая логика — построение признаков и обращение к ML. По сути backend — центральный узел между игрой и ML, который в реальном времени обслуживает множество клиентов.</a:t>
             </a:r>
-            <a:endParaRPr lang="en-US" dirty="0"/>
           </a:p>
         </p:txBody>
       </p:sp>
@@ -778,7 +556,6 @@
               <a:rPr lang="en-US" dirty="0"/>
               <a:t>Базу данных я выбрал PostgreSQL. Во-первых, надёжность: полноценные ACID-транзакции гарантируют целостность телеметрии. Во-вторых, тип JSONB — события приходят с произвольными parameters и state, и Postgres хранит их как гибкий, при этом индексируемый JSON, не ломая схему. В-третьих, производительность: индексы, быстрые батч-вставки и выборки по сессиям. И в-четвёртых — это открытая, бесплатная и очень зрелая СУБД с огромной экосистемой, проверенная в продакшене.</a:t>
             </a:r>
-            <a:endParaRPr lang="en-US" dirty="0"/>
           </a:p>
         </p:txBody>
       </p:sp>
@@ -799,7 +576,7 @@
           <a:p>
             <a:fld id="{F7021451-1387-4CA6-816F-3879F97B5CBC}" type="slidenum">
               <a:rPr lang="en-US"/>
-              <a:t>3</a:t>
+              <a:t>4</a:t>
             </a:fld>
             <a:endParaRPr lang="en-US"/>
           </a:p>
@@ -866,7 +643,6 @@
               <a:rPr lang="en-US" dirty="0"/>
               <a:t>Схема данных простая и расширяемая. Три основные таблицы: sessions — игровые сессии с UUID; events — события, где произвольные данные лежат в поле payload типа JSONB; и predictions — история предсказаний модели с архетипом, уверенностью и id модели. Отдельно есть game_models — профиль игры с архетипами и критическими точками, это единый контракт с ML. Все миграции идемпотентны и применяются автоматически при каждом старте сервера, поэтому база всегда в актуальном состоянии без ручных шагов.</a:t>
             </a:r>
-            <a:endParaRPr lang="en-US" dirty="0"/>
           </a:p>
         </p:txBody>
       </p:sp>
@@ -887,7 +663,7 @@
           <a:p>
             <a:fld id="{F7021451-1387-4CA6-816F-3879F97B5CBC}" type="slidenum">
               <a:rPr lang="en-US"/>
-              <a:t>4</a:t>
+              <a:t>5</a:t>
             </a:fld>
             <a:endParaRPr lang="en-US"/>
           </a:p>
@@ -954,7 +730,6 @@
               <a:rPr lang="en-US" dirty="0"/>
               <a:t>Фреймворк — FastAPI. Он асинхронный, поэтому хорошо держит поток запросов телеметрии без блокировок. Встроенная валидация через Pydantic: входные JSON проверяются по строгим схемам, и ошибки ловятся ещё до бизнес-логики. И он автоматически генерирует документацию OpenAPI и Swagger — это удобно и команде, и автору плагина, который видит контракт прямо на странице /docs. Сочетание скорости, валидации и автодокументации и определило выбор.</a:t>
             </a:r>
-            <a:endParaRPr lang="en-US" dirty="0"/>
           </a:p>
         </p:txBody>
       </p:sp>
@@ -975,7 +750,7 @@
           <a:p>
             <a:fld id="{F7021451-1387-4CA6-816F-3879F97B5CBC}" type="slidenum">
               <a:rPr lang="en-US"/>
-              <a:t>5</a:t>
+              <a:t>6</a:t>
             </a:fld>
             <a:endParaRPr lang="en-US"/>
           </a:p>
@@ -1042,7 +817,6 @@
               <a:rPr lang="en-US" dirty="0"/>
               <a:t>Эндпоинты я разделил на две группы. Слева — рабочие, через которые игра общается с сервером: открыть сессию, отправить батч телеметрии — здесь же раз в N событий вызывается ML, — и закрыть сессию. Но чтобы система была масштабируемой и поддерживаемой, одних рабочих эндпоинтов мало, поэтому справа — служебные: health-check для мониторинга сервиса и базы, чтение и запись профиля игры — это контракт с ML, выдача последней адаптации и запуск переобучения модели. Именно служебные эндпоинты делают систему пригодной к эксплуатации.</a:t>
             </a:r>
-            <a:endParaRPr lang="en-US" dirty="0"/>
           </a:p>
         </p:txBody>
       </p:sp>
@@ -1063,7 +837,7 @@
           <a:p>
             <a:fld id="{F7021451-1387-4CA6-816F-3879F97B5CBC}" type="slidenum">
               <a:rPr lang="en-US"/>
-              <a:t>6</a:t>
+              <a:t>7</a:t>
             </a:fld>
             <a:endParaRPr lang="en-US"/>
           </a:p>
@@ -1130,7 +904,6 @@
               <a:rPr lang="en-US" dirty="0"/>
               <a:t>Теперь внутреннее устройство. Backend разбит на слои. routes — это HTTP-маршруты с валидацией Pydantic: game, sessions, telemetry. services — бизнес-логика: ingest сохраняет события, build_features строит признаки, ml_client общается с ML. И слой моделей с миграциями — SQLAlchemy и идемпотентный SQL. Такая слоистость даёт разделение ответственности: маршруты не знают про SQL, сервисы — про HTTP, каждый слой меняется независимо. Это и есть поддерживаемость. Систему покрывают 13 тестов — от unit до сквозных E2E, а вся конфигурация вынесена в .env.</a:t>
             </a:r>
-            <a:endParaRPr lang="en-US" dirty="0"/>
           </a:p>
         </p:txBody>
       </p:sp>
@@ -1151,7 +924,7 @@
           <a:p>
             <a:fld id="{F7021451-1387-4CA6-816F-3879F97B5CBC}" type="slidenum">
               <a:rPr lang="en-US"/>
-              <a:t>7</a:t>
+              <a:t>8</a:t>
             </a:fld>
             <a:endParaRPr lang="en-US"/>
           </a:p>
@@ -1218,7 +991,6 @@
               <a:rPr lang="en-US" dirty="0"/>
               <a:t>Покажу полный путь одного батча событий — это удобно анимировать по шагам. Шаг первый: приходит POST на ingest, Pydantic валидирует данные. Второй: события сохраняются в PostgreSQL, произвольные поля — в JSONB. Третий: сервис build_features превращает накопленные события в вектор признаков по критическим точкам профиля. Четвёртый: каждые N событий ml_client вызывает ML-сервис на /predict. Пятый: предсказание сохраняется в базу, а параметры адаптации кладутся прямо в ответ на ingest — и плагин тут же передаёт их в игру. Весь стек — postgres, backend и ml — поднимается одной командой docker compose up.</a:t>
             </a:r>
-            <a:endParaRPr lang="en-US" dirty="0"/>
           </a:p>
         </p:txBody>
       </p:sp>
@@ -1239,7 +1011,7 @@
           <a:p>
             <a:fld id="{F7021451-1387-4CA6-816F-3879F97B5CBC}" type="slidenum">
               <a:rPr lang="en-US"/>
-              <a:t>8</a:t>
+              <a:t>9</a:t>
             </a:fld>
             <a:endParaRPr lang="en-US"/>
           </a:p>
@@ -1306,7 +1078,6 @@
               <a:rPr lang="en-US" dirty="0"/>
               <a:t>Планы по серверу: добавить метрики и логирование — латентность предсказаний, частоту fallback, мониторинг нагрузки. Зафиксировать политику отказов: что делать при недоступности ML — отдавать понятную ошибку или fallback. И подготовить горизонтальное масштабирование: несколько воркеров backend, пул соединений к базе, готовность к оркестрации в Kubernetes. Весь код backend — в репозитории по QR-коду, папка backend.</a:t>
             </a:r>
-            <a:endParaRPr lang="en-US" dirty="0"/>
           </a:p>
         </p:txBody>
       </p:sp>
@@ -1327,7 +1098,7 @@
           <a:p>
             <a:fld id="{F7021451-1387-4CA6-816F-3879F97B5CBC}" type="slidenum">
               <a:rPr lang="en-US"/>
-              <a:t>9</a:t>
+              <a:t>10</a:t>
             </a:fld>
             <a:endParaRPr lang="en-US"/>
           </a:p>
@@ -1379,6 +1150,11 @@
 <file path=ppt/slideMasters/slideMaster1.xml><?xml version="1.0" encoding="utf-8"?>
 <p:sldMaster xmlns:a="http://schemas.openxmlformats.org/drawingml/2006/main" xmlns:r="http://schemas.openxmlformats.org/officeDocument/2006/relationships" xmlns:p="http://schemas.openxmlformats.org/presentationml/2006/main">
   <p:cSld>
+    <p:bg>
+      <p:bgRef idx="1001">
+        <a:schemeClr val="bg1"/>
+      </p:bgRef>
+    </p:bg>
     <p:spTree>
       <p:nvGrpSpPr>
         <p:cNvPr id="1" name=""/>
@@ -1661,6 +1437,7 @@
         <a:solidFill>
           <a:srgbClr val="0B5E88"/>
         </a:solidFill>
+        <a:effectLst/>
       </p:bgPr>
     </p:bg>
     <p:spTree>
@@ -2118,11 +1895,11 @@
           <a:bodyPr wrap="square" lIns="0" tIns="0" rIns="0" bIns="0" rtlCol="0" anchor="ctr"/>
           <a:lstStyle/>
           <a:p>
-            <a:pPr indent="0" marL="0">
-              <a:buNone/>
-            </a:pPr>
-            <a:r>
-              <a:rPr lang="en-US" sz="1300" b="1" spc="250" kern="0" dirty="0">
+            <a:pPr marL="0" indent="0">
+              <a:buNone/>
+            </a:pPr>
+            <a:r>
+              <a:rPr lang="en-US" sz="2000" b="1" kern="0" spc="250" dirty="0">
                 <a:solidFill>
                   <a:srgbClr val="8FD0EE"/>
                 </a:solidFill>
@@ -2132,7 +1909,7 @@
               </a:rPr>
               <a:t>ВЫПУСКНАЯ КВАЛИФИКАЦИОННАЯ РАБОТА · 2026</a:t>
             </a:r>
-            <a:endParaRPr lang="en-US" sz="1300" dirty="0"/>
+            <a:endParaRPr lang="en-US" sz="2000" dirty="0"/>
           </a:p>
         </p:txBody>
       </p:sp>
@@ -2157,14 +1934,14 @@
           <a:bodyPr wrap="square" lIns="0" tIns="0" rIns="0" bIns="0" rtlCol="0" anchor="t"/>
           <a:lstStyle/>
           <a:p>
-            <a:pPr indent="0" marL="0">
+            <a:pPr marL="0" indent="0">
               <a:lnSpc>
                 <a:spcPct val="102000"/>
               </a:lnSpc>
               <a:buNone/>
             </a:pPr>
             <a:r>
-              <a:rPr lang="en-US" sz="3200" b="1" dirty="0">
+              <a:rPr lang="en-US" sz="4400" b="1" dirty="0">
                 <a:solidFill>
                   <a:srgbClr val="FFFFFF"/>
                 </a:solidFill>
@@ -2174,7 +1951,7 @@
               </a:rPr>
               <a:t>Разработка серверного решения для сбора и анализа игровых данных</a:t>
             </a:r>
-            <a:endParaRPr lang="en-US" sz="3200" dirty="0"/>
+            <a:endParaRPr lang="en-US" sz="4400" dirty="0"/>
           </a:p>
         </p:txBody>
       </p:sp>
@@ -2199,7 +1976,7 @@
           </a:solidFill>
           <a:ln/>
           <a:effectLst>
-            <a:outerShdw sx="100000" sy="100000" kx="0" ky="0" algn="bl" rotWithShape="0" blurRad="114300" dist="38100" dir="5400000">
+            <a:outerShdw blurRad="114300" dist="38100" dir="5400000" algn="bl" rotWithShape="0">
               <a:srgbClr val="9FB6C4">
                 <a:alpha val="28000"/>
               </a:srgbClr>
@@ -2226,7 +2003,7 @@
           </a:solidFill>
           <a:ln/>
           <a:effectLst>
-            <a:outerShdw sx="100000" sy="100000" kx="0" ky="0" algn="bl" rotWithShape="0" blurRad="88900" dist="25400" dir="5400000">
+            <a:outerShdw blurRad="88900" dist="25400" dir="5400000" algn="bl" rotWithShape="0">
               <a:srgbClr val="B8C9D4">
                 <a:alpha val="22000"/>
               </a:srgbClr>
@@ -2243,7 +2020,7 @@
           <p:nvPr/>
         </p:nvPicPr>
         <p:blipFill>
-          <a:blip r:embed="rId1"/>
+          <a:blip r:embed="rId3"/>
           <a:stretch>
             <a:fillRect/>
           </a:stretch>
@@ -2279,11 +2056,11 @@
           <a:bodyPr wrap="square" lIns="0" tIns="0" rIns="0" bIns="0" rtlCol="0" anchor="ctr"/>
           <a:lstStyle/>
           <a:p>
-            <a:pPr indent="0" marL="0">
-              <a:buNone/>
-            </a:pPr>
-            <a:r>
-              <a:rPr lang="en-US" sz="1050" b="1" spc="200" kern="0" dirty="0">
+            <a:pPr marL="0" indent="0">
+              <a:buNone/>
+            </a:pPr>
+            <a:r>
+              <a:rPr lang="en-US" sz="1050" b="1" kern="0" spc="200" dirty="0">
                 <a:solidFill>
                   <a:srgbClr val="8FD0EE"/>
                 </a:solidFill>
@@ -2318,7 +2095,7 @@
           <a:bodyPr wrap="square" lIns="0" tIns="0" rIns="0" bIns="0" rtlCol="0" anchor="ctr"/>
           <a:lstStyle/>
           <a:p>
-            <a:pPr indent="0" marL="0">
+            <a:pPr marL="0" indent="0">
               <a:buNone/>
             </a:pPr>
             <a:r>
@@ -2357,7 +2134,7 @@
           <a:bodyPr wrap="square" lIns="0" tIns="0" rIns="0" bIns="0" rtlCol="0" anchor="ctr"/>
           <a:lstStyle/>
           <a:p>
-            <a:pPr indent="0" marL="0">
+            <a:pPr marL="0" indent="0">
               <a:buNone/>
             </a:pPr>
             <a:r>
@@ -2396,7 +2173,7 @@
           </a:solidFill>
           <a:ln/>
           <a:effectLst>
-            <a:outerShdw sx="100000" sy="100000" kx="0" ky="0" algn="bl" rotWithShape="0" blurRad="114300" dist="38100" dir="5400000">
+            <a:outerShdw blurRad="114300" dist="38100" dir="5400000" algn="bl" rotWithShape="0">
               <a:srgbClr val="9FB6C4">
                 <a:alpha val="28000"/>
               </a:srgbClr>
@@ -2425,11 +2202,11 @@
           <a:bodyPr wrap="square" lIns="0" tIns="0" rIns="0" bIns="0" rtlCol="0" anchor="ctr"/>
           <a:lstStyle/>
           <a:p>
-            <a:pPr indent="0" marL="0">
-              <a:buNone/>
-            </a:pPr>
-            <a:r>
-              <a:rPr lang="en-US" sz="1050" b="1" spc="200" kern="0" dirty="0">
+            <a:pPr marL="0" indent="0">
+              <a:buNone/>
+            </a:pPr>
+            <a:r>
+              <a:rPr lang="en-US" sz="1050" b="1" kern="0" spc="200" dirty="0">
                 <a:solidFill>
                   <a:srgbClr val="8FD0EE"/>
                 </a:solidFill>
@@ -2464,7 +2241,7 @@
           <a:bodyPr wrap="square" lIns="0" tIns="0" rIns="0" bIns="0" rtlCol="0" anchor="t"/>
           <a:lstStyle/>
           <a:p>
-            <a:pPr indent="0" marL="0">
+            <a:pPr marL="0" indent="0">
               <a:lnSpc>
                 <a:spcPct val="102000"/>
               </a:lnSpc>
@@ -2484,7 +2261,7 @@
             <a:endParaRPr lang="en-US" sz="1500" dirty="0"/>
           </a:p>
           <a:p>
-            <a:pPr indent="0" marL="0">
+            <a:pPr marL="0" indent="0">
               <a:lnSpc>
                 <a:spcPct val="102000"/>
               </a:lnSpc>
@@ -2515,12 +2292,13 @@
 
 <file path=ppt/slides/slide10.xml><?xml version="1.0" encoding="utf-8"?>
 <p:sld xmlns:a="http://schemas.openxmlformats.org/drawingml/2006/main" xmlns:r="http://schemas.openxmlformats.org/officeDocument/2006/relationships" xmlns:p="http://schemas.openxmlformats.org/presentationml/2006/main">
-  <p:cSld name="Slide 10">
+  <p:cSld name="Slide 9">
     <p:bg>
       <p:bgPr>
         <a:solidFill>
-          <a:srgbClr val="0B5E88"/>
+          <a:srgbClr val="FFFFFF"/>
         </a:solidFill>
+        <a:effectLst/>
       </p:bgPr>
     </p:bg>
     <p:spTree>
@@ -2539,535 +2317,248 @@
       </p:grpSpPr>
       <p:sp>
         <p:nvSpPr>
-          <p:cNvPr id="2" name="Shape 0"/>
-          <p:cNvSpPr/>
-          <p:nvPr/>
-        </p:nvSpPr>
-        <p:spPr>
-          <a:xfrm>
-            <a:off x="640080" y="5760720"/>
-            <a:ext cx="54864" cy="54864"/>
-          </a:xfrm>
-          <a:prstGeom prst="ellipse">
-            <a:avLst/>
-          </a:prstGeom>
-          <a:solidFill>
-            <a:srgbClr val="3E8FB8"/>
-          </a:solidFill>
-          <a:ln/>
-        </p:spPr>
-      </p:sp>
-      <p:sp>
-        <p:nvSpPr>
-          <p:cNvPr id="3" name="Shape 1"/>
-          <p:cNvSpPr/>
-          <p:nvPr/>
-        </p:nvSpPr>
-        <p:spPr>
-          <a:xfrm>
-            <a:off x="640080" y="6126480"/>
-            <a:ext cx="54864" cy="54864"/>
-          </a:xfrm>
-          <a:prstGeom prst="ellipse">
-            <a:avLst/>
-          </a:prstGeom>
-          <a:solidFill>
-            <a:srgbClr val="3E8FB8"/>
-          </a:solidFill>
-          <a:ln/>
-        </p:spPr>
-      </p:sp>
-      <p:sp>
-        <p:nvSpPr>
-          <p:cNvPr id="4" name="Shape 2"/>
-          <p:cNvSpPr/>
-          <p:nvPr/>
-        </p:nvSpPr>
-        <p:spPr>
-          <a:xfrm>
-            <a:off x="640080" y="6492240"/>
-            <a:ext cx="54864" cy="54864"/>
-          </a:xfrm>
-          <a:prstGeom prst="ellipse">
-            <a:avLst/>
-          </a:prstGeom>
-          <a:solidFill>
-            <a:srgbClr val="3E8FB8"/>
-          </a:solidFill>
-          <a:ln/>
-        </p:spPr>
-      </p:sp>
-      <p:sp>
-        <p:nvSpPr>
-          <p:cNvPr id="5" name="Shape 3"/>
-          <p:cNvSpPr/>
-          <p:nvPr/>
-        </p:nvSpPr>
-        <p:spPr>
-          <a:xfrm>
-            <a:off x="1097280" y="5760720"/>
-            <a:ext cx="54864" cy="54864"/>
-          </a:xfrm>
-          <a:prstGeom prst="ellipse">
-            <a:avLst/>
-          </a:prstGeom>
-          <a:solidFill>
-            <a:srgbClr val="3E8FB8"/>
-          </a:solidFill>
-          <a:ln/>
-        </p:spPr>
-      </p:sp>
-      <p:sp>
-        <p:nvSpPr>
-          <p:cNvPr id="6" name="Shape 4"/>
-          <p:cNvSpPr/>
-          <p:nvPr/>
-        </p:nvSpPr>
-        <p:spPr>
-          <a:xfrm>
-            <a:off x="1097280" y="6126480"/>
-            <a:ext cx="54864" cy="54864"/>
-          </a:xfrm>
-          <a:prstGeom prst="ellipse">
-            <a:avLst/>
-          </a:prstGeom>
-          <a:solidFill>
-            <a:srgbClr val="3E8FB8"/>
-          </a:solidFill>
-          <a:ln/>
-        </p:spPr>
-      </p:sp>
-      <p:sp>
-        <p:nvSpPr>
-          <p:cNvPr id="7" name="Shape 5"/>
-          <p:cNvSpPr/>
-          <p:nvPr/>
-        </p:nvSpPr>
-        <p:spPr>
-          <a:xfrm>
-            <a:off x="1097280" y="6492240"/>
-            <a:ext cx="54864" cy="54864"/>
-          </a:xfrm>
-          <a:prstGeom prst="ellipse">
-            <a:avLst/>
-          </a:prstGeom>
-          <a:solidFill>
-            <a:srgbClr val="3E8FB8"/>
-          </a:solidFill>
-          <a:ln/>
-        </p:spPr>
-      </p:sp>
-      <p:sp>
-        <p:nvSpPr>
-          <p:cNvPr id="8" name="Shape 6"/>
-          <p:cNvSpPr/>
-          <p:nvPr/>
-        </p:nvSpPr>
-        <p:spPr>
-          <a:xfrm>
-            <a:off x="1554480" y="5760720"/>
-            <a:ext cx="54864" cy="54864"/>
-          </a:xfrm>
-          <a:prstGeom prst="ellipse">
-            <a:avLst/>
-          </a:prstGeom>
-          <a:solidFill>
-            <a:srgbClr val="3E8FB8"/>
-          </a:solidFill>
-          <a:ln/>
-        </p:spPr>
-      </p:sp>
-      <p:sp>
-        <p:nvSpPr>
-          <p:cNvPr id="9" name="Shape 7"/>
-          <p:cNvSpPr/>
-          <p:nvPr/>
-        </p:nvSpPr>
-        <p:spPr>
-          <a:xfrm>
-            <a:off x="1554480" y="6126480"/>
-            <a:ext cx="54864" cy="54864"/>
-          </a:xfrm>
-          <a:prstGeom prst="ellipse">
-            <a:avLst/>
-          </a:prstGeom>
-          <a:solidFill>
-            <a:srgbClr val="3E8FB8"/>
-          </a:solidFill>
-          <a:ln/>
-        </p:spPr>
-      </p:sp>
-      <p:sp>
-        <p:nvSpPr>
-          <p:cNvPr id="10" name="Shape 8"/>
-          <p:cNvSpPr/>
-          <p:nvPr/>
-        </p:nvSpPr>
-        <p:spPr>
-          <a:xfrm>
-            <a:off x="1554480" y="6492240"/>
-            <a:ext cx="54864" cy="54864"/>
-          </a:xfrm>
-          <a:prstGeom prst="ellipse">
-            <a:avLst/>
-          </a:prstGeom>
-          <a:solidFill>
-            <a:srgbClr val="3E8FB8"/>
-          </a:solidFill>
-          <a:ln/>
-        </p:spPr>
-      </p:sp>
-      <p:sp>
-        <p:nvSpPr>
-          <p:cNvPr id="11" name="Shape 9"/>
-          <p:cNvSpPr/>
-          <p:nvPr/>
-        </p:nvSpPr>
-        <p:spPr>
-          <a:xfrm>
-            <a:off x="2011680" y="5760720"/>
-            <a:ext cx="54864" cy="54864"/>
-          </a:xfrm>
-          <a:prstGeom prst="ellipse">
-            <a:avLst/>
-          </a:prstGeom>
-          <a:solidFill>
-            <a:srgbClr val="3E8FB8"/>
-          </a:solidFill>
-          <a:ln/>
-        </p:spPr>
-      </p:sp>
-      <p:sp>
-        <p:nvSpPr>
-          <p:cNvPr id="12" name="Shape 10"/>
-          <p:cNvSpPr/>
-          <p:nvPr/>
-        </p:nvSpPr>
-        <p:spPr>
-          <a:xfrm>
-            <a:off x="2011680" y="6126480"/>
-            <a:ext cx="54864" cy="54864"/>
-          </a:xfrm>
-          <a:prstGeom prst="ellipse">
-            <a:avLst/>
-          </a:prstGeom>
-          <a:solidFill>
-            <a:srgbClr val="3E8FB8"/>
-          </a:solidFill>
-          <a:ln/>
-        </p:spPr>
-      </p:sp>
-      <p:sp>
-        <p:nvSpPr>
-          <p:cNvPr id="13" name="Shape 11"/>
-          <p:cNvSpPr/>
-          <p:nvPr/>
-        </p:nvSpPr>
-        <p:spPr>
-          <a:xfrm>
-            <a:off x="2011680" y="6492240"/>
-            <a:ext cx="54864" cy="54864"/>
-          </a:xfrm>
-          <a:prstGeom prst="ellipse">
-            <a:avLst/>
-          </a:prstGeom>
-          <a:solidFill>
-            <a:srgbClr val="3E8FB8"/>
-          </a:solidFill>
-          <a:ln/>
-        </p:spPr>
-      </p:sp>
-      <p:sp>
-        <p:nvSpPr>
-          <p:cNvPr id="14" name="Shape 12"/>
-          <p:cNvSpPr/>
-          <p:nvPr/>
-        </p:nvSpPr>
-        <p:spPr>
-          <a:xfrm>
-            <a:off x="2468880" y="5760720"/>
-            <a:ext cx="54864" cy="54864"/>
-          </a:xfrm>
-          <a:prstGeom prst="ellipse">
-            <a:avLst/>
-          </a:prstGeom>
-          <a:solidFill>
-            <a:srgbClr val="3E8FB8"/>
-          </a:solidFill>
-          <a:ln/>
-        </p:spPr>
-      </p:sp>
-      <p:sp>
-        <p:nvSpPr>
-          <p:cNvPr id="15" name="Shape 13"/>
-          <p:cNvSpPr/>
-          <p:nvPr/>
-        </p:nvSpPr>
-        <p:spPr>
-          <a:xfrm>
-            <a:off x="2468880" y="6126480"/>
-            <a:ext cx="54864" cy="54864"/>
-          </a:xfrm>
-          <a:prstGeom prst="ellipse">
-            <a:avLst/>
-          </a:prstGeom>
-          <a:solidFill>
-            <a:srgbClr val="3E8FB8"/>
-          </a:solidFill>
-          <a:ln/>
-        </p:spPr>
-      </p:sp>
-      <p:sp>
-        <p:nvSpPr>
-          <p:cNvPr id="16" name="Shape 14"/>
-          <p:cNvSpPr/>
-          <p:nvPr/>
-        </p:nvSpPr>
-        <p:spPr>
-          <a:xfrm>
-            <a:off x="2468880" y="6492240"/>
-            <a:ext cx="54864" cy="54864"/>
-          </a:xfrm>
-          <a:prstGeom prst="ellipse">
-            <a:avLst/>
-          </a:prstGeom>
-          <a:solidFill>
-            <a:srgbClr val="3E8FB8"/>
-          </a:solidFill>
-          <a:ln/>
-        </p:spPr>
-      </p:sp>
-      <p:sp>
-        <p:nvSpPr>
-          <p:cNvPr id="17" name="Shape 15"/>
-          <p:cNvSpPr/>
-          <p:nvPr/>
-        </p:nvSpPr>
-        <p:spPr>
-          <a:xfrm>
-            <a:off x="2926080" y="5760720"/>
-            <a:ext cx="54864" cy="54864"/>
-          </a:xfrm>
-          <a:prstGeom prst="ellipse">
-            <a:avLst/>
-          </a:prstGeom>
-          <a:solidFill>
-            <a:srgbClr val="3E8FB8"/>
-          </a:solidFill>
-          <a:ln/>
-        </p:spPr>
-      </p:sp>
-      <p:sp>
-        <p:nvSpPr>
-          <p:cNvPr id="18" name="Shape 16"/>
-          <p:cNvSpPr/>
-          <p:nvPr/>
-        </p:nvSpPr>
-        <p:spPr>
-          <a:xfrm>
-            <a:off x="2926080" y="6126480"/>
-            <a:ext cx="54864" cy="54864"/>
-          </a:xfrm>
-          <a:prstGeom prst="ellipse">
-            <a:avLst/>
-          </a:prstGeom>
-          <a:solidFill>
-            <a:srgbClr val="3E8FB8"/>
-          </a:solidFill>
-          <a:ln/>
-        </p:spPr>
-      </p:sp>
-      <p:sp>
-        <p:nvSpPr>
-          <p:cNvPr id="19" name="Shape 17"/>
-          <p:cNvSpPr/>
-          <p:nvPr/>
-        </p:nvSpPr>
-        <p:spPr>
-          <a:xfrm>
-            <a:off x="2926080" y="6492240"/>
-            <a:ext cx="54864" cy="54864"/>
-          </a:xfrm>
-          <a:prstGeom prst="ellipse">
-            <a:avLst/>
-          </a:prstGeom>
-          <a:solidFill>
-            <a:srgbClr val="3E8FB8"/>
-          </a:solidFill>
-          <a:ln/>
-        </p:spPr>
-      </p:sp>
-      <p:sp>
-        <p:nvSpPr>
-          <p:cNvPr id="20" name="Shape 18"/>
-          <p:cNvSpPr/>
-          <p:nvPr/>
-        </p:nvSpPr>
-        <p:spPr>
-          <a:xfrm>
-            <a:off x="3383280" y="5760720"/>
-            <a:ext cx="54864" cy="54864"/>
-          </a:xfrm>
-          <a:prstGeom prst="ellipse">
-            <a:avLst/>
-          </a:prstGeom>
-          <a:solidFill>
-            <a:srgbClr val="3E8FB8"/>
-          </a:solidFill>
-          <a:ln/>
-        </p:spPr>
-      </p:sp>
-      <p:sp>
-        <p:nvSpPr>
-          <p:cNvPr id="21" name="Shape 19"/>
-          <p:cNvSpPr/>
-          <p:nvPr/>
-        </p:nvSpPr>
-        <p:spPr>
-          <a:xfrm>
-            <a:off x="3383280" y="6126480"/>
-            <a:ext cx="54864" cy="54864"/>
-          </a:xfrm>
-          <a:prstGeom prst="ellipse">
-            <a:avLst/>
-          </a:prstGeom>
-          <a:solidFill>
-            <a:srgbClr val="3E8FB8"/>
-          </a:solidFill>
-          <a:ln/>
-        </p:spPr>
-      </p:sp>
-      <p:sp>
-        <p:nvSpPr>
-          <p:cNvPr id="22" name="Shape 20"/>
-          <p:cNvSpPr/>
-          <p:nvPr/>
-        </p:nvSpPr>
-        <p:spPr>
-          <a:xfrm>
-            <a:off x="3383280" y="6492240"/>
-            <a:ext cx="54864" cy="54864"/>
-          </a:xfrm>
-          <a:prstGeom prst="ellipse">
-            <a:avLst/>
-          </a:prstGeom>
-          <a:solidFill>
-            <a:srgbClr val="3E8FB8"/>
-          </a:solidFill>
-          <a:ln/>
-        </p:spPr>
-      </p:sp>
-      <p:sp>
-        <p:nvSpPr>
-          <p:cNvPr id="23" name="Text 21"/>
-          <p:cNvSpPr/>
-          <p:nvPr/>
-        </p:nvSpPr>
-        <p:spPr>
-          <a:xfrm>
-            <a:off x="640080" y="2011680"/>
-            <a:ext cx="10058400" cy="365760"/>
-          </a:xfrm>
-          <a:prstGeom prst="rect">
-            <a:avLst/>
-          </a:prstGeom>
-          <a:noFill/>
-          <a:ln/>
-        </p:spPr>
-        <p:txBody>
-          <a:bodyPr wrap="square" lIns="0" tIns="0" rIns="0" bIns="0" rtlCol="0" anchor="ctr"/>
-          <a:lstStyle/>
-          <a:p>
-            <a:pPr indent="0" marL="0">
-              <a:buNone/>
-            </a:pPr>
-            <a:r>
-              <a:rPr lang="en-US" sz="1400" b="1" spc="300" kern="0" dirty="0">
-                <a:solidFill>
-                  <a:srgbClr val="8FD0EE"/>
-                </a:solidFill>
-                <a:latin typeface="Calibri" pitchFamily="34" charset="0"/>
-                <a:ea typeface="Calibri" pitchFamily="34" charset="-122"/>
-                <a:cs typeface="Calibri" pitchFamily="34" charset="-120"/>
-              </a:rPr>
-              <a:t>СПАСИБО ЗА ВНИМАНИЕ</a:t>
-            </a:r>
-            <a:endParaRPr lang="en-US" sz="1400" dirty="0"/>
-          </a:p>
-        </p:txBody>
-      </p:sp>
-      <p:sp>
-        <p:nvSpPr>
-          <p:cNvPr id="24" name="Text 22"/>
-          <p:cNvSpPr/>
-          <p:nvPr/>
-        </p:nvSpPr>
-        <p:spPr>
-          <a:xfrm>
-            <a:off x="640080" y="2423160"/>
-            <a:ext cx="10424160" cy="1371600"/>
-          </a:xfrm>
-          <a:prstGeom prst="rect">
-            <a:avLst/>
-          </a:prstGeom>
-          <a:noFill/>
-          <a:ln/>
-        </p:spPr>
-        <p:txBody>
-          <a:bodyPr wrap="square" lIns="0" tIns="0" rIns="0" bIns="0" rtlCol="0" anchor="t"/>
-          <a:lstStyle/>
-          <a:p>
-            <a:pPr indent="0" marL="0">
-              <a:lnSpc>
-                <a:spcPct val="102000"/>
-              </a:lnSpc>
-              <a:buNone/>
-            </a:pPr>
-            <a:r>
-              <a:rPr lang="en-US" sz="3400" b="1" dirty="0">
-                <a:solidFill>
-                  <a:srgbClr val="FFFFFF"/>
+          <p:cNvPr id="2" name="Text 0"/>
+          <p:cNvSpPr/>
+          <p:nvPr/>
+        </p:nvSpPr>
+        <p:spPr>
+          <a:xfrm>
+            <a:off x="10820095" y="384048"/>
+            <a:ext cx="822960" cy="640080"/>
+          </a:xfrm>
+          <a:prstGeom prst="rect">
+            <a:avLst/>
+          </a:prstGeom>
+          <a:noFill/>
+          <a:ln/>
+        </p:spPr>
+        <p:txBody>
+          <a:bodyPr wrap="square" lIns="0" tIns="0" rIns="0" bIns="0" rtlCol="0" anchor="ctr"/>
+          <a:lstStyle/>
+          <a:p>
+            <a:pPr marL="0" indent="0" algn="r">
+              <a:buNone/>
+            </a:pPr>
+            <a:r>
+              <a:rPr lang="en-US" sz="3000" b="1" dirty="0">
+                <a:solidFill>
+                  <a:srgbClr val="C6D6E0"/>
                 </a:solidFill>
                 <a:latin typeface="Cambria" pitchFamily="34" charset="0"/>
                 <a:ea typeface="Cambria" pitchFamily="34" charset="-122"/>
                 <a:cs typeface="Cambria" pitchFamily="34" charset="-120"/>
               </a:rPr>
-              <a:t>Серверное решение для сбора</a:t>
-            </a:r>
-            <a:endParaRPr lang="en-US" sz="3400" dirty="0"/>
-          </a:p>
-          <a:p>
-            <a:pPr indent="0" marL="0">
-              <a:lnSpc>
-                <a:spcPct val="102000"/>
-              </a:lnSpc>
-              <a:buNone/>
-            </a:pPr>
-            <a:r>
-              <a:rPr lang="en-US" sz="3400" b="1" dirty="0">
-                <a:solidFill>
-                  <a:srgbClr val="FFFFFF"/>
+              <a:t>10</a:t>
+            </a:r>
+            <a:endParaRPr lang="en-US" sz="3000" dirty="0"/>
+          </a:p>
+        </p:txBody>
+      </p:sp>
+      <p:sp>
+        <p:nvSpPr>
+          <p:cNvPr id="3" name="Text 1"/>
+          <p:cNvSpPr/>
+          <p:nvPr/>
+        </p:nvSpPr>
+        <p:spPr>
+          <a:xfrm>
+            <a:off x="640080" y="475488"/>
+            <a:ext cx="8229600" cy="274320"/>
+          </a:xfrm>
+          <a:prstGeom prst="rect">
+            <a:avLst/>
+          </a:prstGeom>
+          <a:noFill/>
+          <a:ln/>
+        </p:spPr>
+        <p:txBody>
+          <a:bodyPr wrap="square" lIns="0" tIns="0" rIns="0" bIns="0" rtlCol="0" anchor="ctr"/>
+          <a:lstStyle/>
+          <a:p>
+            <a:pPr marL="0" indent="0">
+              <a:buNone/>
+            </a:pPr>
+            <a:r>
+              <a:rPr lang="en-US" sz="2000" b="1" kern="0" spc="250" dirty="0">
+                <a:solidFill>
+                  <a:srgbClr val="1F9BD8"/>
+                </a:solidFill>
+                <a:latin typeface="Calibri" pitchFamily="34" charset="0"/>
+                <a:ea typeface="Calibri" pitchFamily="34" charset="-122"/>
+                <a:cs typeface="Calibri" pitchFamily="34" charset="-120"/>
+              </a:rPr>
+              <a:t>ЗАДЕЛЫ НА БУДУЩЕЕ</a:t>
+            </a:r>
+            <a:endParaRPr lang="en-US" sz="2000" dirty="0"/>
+          </a:p>
+        </p:txBody>
+      </p:sp>
+      <p:sp>
+        <p:nvSpPr>
+          <p:cNvPr id="4" name="Text 2"/>
+          <p:cNvSpPr/>
+          <p:nvPr/>
+        </p:nvSpPr>
+        <p:spPr>
+          <a:xfrm>
+            <a:off x="640080" y="749808"/>
+            <a:ext cx="10362895" cy="777240"/>
+          </a:xfrm>
+          <a:prstGeom prst="rect">
+            <a:avLst/>
+          </a:prstGeom>
+          <a:noFill/>
+          <a:ln/>
+        </p:spPr>
+        <p:txBody>
+          <a:bodyPr wrap="square" lIns="0" tIns="0" rIns="0" bIns="0" rtlCol="0" anchor="ctr"/>
+          <a:lstStyle/>
+          <a:p>
+            <a:pPr marL="0" indent="0">
+              <a:buNone/>
+            </a:pPr>
+            <a:r>
+              <a:rPr lang="en-US" sz="3000" b="1" dirty="0">
+                <a:solidFill>
+                  <a:srgbClr val="111418"/>
                 </a:solidFill>
                 <a:latin typeface="Cambria" pitchFamily="34" charset="0"/>
                 <a:ea typeface="Cambria" pitchFamily="34" charset="-122"/>
                 <a:cs typeface="Cambria" pitchFamily="34" charset="-120"/>
               </a:rPr>
-              <a:t>и анализа игровых данных</a:t>
-            </a:r>
-            <a:endParaRPr lang="en-US" sz="3400" dirty="0"/>
-          </a:p>
-        </p:txBody>
-      </p:sp>
-      <p:sp>
-        <p:nvSpPr>
-          <p:cNvPr id="25" name="Text 23"/>
-          <p:cNvSpPr/>
-          <p:nvPr/>
-        </p:nvSpPr>
-        <p:spPr>
-          <a:xfrm>
-            <a:off x="640080" y="3977640"/>
-            <a:ext cx="10058400" cy="731520"/>
+              <a:t>Заделы на будущее</a:t>
+            </a:r>
+            <a:endParaRPr lang="en-US" sz="3000" dirty="0"/>
+          </a:p>
+        </p:txBody>
+      </p:sp>
+      <p:sp>
+        <p:nvSpPr>
+          <p:cNvPr id="7" name="Shape 5"/>
+          <p:cNvSpPr/>
+          <p:nvPr/>
+        </p:nvSpPr>
+        <p:spPr>
+          <a:xfrm>
+            <a:off x="640080" y="1783080"/>
+            <a:ext cx="5212080" cy="1078992"/>
+          </a:xfrm>
+          <a:prstGeom prst="roundRect">
+            <a:avLst>
+              <a:gd name="adj" fmla="val 6780"/>
+            </a:avLst>
+          </a:prstGeom>
+          <a:solidFill>
+            <a:srgbClr val="F4FAFD"/>
+          </a:solidFill>
+          <a:ln w="12700">
+            <a:solidFill>
+              <a:srgbClr val="DCE6EC"/>
+            </a:solidFill>
+            <a:prstDash val="solid"/>
+          </a:ln>
+        </p:spPr>
+      </p:sp>
+      <p:sp>
+        <p:nvSpPr>
+          <p:cNvPr id="8" name="Shape 6"/>
+          <p:cNvSpPr/>
+          <p:nvPr/>
+        </p:nvSpPr>
+        <p:spPr>
+          <a:xfrm>
+            <a:off x="859536" y="2039112"/>
+            <a:ext cx="566928" cy="566928"/>
+          </a:xfrm>
+          <a:prstGeom prst="ellipse">
+            <a:avLst/>
+          </a:prstGeom>
+          <a:solidFill>
+            <a:srgbClr val="1F9BD8"/>
+          </a:solidFill>
+          <a:ln/>
+          <a:effectLst>
+            <a:outerShdw blurRad="88900" dist="25400" dir="5400000" algn="bl" rotWithShape="0">
+              <a:srgbClr val="B8C9D4">
+                <a:alpha val="22000"/>
+              </a:srgbClr>
+            </a:outerShdw>
+          </a:effectLst>
+        </p:spPr>
+      </p:sp>
+      <p:pic>
+        <p:nvPicPr>
+          <p:cNvPr id="9" name="Image 0" descr="icons/sliders.png"/>
+          <p:cNvPicPr>
+            <a:picLocks noChangeAspect="1"/>
+          </p:cNvPicPr>
+          <p:nvPr/>
+        </p:nvPicPr>
+        <p:blipFill>
+          <a:blip r:embed="rId3"/>
+          <a:stretch>
+            <a:fillRect/>
+          </a:stretch>
+        </p:blipFill>
+        <p:spPr>
+          <a:xfrm>
+            <a:off x="1029614" y="2209190"/>
+            <a:ext cx="226771" cy="226771"/>
+          </a:xfrm>
+          <a:prstGeom prst="rect">
+            <a:avLst/>
+          </a:prstGeom>
+        </p:spPr>
+      </p:pic>
+      <p:sp>
+        <p:nvSpPr>
+          <p:cNvPr id="10" name="Text 7"/>
+          <p:cNvSpPr/>
+          <p:nvPr/>
+        </p:nvSpPr>
+        <p:spPr>
+          <a:xfrm>
+            <a:off x="1664208" y="1947672"/>
+            <a:ext cx="4023360" cy="365760"/>
+          </a:xfrm>
+          <a:prstGeom prst="rect">
+            <a:avLst/>
+          </a:prstGeom>
+          <a:noFill/>
+          <a:ln/>
+        </p:spPr>
+        <p:txBody>
+          <a:bodyPr wrap="square" lIns="0" tIns="0" rIns="0" bIns="0" rtlCol="0" anchor="ctr"/>
+          <a:lstStyle/>
+          <a:p>
+            <a:pPr marL="0" indent="0">
+              <a:buNone/>
+            </a:pPr>
+            <a:r>
+              <a:rPr lang="en-US" sz="1450" b="1" dirty="0">
+                <a:solidFill>
+                  <a:srgbClr val="111418"/>
+                </a:solidFill>
+                <a:latin typeface="Calibri" pitchFamily="34" charset="0"/>
+                <a:ea typeface="Calibri" pitchFamily="34" charset="-122"/>
+                <a:cs typeface="Calibri" pitchFamily="34" charset="-120"/>
+              </a:rPr>
+              <a:t>Метрики и логирование</a:t>
+            </a:r>
+            <a:endParaRPr lang="en-US" sz="1450" dirty="0"/>
+          </a:p>
+        </p:txBody>
+      </p:sp>
+      <p:sp>
+        <p:nvSpPr>
+          <p:cNvPr id="11" name="Text 8"/>
+          <p:cNvSpPr/>
+          <p:nvPr/>
+        </p:nvSpPr>
+        <p:spPr>
+          <a:xfrm>
+            <a:off x="1664208" y="2313432"/>
+            <a:ext cx="4023360" cy="502920"/>
           </a:xfrm>
           <a:prstGeom prst="rect">
             <a:avLst/>
@@ -3079,53 +2570,485 @@
           <a:bodyPr wrap="square" lIns="0" tIns="0" rIns="0" bIns="0" rtlCol="0" anchor="t"/>
           <a:lstStyle/>
           <a:p>
-            <a:pPr indent="0" marL="0">
+            <a:pPr marL="0" indent="0">
               <a:lnSpc>
-                <a:spcPct val="105000"/>
+                <a:spcPct val="100000"/>
               </a:lnSpc>
               <a:buNone/>
             </a:pPr>
             <a:r>
-              <a:rPr lang="en-US" sz="1500" dirty="0">
-                <a:solidFill>
-                  <a:srgbClr val="CFE8F6"/>
-                </a:solidFill>
-                <a:latin typeface="Calibri" pitchFamily="34" charset="0"/>
-                <a:ea typeface="Calibri" pitchFamily="34" charset="-122"/>
-                <a:cs typeface="Calibri" pitchFamily="34" charset="-120"/>
-              </a:rPr>
-              <a:t>FastAPI + PostgreSQL в Docker · рабочие и служебные эндпоинты · слоистая архитектура, миграции и тесты — масштабируемо и поддерживаемо</a:t>
-            </a:r>
-            <a:endParaRPr lang="en-US" sz="1500" dirty="0"/>
-          </a:p>
-        </p:txBody>
-      </p:sp>
-      <p:sp>
-        <p:nvSpPr>
-          <p:cNvPr id="26" name="Text 24"/>
-          <p:cNvSpPr/>
-          <p:nvPr/>
-        </p:nvSpPr>
-        <p:spPr>
-          <a:xfrm>
-            <a:off x="640080" y="4983480"/>
-            <a:ext cx="10515600" cy="365760"/>
-          </a:xfrm>
-          <a:prstGeom prst="rect">
-            <a:avLst/>
-          </a:prstGeom>
-          <a:noFill/>
-          <a:ln/>
-        </p:spPr>
-        <p:txBody>
-          <a:bodyPr wrap="square" lIns="0" tIns="0" rIns="0" bIns="0" rtlCol="0" anchor="ctr"/>
-          <a:lstStyle/>
-          <a:p>
-            <a:pPr indent="0" marL="0">
-              <a:buNone/>
-            </a:pPr>
-            <a:r>
-              <a:rPr lang="en-US" sz="1400" b="1" dirty="0">
+              <a:rPr lang="en-US" sz="1150" dirty="0">
+                <a:solidFill>
+                  <a:srgbClr val="33383F"/>
+                </a:solidFill>
+                <a:latin typeface="Calibri" pitchFamily="34" charset="0"/>
+                <a:ea typeface="Calibri" pitchFamily="34" charset="-122"/>
+                <a:cs typeface="Calibri" pitchFamily="34" charset="-120"/>
+              </a:rPr>
+              <a:t>latency /predict, fallback-rate, мониторинг нагрузки</a:t>
+            </a:r>
+            <a:endParaRPr lang="en-US" sz="1150" dirty="0"/>
+          </a:p>
+        </p:txBody>
+      </p:sp>
+      <p:sp>
+        <p:nvSpPr>
+          <p:cNvPr id="12" name="Shape 9"/>
+          <p:cNvSpPr/>
+          <p:nvPr/>
+        </p:nvSpPr>
+        <p:spPr>
+          <a:xfrm>
+            <a:off x="640080" y="3063240"/>
+            <a:ext cx="5212080" cy="1078992"/>
+          </a:xfrm>
+          <a:prstGeom prst="roundRect">
+            <a:avLst>
+              <a:gd name="adj" fmla="val 6780"/>
+            </a:avLst>
+          </a:prstGeom>
+          <a:solidFill>
+            <a:srgbClr val="F4FAFD"/>
+          </a:solidFill>
+          <a:ln w="12700">
+            <a:solidFill>
+              <a:srgbClr val="DCE6EC"/>
+            </a:solidFill>
+            <a:prstDash val="solid"/>
+          </a:ln>
+        </p:spPr>
+      </p:sp>
+      <p:sp>
+        <p:nvSpPr>
+          <p:cNvPr id="13" name="Shape 10"/>
+          <p:cNvSpPr/>
+          <p:nvPr/>
+        </p:nvSpPr>
+        <p:spPr>
+          <a:xfrm>
+            <a:off x="859536" y="3319272"/>
+            <a:ext cx="566928" cy="566928"/>
+          </a:xfrm>
+          <a:prstGeom prst="ellipse">
+            <a:avLst/>
+          </a:prstGeom>
+          <a:solidFill>
+            <a:srgbClr val="1F9BD8"/>
+          </a:solidFill>
+          <a:ln/>
+          <a:effectLst>
+            <a:outerShdw blurRad="88900" dist="25400" dir="5400000" algn="bl" rotWithShape="0">
+              <a:srgbClr val="B8C9D4">
+                <a:alpha val="22000"/>
+              </a:srgbClr>
+            </a:outerShdw>
+          </a:effectLst>
+        </p:spPr>
+      </p:sp>
+      <p:pic>
+        <p:nvPicPr>
+          <p:cNvPr id="14" name="Image 1" descr="icons/shield.png"/>
+          <p:cNvPicPr>
+            <a:picLocks noChangeAspect="1"/>
+          </p:cNvPicPr>
+          <p:nvPr/>
+        </p:nvPicPr>
+        <p:blipFill>
+          <a:blip r:embed="rId4"/>
+          <a:stretch>
+            <a:fillRect/>
+          </a:stretch>
+        </p:blipFill>
+        <p:spPr>
+          <a:xfrm>
+            <a:off x="1029614" y="3489350"/>
+            <a:ext cx="226771" cy="226771"/>
+          </a:xfrm>
+          <a:prstGeom prst="rect">
+            <a:avLst/>
+          </a:prstGeom>
+        </p:spPr>
+      </p:pic>
+      <p:sp>
+        <p:nvSpPr>
+          <p:cNvPr id="15" name="Text 11"/>
+          <p:cNvSpPr/>
+          <p:nvPr/>
+        </p:nvSpPr>
+        <p:spPr>
+          <a:xfrm>
+            <a:off x="1664208" y="3227832"/>
+            <a:ext cx="4023360" cy="365760"/>
+          </a:xfrm>
+          <a:prstGeom prst="rect">
+            <a:avLst/>
+          </a:prstGeom>
+          <a:noFill/>
+          <a:ln/>
+        </p:spPr>
+        <p:txBody>
+          <a:bodyPr wrap="square" lIns="0" tIns="0" rIns="0" bIns="0" rtlCol="0" anchor="ctr"/>
+          <a:lstStyle/>
+          <a:p>
+            <a:pPr marL="0" indent="0">
+              <a:buNone/>
+            </a:pPr>
+            <a:r>
+              <a:rPr lang="en-US" sz="1450" b="1" dirty="0">
+                <a:solidFill>
+                  <a:srgbClr val="111418"/>
+                </a:solidFill>
+                <a:latin typeface="Calibri" pitchFamily="34" charset="0"/>
+                <a:ea typeface="Calibri" pitchFamily="34" charset="-122"/>
+                <a:cs typeface="Calibri" pitchFamily="34" charset="-120"/>
+              </a:rPr>
+              <a:t>Политика отказов ML</a:t>
+            </a:r>
+            <a:endParaRPr lang="en-US" sz="1450" dirty="0"/>
+          </a:p>
+        </p:txBody>
+      </p:sp>
+      <p:sp>
+        <p:nvSpPr>
+          <p:cNvPr id="16" name="Text 12"/>
+          <p:cNvSpPr/>
+          <p:nvPr/>
+        </p:nvSpPr>
+        <p:spPr>
+          <a:xfrm>
+            <a:off x="1664208" y="3593592"/>
+            <a:ext cx="4023360" cy="502920"/>
+          </a:xfrm>
+          <a:prstGeom prst="rect">
+            <a:avLst/>
+          </a:prstGeom>
+          <a:noFill/>
+          <a:ln/>
+        </p:spPr>
+        <p:txBody>
+          <a:bodyPr wrap="square" lIns="0" tIns="0" rIns="0" bIns="0" rtlCol="0" anchor="t"/>
+          <a:lstStyle/>
+          <a:p>
+            <a:pPr marL="0" indent="0">
+              <a:lnSpc>
+                <a:spcPct val="100000"/>
+              </a:lnSpc>
+              <a:buNone/>
+            </a:pPr>
+            <a:r>
+              <a:rPr lang="en-US" sz="1150" dirty="0">
+                <a:solidFill>
+                  <a:srgbClr val="33383F"/>
+                </a:solidFill>
+                <a:latin typeface="Calibri" pitchFamily="34" charset="0"/>
+                <a:ea typeface="Calibri" pitchFamily="34" charset="-122"/>
+                <a:cs typeface="Calibri" pitchFamily="34" charset="-120"/>
+              </a:rPr>
+              <a:t>чёткий fallback или 503 при недоступности ML-сервиса</a:t>
+            </a:r>
+            <a:endParaRPr lang="en-US" sz="1150" dirty="0"/>
+          </a:p>
+        </p:txBody>
+      </p:sp>
+      <p:sp>
+        <p:nvSpPr>
+          <p:cNvPr id="17" name="Shape 13"/>
+          <p:cNvSpPr/>
+          <p:nvPr/>
+        </p:nvSpPr>
+        <p:spPr>
+          <a:xfrm>
+            <a:off x="640080" y="4343400"/>
+            <a:ext cx="5212080" cy="1078992"/>
+          </a:xfrm>
+          <a:prstGeom prst="roundRect">
+            <a:avLst>
+              <a:gd name="adj" fmla="val 6780"/>
+            </a:avLst>
+          </a:prstGeom>
+          <a:solidFill>
+            <a:srgbClr val="F4FAFD"/>
+          </a:solidFill>
+          <a:ln w="12700">
+            <a:solidFill>
+              <a:srgbClr val="DCE6EC"/>
+            </a:solidFill>
+            <a:prstDash val="solid"/>
+          </a:ln>
+        </p:spPr>
+      </p:sp>
+      <p:sp>
+        <p:nvSpPr>
+          <p:cNvPr id="18" name="Shape 14"/>
+          <p:cNvSpPr/>
+          <p:nvPr/>
+        </p:nvSpPr>
+        <p:spPr>
+          <a:xfrm>
+            <a:off x="859536" y="4599432"/>
+            <a:ext cx="566928" cy="566928"/>
+          </a:xfrm>
+          <a:prstGeom prst="ellipse">
+            <a:avLst/>
+          </a:prstGeom>
+          <a:solidFill>
+            <a:srgbClr val="1F9BD8"/>
+          </a:solidFill>
+          <a:ln/>
+          <a:effectLst>
+            <a:outerShdw blurRad="88900" dist="25400" dir="5400000" algn="bl" rotWithShape="0">
+              <a:srgbClr val="B8C9D4">
+                <a:alpha val="22000"/>
+              </a:srgbClr>
+            </a:outerShdw>
+          </a:effectLst>
+        </p:spPr>
+      </p:sp>
+      <p:pic>
+        <p:nvPicPr>
+          <p:cNvPr id="19" name="Image 2" descr="icons/container.png"/>
+          <p:cNvPicPr>
+            <a:picLocks noChangeAspect="1"/>
+          </p:cNvPicPr>
+          <p:nvPr/>
+        </p:nvPicPr>
+        <p:blipFill>
+          <a:blip r:embed="rId5"/>
+          <a:stretch>
+            <a:fillRect/>
+          </a:stretch>
+        </p:blipFill>
+        <p:spPr>
+          <a:xfrm>
+            <a:off x="1029614" y="4769510"/>
+            <a:ext cx="226771" cy="226771"/>
+          </a:xfrm>
+          <a:prstGeom prst="rect">
+            <a:avLst/>
+          </a:prstGeom>
+        </p:spPr>
+      </p:pic>
+      <p:sp>
+        <p:nvSpPr>
+          <p:cNvPr id="20" name="Text 15"/>
+          <p:cNvSpPr/>
+          <p:nvPr/>
+        </p:nvSpPr>
+        <p:spPr>
+          <a:xfrm>
+            <a:off x="1664208" y="4507992"/>
+            <a:ext cx="4023360" cy="365760"/>
+          </a:xfrm>
+          <a:prstGeom prst="rect">
+            <a:avLst/>
+          </a:prstGeom>
+          <a:noFill/>
+          <a:ln/>
+        </p:spPr>
+        <p:txBody>
+          <a:bodyPr wrap="square" lIns="0" tIns="0" rIns="0" bIns="0" rtlCol="0" anchor="ctr"/>
+          <a:lstStyle/>
+          <a:p>
+            <a:pPr marL="0" indent="0">
+              <a:buNone/>
+            </a:pPr>
+            <a:r>
+              <a:rPr lang="en-US" sz="1450" b="1" dirty="0">
+                <a:solidFill>
+                  <a:srgbClr val="111418"/>
+                </a:solidFill>
+                <a:latin typeface="Calibri" pitchFamily="34" charset="0"/>
+                <a:ea typeface="Calibri" pitchFamily="34" charset="-122"/>
+                <a:cs typeface="Calibri" pitchFamily="34" charset="-120"/>
+              </a:rPr>
+              <a:t>Масштабирование</a:t>
+            </a:r>
+            <a:endParaRPr lang="en-US" sz="1450" dirty="0"/>
+          </a:p>
+        </p:txBody>
+      </p:sp>
+      <p:sp>
+        <p:nvSpPr>
+          <p:cNvPr id="21" name="Text 16"/>
+          <p:cNvSpPr/>
+          <p:nvPr/>
+        </p:nvSpPr>
+        <p:spPr>
+          <a:xfrm>
+            <a:off x="1664208" y="4873752"/>
+            <a:ext cx="4023360" cy="502920"/>
+          </a:xfrm>
+          <a:prstGeom prst="rect">
+            <a:avLst/>
+          </a:prstGeom>
+          <a:noFill/>
+          <a:ln/>
+        </p:spPr>
+        <p:txBody>
+          <a:bodyPr wrap="square" lIns="0" tIns="0" rIns="0" bIns="0" rtlCol="0" anchor="t"/>
+          <a:lstStyle/>
+          <a:p>
+            <a:pPr marL="0" indent="0">
+              <a:lnSpc>
+                <a:spcPct val="100000"/>
+              </a:lnSpc>
+              <a:buNone/>
+            </a:pPr>
+            <a:r>
+              <a:rPr lang="en-US" sz="1150" dirty="0">
+                <a:solidFill>
+                  <a:srgbClr val="33383F"/>
+                </a:solidFill>
+                <a:latin typeface="Calibri" pitchFamily="34" charset="0"/>
+                <a:ea typeface="Calibri" pitchFamily="34" charset="-122"/>
+                <a:cs typeface="Calibri" pitchFamily="34" charset="-120"/>
+              </a:rPr>
+              <a:t>несколько воркеров backend, пул соединений, готовность к k8s</a:t>
+            </a:r>
+            <a:endParaRPr lang="en-US" sz="1150" dirty="0"/>
+          </a:p>
+        </p:txBody>
+      </p:sp>
+      <p:sp>
+        <p:nvSpPr>
+          <p:cNvPr id="22" name="Shape 17"/>
+          <p:cNvSpPr/>
+          <p:nvPr/>
+        </p:nvSpPr>
+        <p:spPr>
+          <a:xfrm>
+            <a:off x="6766560" y="1783080"/>
+            <a:ext cx="4785055" cy="4160520"/>
+          </a:xfrm>
+          <a:prstGeom prst="roundRect">
+            <a:avLst>
+              <a:gd name="adj" fmla="val 2198"/>
+            </a:avLst>
+          </a:prstGeom>
+          <a:solidFill>
+            <a:srgbClr val="0B5E88"/>
+          </a:solidFill>
+          <a:ln/>
+          <a:effectLst>
+            <a:outerShdw blurRad="114300" dist="38100" dir="5400000" algn="bl" rotWithShape="0">
+              <a:srgbClr val="9FB6C4">
+                <a:alpha val="28000"/>
+              </a:srgbClr>
+            </a:outerShdw>
+          </a:effectLst>
+        </p:spPr>
+      </p:sp>
+      <p:sp>
+        <p:nvSpPr>
+          <p:cNvPr id="23" name="Text 18"/>
+          <p:cNvSpPr/>
+          <p:nvPr/>
+        </p:nvSpPr>
+        <p:spPr>
+          <a:xfrm>
+            <a:off x="6766560" y="2057400"/>
+            <a:ext cx="4785055" cy="274320"/>
+          </a:xfrm>
+          <a:prstGeom prst="rect">
+            <a:avLst/>
+          </a:prstGeom>
+          <a:noFill/>
+          <a:ln/>
+        </p:spPr>
+        <p:txBody>
+          <a:bodyPr wrap="square" lIns="0" tIns="0" rIns="0" bIns="0" rtlCol="0" anchor="ctr"/>
+          <a:lstStyle/>
+          <a:p>
+            <a:pPr marL="0" indent="0" algn="ctr">
+              <a:buNone/>
+            </a:pPr>
+            <a:r>
+              <a:rPr lang="en-US" sz="1200" b="1" kern="0" spc="200" dirty="0">
+                <a:solidFill>
+                  <a:srgbClr val="8FD0EE"/>
+                </a:solidFill>
+                <a:latin typeface="Calibri" pitchFamily="34" charset="0"/>
+                <a:ea typeface="Calibri" pitchFamily="34" charset="-122"/>
+                <a:cs typeface="Calibri" pitchFamily="34" charset="-120"/>
+              </a:rPr>
+              <a:t>РЕПОЗИТОРИЙ ПРОЕКТА</a:t>
+            </a:r>
+            <a:endParaRPr lang="en-US" sz="1200" dirty="0"/>
+          </a:p>
+        </p:txBody>
+      </p:sp>
+      <p:sp>
+        <p:nvSpPr>
+          <p:cNvPr id="24" name="Shape 19"/>
+          <p:cNvSpPr/>
+          <p:nvPr/>
+        </p:nvSpPr>
+        <p:spPr>
+          <a:xfrm>
+            <a:off x="7924648" y="2468880"/>
+            <a:ext cx="2468880" cy="2468880"/>
+          </a:xfrm>
+          <a:prstGeom prst="roundRect">
+            <a:avLst>
+              <a:gd name="adj" fmla="val 2963"/>
+            </a:avLst>
+          </a:prstGeom>
+          <a:solidFill>
+            <a:srgbClr val="FFFFFF"/>
+          </a:solidFill>
+          <a:ln/>
+        </p:spPr>
+      </p:sp>
+      <p:pic>
+        <p:nvPicPr>
+          <p:cNvPr id="25" name="Image 3" descr="qr_git.png"/>
+          <p:cNvPicPr>
+            <a:picLocks noChangeAspect="1"/>
+          </p:cNvPicPr>
+          <p:nvPr/>
+        </p:nvPicPr>
+        <p:blipFill>
+          <a:blip r:embed="rId6"/>
+          <a:stretch>
+            <a:fillRect/>
+          </a:stretch>
+        </p:blipFill>
+        <p:spPr>
+          <a:xfrm>
+            <a:off x="8070952" y="2615184"/>
+            <a:ext cx="2176272" cy="2176272"/>
+          </a:xfrm>
+          <a:prstGeom prst="rect">
+            <a:avLst/>
+          </a:prstGeom>
+        </p:spPr>
+      </p:pic>
+      <p:sp>
+        <p:nvSpPr>
+          <p:cNvPr id="26" name="Text 20"/>
+          <p:cNvSpPr/>
+          <p:nvPr/>
+        </p:nvSpPr>
+        <p:spPr>
+          <a:xfrm>
+            <a:off x="6766560" y="5074920"/>
+            <a:ext cx="4785055" cy="365760"/>
+          </a:xfrm>
+          <a:prstGeom prst="rect">
+            <a:avLst/>
+          </a:prstGeom>
+          <a:noFill/>
+          <a:ln/>
+        </p:spPr>
+        <p:txBody>
+          <a:bodyPr wrap="square" lIns="0" tIns="0" rIns="0" bIns="0" rtlCol="0" anchor="ctr"/>
+          <a:lstStyle/>
+          <a:p>
+            <a:pPr marL="0" indent="0" algn="ctr">
+              <a:buNone/>
+            </a:pPr>
+            <a:r>
+              <a:rPr lang="en-US" sz="1150" b="1" dirty="0">
                 <a:solidFill>
                   <a:srgbClr val="FFFFFF"/>
                 </a:solidFill>
@@ -3133,13 +3056,38 @@
                 <a:ea typeface="Calibri" pitchFamily="34" charset="-122"/>
                 <a:cs typeface="Calibri" pitchFamily="34" charset="-120"/>
               </a:rPr>
-              <a:t>Самигуллин Максим Ринатович  ·  Backend-инженер</a:t>
-            </a:r>
-            <a:pPr indent="0" marL="0">
-              <a:buNone/>
-            </a:pPr>
-            <a:r>
-              <a:rPr lang="en-US" sz="1400" dirty="0">
+              <a:t>github.com/Antizi/diplom-Game_Plugs_Ai</a:t>
+            </a:r>
+            <a:endParaRPr lang="en-US" sz="1150" dirty="0"/>
+          </a:p>
+        </p:txBody>
+      </p:sp>
+      <p:sp>
+        <p:nvSpPr>
+          <p:cNvPr id="27" name="Text 21"/>
+          <p:cNvSpPr/>
+          <p:nvPr/>
+        </p:nvSpPr>
+        <p:spPr>
+          <a:xfrm>
+            <a:off x="6766560" y="5440680"/>
+            <a:ext cx="4785055" cy="274320"/>
+          </a:xfrm>
+          <a:prstGeom prst="rect">
+            <a:avLst/>
+          </a:prstGeom>
+          <a:noFill/>
+          <a:ln/>
+        </p:spPr>
+        <p:txBody>
+          <a:bodyPr wrap="square" lIns="0" tIns="0" rIns="0" bIns="0" rtlCol="0" anchor="ctr"/>
+          <a:lstStyle/>
+          <a:p>
+            <a:pPr marL="0" indent="0" algn="ctr">
+              <a:buNone/>
+            </a:pPr>
+            <a:r>
+              <a:rPr lang="en-US" sz="1000" dirty="0">
                 <a:solidFill>
                   <a:srgbClr val="9FD4EE"/>
                 </a:solidFill>
@@ -3147,48 +3095,9 @@
                 <a:ea typeface="Calibri" pitchFamily="34" charset="-122"/>
                 <a:cs typeface="Calibri" pitchFamily="34" charset="-120"/>
               </a:rPr>
-              <a:t xml:space="preserve">   ·   Группа МВИ-122</a:t>
-            </a:r>
-            <a:endParaRPr lang="en-US" sz="1400" dirty="0"/>
-          </a:p>
-        </p:txBody>
-      </p:sp>
-      <p:sp>
-        <p:nvSpPr>
-          <p:cNvPr id="27" name="Text 25"/>
-          <p:cNvSpPr/>
-          <p:nvPr/>
-        </p:nvSpPr>
-        <p:spPr>
-          <a:xfrm>
-            <a:off x="640080" y="5349240"/>
-            <a:ext cx="10515600" cy="365760"/>
-          </a:xfrm>
-          <a:prstGeom prst="rect">
-            <a:avLst/>
-          </a:prstGeom>
-          <a:noFill/>
-          <a:ln/>
-        </p:spPr>
-        <p:txBody>
-          <a:bodyPr wrap="square" lIns="0" tIns="0" rIns="0" bIns="0" rtlCol="0" anchor="ctr"/>
-          <a:lstStyle/>
-          <a:p>
-            <a:pPr indent="0" marL="0">
-              <a:buNone/>
-            </a:pPr>
-            <a:r>
-              <a:rPr lang="en-US" sz="1250" dirty="0">
-                <a:solidFill>
-                  <a:srgbClr val="9FD4EE"/>
-                </a:solidFill>
-                <a:latin typeface="Calibri" pitchFamily="34" charset="0"/>
-                <a:ea typeface="Calibri" pitchFamily="34" charset="-122"/>
-                <a:cs typeface="Calibri" pitchFamily="34" charset="-120"/>
-              </a:rPr>
-              <a:t>Научный руководитель: Минаева Н. В., ст. преподаватель</a:t>
-            </a:r>
-            <a:endParaRPr lang="en-US" sz="1250" dirty="0"/>
+              <a:t>Наведите камеру телефона на QR-код</a:t>
+            </a:r>
+            <a:endParaRPr lang="en-US" sz="1000" dirty="0"/>
           </a:p>
         </p:txBody>
       </p:sp>
@@ -3201,6 +3110,1308 @@
 </file>
 
 <file path=ppt/slides/slide11.xml><?xml version="1.0" encoding="utf-8"?>
+<p:sld xmlns:a="http://schemas.openxmlformats.org/drawingml/2006/main" xmlns:r="http://schemas.openxmlformats.org/officeDocument/2006/relationships" xmlns:p="http://schemas.openxmlformats.org/presentationml/2006/main">
+  <p:cSld name="Slide 10">
+    <p:bg>
+      <p:bgPr>
+        <a:solidFill>
+          <a:srgbClr val="0B5E88"/>
+        </a:solidFill>
+        <a:effectLst/>
+      </p:bgPr>
+    </p:bg>
+    <p:spTree>
+      <p:nvGrpSpPr>
+        <p:cNvPr id="1" name=""/>
+        <p:cNvGrpSpPr/>
+        <p:nvPr/>
+      </p:nvGrpSpPr>
+      <p:grpSpPr>
+        <a:xfrm>
+          <a:off x="0" y="0"/>
+          <a:ext cx="0" cy="0"/>
+          <a:chOff x="0" y="0"/>
+          <a:chExt cx="0" cy="0"/>
+        </a:xfrm>
+      </p:grpSpPr>
+      <p:sp>
+        <p:nvSpPr>
+          <p:cNvPr id="2" name="Shape 0"/>
+          <p:cNvSpPr/>
+          <p:nvPr/>
+        </p:nvSpPr>
+        <p:spPr>
+          <a:xfrm>
+            <a:off x="640080" y="5760720"/>
+            <a:ext cx="54864" cy="54864"/>
+          </a:xfrm>
+          <a:prstGeom prst="ellipse">
+            <a:avLst/>
+          </a:prstGeom>
+          <a:solidFill>
+            <a:srgbClr val="3E8FB8"/>
+          </a:solidFill>
+          <a:ln/>
+        </p:spPr>
+      </p:sp>
+      <p:sp>
+        <p:nvSpPr>
+          <p:cNvPr id="3" name="Shape 1"/>
+          <p:cNvSpPr/>
+          <p:nvPr/>
+        </p:nvSpPr>
+        <p:spPr>
+          <a:xfrm>
+            <a:off x="640080" y="6126480"/>
+            <a:ext cx="54864" cy="54864"/>
+          </a:xfrm>
+          <a:prstGeom prst="ellipse">
+            <a:avLst/>
+          </a:prstGeom>
+          <a:solidFill>
+            <a:srgbClr val="3E8FB8"/>
+          </a:solidFill>
+          <a:ln/>
+        </p:spPr>
+      </p:sp>
+      <p:sp>
+        <p:nvSpPr>
+          <p:cNvPr id="4" name="Shape 2"/>
+          <p:cNvSpPr/>
+          <p:nvPr/>
+        </p:nvSpPr>
+        <p:spPr>
+          <a:xfrm>
+            <a:off x="640080" y="6492240"/>
+            <a:ext cx="54864" cy="54864"/>
+          </a:xfrm>
+          <a:prstGeom prst="ellipse">
+            <a:avLst/>
+          </a:prstGeom>
+          <a:solidFill>
+            <a:srgbClr val="3E8FB8"/>
+          </a:solidFill>
+          <a:ln/>
+        </p:spPr>
+      </p:sp>
+      <p:sp>
+        <p:nvSpPr>
+          <p:cNvPr id="5" name="Shape 3"/>
+          <p:cNvSpPr/>
+          <p:nvPr/>
+        </p:nvSpPr>
+        <p:spPr>
+          <a:xfrm>
+            <a:off x="1097280" y="5760720"/>
+            <a:ext cx="54864" cy="54864"/>
+          </a:xfrm>
+          <a:prstGeom prst="ellipse">
+            <a:avLst/>
+          </a:prstGeom>
+          <a:solidFill>
+            <a:srgbClr val="3E8FB8"/>
+          </a:solidFill>
+          <a:ln/>
+        </p:spPr>
+      </p:sp>
+      <p:sp>
+        <p:nvSpPr>
+          <p:cNvPr id="6" name="Shape 4"/>
+          <p:cNvSpPr/>
+          <p:nvPr/>
+        </p:nvSpPr>
+        <p:spPr>
+          <a:xfrm>
+            <a:off x="1097280" y="6126480"/>
+            <a:ext cx="54864" cy="54864"/>
+          </a:xfrm>
+          <a:prstGeom prst="ellipse">
+            <a:avLst/>
+          </a:prstGeom>
+          <a:solidFill>
+            <a:srgbClr val="3E8FB8"/>
+          </a:solidFill>
+          <a:ln/>
+        </p:spPr>
+      </p:sp>
+      <p:sp>
+        <p:nvSpPr>
+          <p:cNvPr id="7" name="Shape 5"/>
+          <p:cNvSpPr/>
+          <p:nvPr/>
+        </p:nvSpPr>
+        <p:spPr>
+          <a:xfrm>
+            <a:off x="1097280" y="6492240"/>
+            <a:ext cx="54864" cy="54864"/>
+          </a:xfrm>
+          <a:prstGeom prst="ellipse">
+            <a:avLst/>
+          </a:prstGeom>
+          <a:solidFill>
+            <a:srgbClr val="3E8FB8"/>
+          </a:solidFill>
+          <a:ln/>
+        </p:spPr>
+      </p:sp>
+      <p:sp>
+        <p:nvSpPr>
+          <p:cNvPr id="8" name="Shape 6"/>
+          <p:cNvSpPr/>
+          <p:nvPr/>
+        </p:nvSpPr>
+        <p:spPr>
+          <a:xfrm>
+            <a:off x="1554480" y="5760720"/>
+            <a:ext cx="54864" cy="54864"/>
+          </a:xfrm>
+          <a:prstGeom prst="ellipse">
+            <a:avLst/>
+          </a:prstGeom>
+          <a:solidFill>
+            <a:srgbClr val="3E8FB8"/>
+          </a:solidFill>
+          <a:ln/>
+        </p:spPr>
+      </p:sp>
+      <p:sp>
+        <p:nvSpPr>
+          <p:cNvPr id="9" name="Shape 7"/>
+          <p:cNvSpPr/>
+          <p:nvPr/>
+        </p:nvSpPr>
+        <p:spPr>
+          <a:xfrm>
+            <a:off x="1554480" y="6126480"/>
+            <a:ext cx="54864" cy="54864"/>
+          </a:xfrm>
+          <a:prstGeom prst="ellipse">
+            <a:avLst/>
+          </a:prstGeom>
+          <a:solidFill>
+            <a:srgbClr val="3E8FB8"/>
+          </a:solidFill>
+          <a:ln/>
+        </p:spPr>
+      </p:sp>
+      <p:sp>
+        <p:nvSpPr>
+          <p:cNvPr id="10" name="Shape 8"/>
+          <p:cNvSpPr/>
+          <p:nvPr/>
+        </p:nvSpPr>
+        <p:spPr>
+          <a:xfrm>
+            <a:off x="1554480" y="6492240"/>
+            <a:ext cx="54864" cy="54864"/>
+          </a:xfrm>
+          <a:prstGeom prst="ellipse">
+            <a:avLst/>
+          </a:prstGeom>
+          <a:solidFill>
+            <a:srgbClr val="3E8FB8"/>
+          </a:solidFill>
+          <a:ln/>
+        </p:spPr>
+      </p:sp>
+      <p:sp>
+        <p:nvSpPr>
+          <p:cNvPr id="11" name="Shape 9"/>
+          <p:cNvSpPr/>
+          <p:nvPr/>
+        </p:nvSpPr>
+        <p:spPr>
+          <a:xfrm>
+            <a:off x="2011680" y="5760720"/>
+            <a:ext cx="54864" cy="54864"/>
+          </a:xfrm>
+          <a:prstGeom prst="ellipse">
+            <a:avLst/>
+          </a:prstGeom>
+          <a:solidFill>
+            <a:srgbClr val="3E8FB8"/>
+          </a:solidFill>
+          <a:ln/>
+        </p:spPr>
+      </p:sp>
+      <p:sp>
+        <p:nvSpPr>
+          <p:cNvPr id="12" name="Shape 10"/>
+          <p:cNvSpPr/>
+          <p:nvPr/>
+        </p:nvSpPr>
+        <p:spPr>
+          <a:xfrm>
+            <a:off x="2011680" y="6126480"/>
+            <a:ext cx="54864" cy="54864"/>
+          </a:xfrm>
+          <a:prstGeom prst="ellipse">
+            <a:avLst/>
+          </a:prstGeom>
+          <a:solidFill>
+            <a:srgbClr val="3E8FB8"/>
+          </a:solidFill>
+          <a:ln/>
+        </p:spPr>
+      </p:sp>
+      <p:sp>
+        <p:nvSpPr>
+          <p:cNvPr id="13" name="Shape 11"/>
+          <p:cNvSpPr/>
+          <p:nvPr/>
+        </p:nvSpPr>
+        <p:spPr>
+          <a:xfrm>
+            <a:off x="2011680" y="6492240"/>
+            <a:ext cx="54864" cy="54864"/>
+          </a:xfrm>
+          <a:prstGeom prst="ellipse">
+            <a:avLst/>
+          </a:prstGeom>
+          <a:solidFill>
+            <a:srgbClr val="3E8FB8"/>
+          </a:solidFill>
+          <a:ln/>
+        </p:spPr>
+      </p:sp>
+      <p:sp>
+        <p:nvSpPr>
+          <p:cNvPr id="14" name="Shape 12"/>
+          <p:cNvSpPr/>
+          <p:nvPr/>
+        </p:nvSpPr>
+        <p:spPr>
+          <a:xfrm>
+            <a:off x="2468880" y="5760720"/>
+            <a:ext cx="54864" cy="54864"/>
+          </a:xfrm>
+          <a:prstGeom prst="ellipse">
+            <a:avLst/>
+          </a:prstGeom>
+          <a:solidFill>
+            <a:srgbClr val="3E8FB8"/>
+          </a:solidFill>
+          <a:ln/>
+        </p:spPr>
+      </p:sp>
+      <p:sp>
+        <p:nvSpPr>
+          <p:cNvPr id="15" name="Shape 13"/>
+          <p:cNvSpPr/>
+          <p:nvPr/>
+        </p:nvSpPr>
+        <p:spPr>
+          <a:xfrm>
+            <a:off x="2468880" y="6126480"/>
+            <a:ext cx="54864" cy="54864"/>
+          </a:xfrm>
+          <a:prstGeom prst="ellipse">
+            <a:avLst/>
+          </a:prstGeom>
+          <a:solidFill>
+            <a:srgbClr val="3E8FB8"/>
+          </a:solidFill>
+          <a:ln/>
+        </p:spPr>
+      </p:sp>
+      <p:sp>
+        <p:nvSpPr>
+          <p:cNvPr id="16" name="Shape 14"/>
+          <p:cNvSpPr/>
+          <p:nvPr/>
+        </p:nvSpPr>
+        <p:spPr>
+          <a:xfrm>
+            <a:off x="2468880" y="6492240"/>
+            <a:ext cx="54864" cy="54864"/>
+          </a:xfrm>
+          <a:prstGeom prst="ellipse">
+            <a:avLst/>
+          </a:prstGeom>
+          <a:solidFill>
+            <a:srgbClr val="3E8FB8"/>
+          </a:solidFill>
+          <a:ln/>
+        </p:spPr>
+      </p:sp>
+      <p:sp>
+        <p:nvSpPr>
+          <p:cNvPr id="17" name="Shape 15"/>
+          <p:cNvSpPr/>
+          <p:nvPr/>
+        </p:nvSpPr>
+        <p:spPr>
+          <a:xfrm>
+            <a:off x="2926080" y="5760720"/>
+            <a:ext cx="54864" cy="54864"/>
+          </a:xfrm>
+          <a:prstGeom prst="ellipse">
+            <a:avLst/>
+          </a:prstGeom>
+          <a:solidFill>
+            <a:srgbClr val="3E8FB8"/>
+          </a:solidFill>
+          <a:ln/>
+        </p:spPr>
+      </p:sp>
+      <p:sp>
+        <p:nvSpPr>
+          <p:cNvPr id="18" name="Shape 16"/>
+          <p:cNvSpPr/>
+          <p:nvPr/>
+        </p:nvSpPr>
+        <p:spPr>
+          <a:xfrm>
+            <a:off x="2926080" y="6126480"/>
+            <a:ext cx="54864" cy="54864"/>
+          </a:xfrm>
+          <a:prstGeom prst="ellipse">
+            <a:avLst/>
+          </a:prstGeom>
+          <a:solidFill>
+            <a:srgbClr val="3E8FB8"/>
+          </a:solidFill>
+          <a:ln/>
+        </p:spPr>
+      </p:sp>
+      <p:sp>
+        <p:nvSpPr>
+          <p:cNvPr id="19" name="Shape 17"/>
+          <p:cNvSpPr/>
+          <p:nvPr/>
+        </p:nvSpPr>
+        <p:spPr>
+          <a:xfrm>
+            <a:off x="2926080" y="6492240"/>
+            <a:ext cx="54864" cy="54864"/>
+          </a:xfrm>
+          <a:prstGeom prst="ellipse">
+            <a:avLst/>
+          </a:prstGeom>
+          <a:solidFill>
+            <a:srgbClr val="3E8FB8"/>
+          </a:solidFill>
+          <a:ln/>
+        </p:spPr>
+      </p:sp>
+      <p:sp>
+        <p:nvSpPr>
+          <p:cNvPr id="20" name="Shape 18"/>
+          <p:cNvSpPr/>
+          <p:nvPr/>
+        </p:nvSpPr>
+        <p:spPr>
+          <a:xfrm>
+            <a:off x="3383280" y="5760720"/>
+            <a:ext cx="54864" cy="54864"/>
+          </a:xfrm>
+          <a:prstGeom prst="ellipse">
+            <a:avLst/>
+          </a:prstGeom>
+          <a:solidFill>
+            <a:srgbClr val="3E8FB8"/>
+          </a:solidFill>
+          <a:ln/>
+        </p:spPr>
+      </p:sp>
+      <p:sp>
+        <p:nvSpPr>
+          <p:cNvPr id="21" name="Shape 19"/>
+          <p:cNvSpPr/>
+          <p:nvPr/>
+        </p:nvSpPr>
+        <p:spPr>
+          <a:xfrm>
+            <a:off x="3383280" y="6126480"/>
+            <a:ext cx="54864" cy="54864"/>
+          </a:xfrm>
+          <a:prstGeom prst="ellipse">
+            <a:avLst/>
+          </a:prstGeom>
+          <a:solidFill>
+            <a:srgbClr val="3E8FB8"/>
+          </a:solidFill>
+          <a:ln/>
+        </p:spPr>
+      </p:sp>
+      <p:sp>
+        <p:nvSpPr>
+          <p:cNvPr id="22" name="Shape 20"/>
+          <p:cNvSpPr/>
+          <p:nvPr/>
+        </p:nvSpPr>
+        <p:spPr>
+          <a:xfrm>
+            <a:off x="3383280" y="6492240"/>
+            <a:ext cx="54864" cy="54864"/>
+          </a:xfrm>
+          <a:prstGeom prst="ellipse">
+            <a:avLst/>
+          </a:prstGeom>
+          <a:solidFill>
+            <a:srgbClr val="3E8FB8"/>
+          </a:solidFill>
+          <a:ln/>
+        </p:spPr>
+      </p:sp>
+      <p:sp>
+        <p:nvSpPr>
+          <p:cNvPr id="23" name="Text 21"/>
+          <p:cNvSpPr/>
+          <p:nvPr/>
+        </p:nvSpPr>
+        <p:spPr>
+          <a:xfrm>
+            <a:off x="640080" y="2011680"/>
+            <a:ext cx="10058400" cy="365760"/>
+          </a:xfrm>
+          <a:prstGeom prst="rect">
+            <a:avLst/>
+          </a:prstGeom>
+          <a:noFill/>
+          <a:ln/>
+        </p:spPr>
+        <p:txBody>
+          <a:bodyPr wrap="square" lIns="0" tIns="0" rIns="0" bIns="0" rtlCol="0" anchor="ctr"/>
+          <a:lstStyle/>
+          <a:p>
+            <a:pPr marL="0" indent="0">
+              <a:buNone/>
+            </a:pPr>
+            <a:r>
+              <a:rPr lang="en-US" sz="2000" b="1" kern="0" spc="300" dirty="0">
+                <a:solidFill>
+                  <a:srgbClr val="8FD0EE"/>
+                </a:solidFill>
+                <a:latin typeface="Calibri" pitchFamily="34" charset="0"/>
+                <a:ea typeface="Calibri" pitchFamily="34" charset="-122"/>
+                <a:cs typeface="Calibri" pitchFamily="34" charset="-120"/>
+              </a:rPr>
+              <a:t>СПАСИБО ЗА ВНИМАНИЕ</a:t>
+            </a:r>
+            <a:r>
+              <a:rPr lang="ru-RU" sz="2000" b="1" kern="0" spc="300" dirty="0">
+                <a:solidFill>
+                  <a:srgbClr val="8FD0EE"/>
+                </a:solidFill>
+                <a:latin typeface="Calibri" pitchFamily="34" charset="0"/>
+                <a:ea typeface="Calibri" pitchFamily="34" charset="-122"/>
+                <a:cs typeface="Calibri" pitchFamily="34" charset="-120"/>
+              </a:rPr>
+              <a:t>!</a:t>
+            </a:r>
+            <a:endParaRPr lang="en-US" sz="2000" dirty="0"/>
+          </a:p>
+        </p:txBody>
+      </p:sp>
+      <p:sp>
+        <p:nvSpPr>
+          <p:cNvPr id="24" name="Text 22"/>
+          <p:cNvSpPr/>
+          <p:nvPr/>
+        </p:nvSpPr>
+        <p:spPr>
+          <a:xfrm>
+            <a:off x="640080" y="2423160"/>
+            <a:ext cx="10424160" cy="1371600"/>
+          </a:xfrm>
+          <a:prstGeom prst="rect">
+            <a:avLst/>
+          </a:prstGeom>
+          <a:noFill/>
+          <a:ln/>
+        </p:spPr>
+        <p:txBody>
+          <a:bodyPr wrap="square" lIns="0" tIns="0" rIns="0" bIns="0" rtlCol="0" anchor="t"/>
+          <a:lstStyle/>
+          <a:p>
+            <a:pPr marL="0" indent="0">
+              <a:lnSpc>
+                <a:spcPct val="102000"/>
+              </a:lnSpc>
+              <a:buNone/>
+            </a:pPr>
+            <a:r>
+              <a:rPr lang="en-US" sz="4400" b="1" dirty="0">
+                <a:solidFill>
+                  <a:srgbClr val="FFFFFF"/>
+                </a:solidFill>
+                <a:latin typeface="Cambria" pitchFamily="34" charset="0"/>
+                <a:ea typeface="Cambria" pitchFamily="34" charset="-122"/>
+                <a:cs typeface="Cambria" pitchFamily="34" charset="-120"/>
+              </a:rPr>
+              <a:t>Серверное решение для сбора</a:t>
+            </a:r>
+            <a:endParaRPr lang="en-US" sz="4400" dirty="0"/>
+          </a:p>
+          <a:p>
+            <a:pPr marL="0" indent="0">
+              <a:lnSpc>
+                <a:spcPct val="102000"/>
+              </a:lnSpc>
+              <a:buNone/>
+            </a:pPr>
+            <a:r>
+              <a:rPr lang="en-US" sz="4400" b="1" dirty="0">
+                <a:solidFill>
+                  <a:srgbClr val="FFFFFF"/>
+                </a:solidFill>
+                <a:latin typeface="Cambria" pitchFamily="34" charset="0"/>
+                <a:ea typeface="Cambria" pitchFamily="34" charset="-122"/>
+                <a:cs typeface="Cambria" pitchFamily="34" charset="-120"/>
+              </a:rPr>
+              <a:t>и анализа игровых данных</a:t>
+            </a:r>
+            <a:endParaRPr lang="en-US" sz="4400" dirty="0"/>
+          </a:p>
+        </p:txBody>
+      </p:sp>
+      <p:sp>
+        <p:nvSpPr>
+          <p:cNvPr id="26" name="Text 24"/>
+          <p:cNvSpPr/>
+          <p:nvPr/>
+        </p:nvSpPr>
+        <p:spPr>
+          <a:xfrm>
+            <a:off x="640080" y="4983480"/>
+            <a:ext cx="10515600" cy="365760"/>
+          </a:xfrm>
+          <a:prstGeom prst="rect">
+            <a:avLst/>
+          </a:prstGeom>
+          <a:noFill/>
+          <a:ln/>
+        </p:spPr>
+        <p:txBody>
+          <a:bodyPr wrap="square" lIns="0" tIns="0" rIns="0" bIns="0" rtlCol="0" anchor="ctr"/>
+          <a:lstStyle/>
+          <a:p>
+            <a:pPr marL="0" indent="0">
+              <a:buNone/>
+            </a:pPr>
+            <a:r>
+              <a:rPr lang="en-US" sz="1400" b="1" dirty="0">
+                <a:solidFill>
+                  <a:srgbClr val="FFFFFF"/>
+                </a:solidFill>
+                <a:latin typeface="Calibri" pitchFamily="34" charset="0"/>
+                <a:ea typeface="Calibri" pitchFamily="34" charset="-122"/>
+                <a:cs typeface="Calibri" pitchFamily="34" charset="-120"/>
+              </a:rPr>
+              <a:t>Самигуллин Максим Ринатович  ·  Backend-инженер</a:t>
+            </a:r>
+            <a:r>
+              <a:rPr lang="en-US" sz="1400" dirty="0">
+                <a:solidFill>
+                  <a:srgbClr val="9FD4EE"/>
+                </a:solidFill>
+                <a:latin typeface="Calibri" pitchFamily="34" charset="0"/>
+                <a:ea typeface="Calibri" pitchFamily="34" charset="-122"/>
+                <a:cs typeface="Calibri" pitchFamily="34" charset="-120"/>
+              </a:rPr>
+              <a:t>   ·   Группа МВИ-122</a:t>
+            </a:r>
+            <a:endParaRPr lang="en-US" sz="1400" dirty="0"/>
+          </a:p>
+        </p:txBody>
+      </p:sp>
+      <p:sp>
+        <p:nvSpPr>
+          <p:cNvPr id="27" name="Text 25"/>
+          <p:cNvSpPr/>
+          <p:nvPr/>
+        </p:nvSpPr>
+        <p:spPr>
+          <a:xfrm>
+            <a:off x="640080" y="5349240"/>
+            <a:ext cx="10515600" cy="365760"/>
+          </a:xfrm>
+          <a:prstGeom prst="rect">
+            <a:avLst/>
+          </a:prstGeom>
+          <a:noFill/>
+          <a:ln/>
+        </p:spPr>
+        <p:txBody>
+          <a:bodyPr wrap="square" lIns="0" tIns="0" rIns="0" bIns="0" rtlCol="0" anchor="ctr"/>
+          <a:lstStyle/>
+          <a:p>
+            <a:pPr marL="0" indent="0">
+              <a:buNone/>
+            </a:pPr>
+            <a:r>
+              <a:rPr lang="en-US" sz="1250" dirty="0">
+                <a:solidFill>
+                  <a:srgbClr val="9FD4EE"/>
+                </a:solidFill>
+                <a:latin typeface="Calibri" pitchFamily="34" charset="0"/>
+                <a:ea typeface="Calibri" pitchFamily="34" charset="-122"/>
+                <a:cs typeface="Calibri" pitchFamily="34" charset="-120"/>
+              </a:rPr>
+              <a:t>Научный руководитель: Минаева Н. В., ст. преподаватель</a:t>
+            </a:r>
+            <a:endParaRPr lang="en-US" sz="1250" dirty="0"/>
+          </a:p>
+        </p:txBody>
+      </p:sp>
+    </p:spTree>
+  </p:cSld>
+  <p:clrMapOvr>
+    <a:masterClrMapping/>
+  </p:clrMapOvr>
+</p:sld>
+</file>
+
+<file path=ppt/slides/slide2.xml><?xml version="1.0" encoding="utf-8"?>
+<p:sld xmlns:a="http://schemas.openxmlformats.org/drawingml/2006/main" xmlns:r="http://schemas.openxmlformats.org/officeDocument/2006/relationships" xmlns:p="http://schemas.openxmlformats.org/presentationml/2006/main">
+  <p:cSld name="Slide 2">
+    <p:bg>
+      <p:bgPr>
+        <a:solidFill>
+          <a:srgbClr val="FFFFFF"/>
+        </a:solidFill>
+        <a:effectLst/>
+      </p:bgPr>
+    </p:bg>
+    <p:spTree>
+      <p:nvGrpSpPr>
+        <p:cNvPr id="1" name=""/>
+        <p:cNvGrpSpPr/>
+        <p:nvPr/>
+      </p:nvGrpSpPr>
+      <p:grpSpPr>
+        <a:xfrm>
+          <a:off x="0" y="0"/>
+          <a:ext cx="0" cy="0"/>
+          <a:chOff x="0" y="0"/>
+          <a:chExt cx="0" cy="0"/>
+        </a:xfrm>
+      </p:grpSpPr>
+      <p:sp>
+        <p:nvSpPr>
+          <p:cNvPr id="2" name="Text 0"/>
+          <p:cNvSpPr/>
+          <p:nvPr/>
+        </p:nvSpPr>
+        <p:spPr>
+          <a:xfrm>
+            <a:off x="10820095" y="384048"/>
+            <a:ext cx="822960" cy="640080"/>
+          </a:xfrm>
+          <a:prstGeom prst="rect">
+            <a:avLst/>
+          </a:prstGeom>
+          <a:noFill/>
+          <a:ln/>
+        </p:spPr>
+        <p:txBody>
+          <a:bodyPr wrap="square" lIns="0" tIns="0" rIns="0" bIns="0" rtlCol="0" anchor="ctr"/>
+          <a:lstStyle/>
+          <a:p>
+            <a:pPr marL="0" indent="0" algn="r">
+              <a:buNone/>
+            </a:pPr>
+            <a:r>
+              <a:rPr lang="en-US" sz="3000" b="1" dirty="0">
+                <a:solidFill>
+                  <a:srgbClr val="C6D6E0"/>
+                </a:solidFill>
+                <a:latin typeface="Cambria" pitchFamily="34" charset="0"/>
+                <a:ea typeface="Cambria" pitchFamily="34" charset="-122"/>
+                <a:cs typeface="Cambria" pitchFamily="34" charset="-120"/>
+              </a:rPr>
+              <a:t>2</a:t>
+            </a:r>
+            <a:endParaRPr lang="en-US" sz="3000" dirty="0"/>
+          </a:p>
+        </p:txBody>
+      </p:sp>
+      <p:sp>
+        <p:nvSpPr>
+          <p:cNvPr id="3" name="Text 1"/>
+          <p:cNvSpPr/>
+          <p:nvPr/>
+        </p:nvSpPr>
+        <p:spPr>
+          <a:xfrm>
+            <a:off x="640080" y="475488"/>
+            <a:ext cx="8229600" cy="274320"/>
+          </a:xfrm>
+          <a:prstGeom prst="rect">
+            <a:avLst/>
+          </a:prstGeom>
+          <a:noFill/>
+          <a:ln/>
+        </p:spPr>
+        <p:txBody>
+          <a:bodyPr wrap="square" lIns="0" tIns="0" rIns="0" bIns="0" rtlCol="0" anchor="ctr"/>
+          <a:lstStyle/>
+          <a:p>
+            <a:pPr marL="0" indent="0">
+              <a:buNone/>
+            </a:pPr>
+            <a:r>
+              <a:rPr lang="en-US" sz="2000" b="1" kern="0" spc="250" dirty="0">
+                <a:solidFill>
+                  <a:srgbClr val="1F9BD8"/>
+                </a:solidFill>
+                <a:latin typeface="Calibri" pitchFamily="34" charset="0"/>
+                <a:ea typeface="Calibri" pitchFamily="34" charset="-122"/>
+                <a:cs typeface="Calibri" pitchFamily="34" charset="-120"/>
+              </a:rPr>
+              <a:t>АКТУАЛЬНОСТЬ</a:t>
+            </a:r>
+            <a:endParaRPr lang="en-US" sz="2000" dirty="0"/>
+          </a:p>
+        </p:txBody>
+      </p:sp>
+      <p:sp>
+        <p:nvSpPr>
+          <p:cNvPr id="4" name="Text 2"/>
+          <p:cNvSpPr/>
+          <p:nvPr/>
+        </p:nvSpPr>
+        <p:spPr>
+          <a:xfrm>
+            <a:off x="640080" y="749808"/>
+            <a:ext cx="10362895" cy="777240"/>
+          </a:xfrm>
+          <a:prstGeom prst="rect">
+            <a:avLst/>
+          </a:prstGeom>
+          <a:noFill/>
+          <a:ln/>
+        </p:spPr>
+        <p:txBody>
+          <a:bodyPr wrap="square" lIns="0" tIns="0" rIns="0" bIns="0" rtlCol="0" anchor="ctr"/>
+          <a:lstStyle/>
+          <a:p>
+            <a:pPr marL="0" indent="0">
+              <a:buNone/>
+            </a:pPr>
+            <a:r>
+              <a:rPr lang="en-US" sz="3000" b="1" dirty="0">
+                <a:solidFill>
+                  <a:srgbClr val="111418"/>
+                </a:solidFill>
+                <a:latin typeface="Cambria" pitchFamily="34" charset="0"/>
+                <a:ea typeface="Cambria" pitchFamily="34" charset="-122"/>
+                <a:cs typeface="Cambria" pitchFamily="34" charset="-120"/>
+              </a:rPr>
+              <a:t>Необходимость серверной части для телеметрии</a:t>
+            </a:r>
+            <a:endParaRPr lang="en-US" sz="3000" dirty="0"/>
+          </a:p>
+        </p:txBody>
+      </p:sp>
+      <p:sp>
+        <p:nvSpPr>
+          <p:cNvPr id="8" name="Shape 6"/>
+          <p:cNvSpPr/>
+          <p:nvPr/>
+        </p:nvSpPr>
+        <p:spPr>
+          <a:xfrm>
+            <a:off x="640080" y="2150000"/>
+            <a:ext cx="3474720" cy="3150000"/>
+          </a:xfrm>
+          <a:prstGeom prst="roundRect">
+            <a:avLst>
+              <a:gd name="adj" fmla="val 4500"/>
+            </a:avLst>
+          </a:prstGeom>
+          <a:solidFill>
+            <a:srgbClr val="F4FAFD"/>
+          </a:solidFill>
+          <a:ln w="12700">
+            <a:solidFill>
+              <a:srgbClr val="DCE6EC"/>
+            </a:solidFill>
+            <a:prstDash val="solid"/>
+          </a:ln>
+          <a:effectLst>
+            <a:outerShdw blurRad="88900" dist="25400" dir="5400000" algn="bl" rotWithShape="0">
+              <a:srgbClr val="B8C9D4">
+                <a:alpha val="22000"/>
+              </a:srgbClr>
+            </a:outerShdw>
+          </a:effectLst>
+        </p:spPr>
+      </p:sp>
+      <p:sp>
+        <p:nvSpPr>
+          <p:cNvPr id="9" name="Shape 7"/>
+          <p:cNvSpPr/>
+          <p:nvPr/>
+        </p:nvSpPr>
+        <p:spPr>
+          <a:xfrm>
+            <a:off x="970080" y="2530000"/>
+            <a:ext cx="700000" cy="700000"/>
+          </a:xfrm>
+          <a:prstGeom prst="ellipse">
+            <a:avLst/>
+          </a:prstGeom>
+          <a:solidFill>
+            <a:srgbClr val="1F9BD8"/>
+          </a:solidFill>
+          <a:ln/>
+          <a:effectLst>
+            <a:outerShdw blurRad="88900" dist="25400" dir="5400000" algn="bl" rotWithShape="0">
+              <a:srgbClr val="B8C9D4">
+                <a:alpha val="22000"/>
+              </a:srgbClr>
+            </a:outerShdw>
+          </a:effectLst>
+        </p:spPr>
+      </p:sp>
+      <p:pic>
+        <p:nvPicPr>
+          <p:cNvPr id="10" name="Image 0" descr="icons/database.png"/>
+          <p:cNvPicPr>
+            <a:picLocks noChangeAspect="1"/>
+          </p:cNvPicPr>
+          <p:nvPr/>
+        </p:nvPicPr>
+        <p:blipFill>
+          <a:blip r:embed="rId3"/>
+          <a:stretch>
+            <a:fillRect/>
+          </a:stretch>
+        </p:blipFill>
+        <p:spPr>
+          <a:xfrm>
+            <a:off x="1180080" y="2740000"/>
+            <a:ext cx="300000" cy="300000"/>
+          </a:xfrm>
+          <a:prstGeom prst="rect">
+            <a:avLst/>
+          </a:prstGeom>
+        </p:spPr>
+      </p:pic>
+      <p:sp>
+        <p:nvSpPr>
+          <p:cNvPr id="11" name="Text 8"/>
+          <p:cNvSpPr/>
+          <p:nvPr/>
+        </p:nvSpPr>
+        <p:spPr>
+          <a:xfrm>
+            <a:off x="970080" y="3780000"/>
+            <a:ext cx="2814720" cy="420000"/>
+          </a:xfrm>
+          <a:prstGeom prst="rect">
+            <a:avLst/>
+          </a:prstGeom>
+          <a:noFill/>
+          <a:ln/>
+        </p:spPr>
+        <p:txBody>
+          <a:bodyPr wrap="square" lIns="0" tIns="0" rIns="0" bIns="0" rtlCol="0" anchor="t"/>
+          <a:lstStyle/>
+          <a:p>
+            <a:pPr marL="0" indent="0">
+              <a:buNone/>
+            </a:pPr>
+            <a:r>
+              <a:rPr lang="en-US" sz="1700" b="1" dirty="0">
+                <a:solidFill>
+                  <a:srgbClr val="111418"/>
+                </a:solidFill>
+                <a:latin typeface="Calibri" pitchFamily="34" charset="0"/>
+                <a:ea typeface="Calibri" pitchFamily="34" charset="-122"/>
+                <a:cs typeface="Calibri" pitchFamily="34" charset="-120"/>
+              </a:rPr>
+              <a:t>Единое хранилище</a:t>
+            </a:r>
+            <a:endParaRPr lang="en-US" sz="1700" dirty="0"/>
+          </a:p>
+        </p:txBody>
+      </p:sp>
+      <p:sp>
+        <p:nvSpPr>
+          <p:cNvPr id="12" name="Text 9"/>
+          <p:cNvSpPr/>
+          <p:nvPr/>
+        </p:nvSpPr>
+        <p:spPr>
+          <a:xfrm>
+            <a:off x="970080" y="4320000"/>
+            <a:ext cx="2814720" cy="560000"/>
+          </a:xfrm>
+          <a:prstGeom prst="rect">
+            <a:avLst/>
+          </a:prstGeom>
+          <a:noFill/>
+          <a:ln/>
+        </p:spPr>
+        <p:txBody>
+          <a:bodyPr wrap="square" lIns="0" tIns="0" rIns="0" bIns="0" rtlCol="0" anchor="t"/>
+          <a:lstStyle/>
+          <a:p>
+            <a:pPr marL="0" indent="0">
+              <a:lnSpc>
+                <a:spcPct val="104000"/>
+              </a:lnSpc>
+              <a:buNone/>
+            </a:pPr>
+            <a:r>
+              <a:rPr lang="en-US" sz="1300" dirty="0">
+                <a:solidFill>
+                  <a:srgbClr val="33383F"/>
+                </a:solidFill>
+                <a:latin typeface="Calibri" pitchFamily="34" charset="0"/>
+                <a:ea typeface="Calibri" pitchFamily="34" charset="-122"/>
+                <a:cs typeface="Calibri" pitchFamily="34" charset="-120"/>
+              </a:rPr>
+              <a:t>события всех игроков и сессий в одной надёжной БД</a:t>
+            </a:r>
+            <a:endParaRPr lang="en-US" sz="1300" dirty="0"/>
+          </a:p>
+        </p:txBody>
+      </p:sp>
+      <p:sp>
+        <p:nvSpPr>
+          <p:cNvPr id="13" name="Shape 10"/>
+          <p:cNvSpPr/>
+          <p:nvPr/>
+        </p:nvSpPr>
+        <p:spPr>
+          <a:xfrm>
+            <a:off x="4352544" y="2150000"/>
+            <a:ext cx="3474720" cy="3150000"/>
+          </a:xfrm>
+          <a:prstGeom prst="roundRect">
+            <a:avLst>
+              <a:gd name="adj" fmla="val 4500"/>
+            </a:avLst>
+          </a:prstGeom>
+          <a:solidFill>
+            <a:srgbClr val="F4FAFD"/>
+          </a:solidFill>
+          <a:ln w="12700">
+            <a:solidFill>
+              <a:srgbClr val="DCE6EC"/>
+            </a:solidFill>
+            <a:prstDash val="solid"/>
+          </a:ln>
+          <a:effectLst>
+            <a:outerShdw blurRad="88900" dist="25400" dir="5400000" algn="bl" rotWithShape="0">
+              <a:srgbClr val="B8C9D4">
+                <a:alpha val="22000"/>
+              </a:srgbClr>
+            </a:outerShdw>
+          </a:effectLst>
+        </p:spPr>
+      </p:sp>
+      <p:sp>
+        <p:nvSpPr>
+          <p:cNvPr id="14" name="Shape 11"/>
+          <p:cNvSpPr/>
+          <p:nvPr/>
+        </p:nvSpPr>
+        <p:spPr>
+          <a:xfrm>
+            <a:off x="4682544" y="2530000"/>
+            <a:ext cx="700000" cy="700000"/>
+          </a:xfrm>
+          <a:prstGeom prst="ellipse">
+            <a:avLst/>
+          </a:prstGeom>
+          <a:solidFill>
+            <a:srgbClr val="1F9BD8"/>
+          </a:solidFill>
+          <a:ln/>
+          <a:effectLst>
+            <a:outerShdw blurRad="88900" dist="25400" dir="5400000" algn="bl" rotWithShape="0">
+              <a:srgbClr val="B8C9D4">
+                <a:alpha val="22000"/>
+              </a:srgbClr>
+            </a:outerShdw>
+          </a:effectLst>
+        </p:spPr>
+      </p:sp>
+      <p:pic>
+        <p:nvPicPr>
+          <p:cNvPr id="15" name="Image 1" descr="icons/shield.png"/>
+          <p:cNvPicPr>
+            <a:picLocks noChangeAspect="1"/>
+          </p:cNvPicPr>
+          <p:nvPr/>
+        </p:nvPicPr>
+        <p:blipFill>
+          <a:blip r:embed="rId4"/>
+          <a:stretch>
+            <a:fillRect/>
+          </a:stretch>
+        </p:blipFill>
+        <p:spPr>
+          <a:xfrm>
+            <a:off x="4892544" y="2740000"/>
+            <a:ext cx="300000" cy="300000"/>
+          </a:xfrm>
+          <a:prstGeom prst="rect">
+            <a:avLst/>
+          </a:prstGeom>
+        </p:spPr>
+      </p:pic>
+      <p:sp>
+        <p:nvSpPr>
+          <p:cNvPr id="16" name="Text 12"/>
+          <p:cNvSpPr/>
+          <p:nvPr/>
+        </p:nvSpPr>
+        <p:spPr>
+          <a:xfrm>
+            <a:off x="4682544" y="3780000"/>
+            <a:ext cx="2814720" cy="420000"/>
+          </a:xfrm>
+          <a:prstGeom prst="rect">
+            <a:avLst/>
+          </a:prstGeom>
+          <a:noFill/>
+          <a:ln/>
+        </p:spPr>
+        <p:txBody>
+          <a:bodyPr wrap="square" lIns="0" tIns="0" rIns="0" bIns="0" rtlCol="0" anchor="t"/>
+          <a:lstStyle/>
+          <a:p>
+            <a:pPr marL="0" indent="0">
+              <a:buNone/>
+            </a:pPr>
+            <a:r>
+              <a:rPr lang="en-US" sz="1700" b="1" dirty="0">
+                <a:solidFill>
+                  <a:srgbClr val="111418"/>
+                </a:solidFill>
+                <a:latin typeface="Calibri" pitchFamily="34" charset="0"/>
+                <a:ea typeface="Calibri" pitchFamily="34" charset="-122"/>
+                <a:cs typeface="Calibri" pitchFamily="34" charset="-120"/>
+              </a:rPr>
+              <a:t>Источник правды</a:t>
+            </a:r>
+            <a:endParaRPr lang="en-US" sz="1700" dirty="0"/>
+          </a:p>
+        </p:txBody>
+      </p:sp>
+      <p:sp>
+        <p:nvSpPr>
+          <p:cNvPr id="17" name="Text 13"/>
+          <p:cNvSpPr/>
+          <p:nvPr/>
+        </p:nvSpPr>
+        <p:spPr>
+          <a:xfrm>
+            <a:off x="4682544" y="4320000"/>
+            <a:ext cx="2814720" cy="560000"/>
+          </a:xfrm>
+          <a:prstGeom prst="rect">
+            <a:avLst/>
+          </a:prstGeom>
+          <a:noFill/>
+          <a:ln/>
+        </p:spPr>
+        <p:txBody>
+          <a:bodyPr wrap="square" lIns="0" tIns="0" rIns="0" bIns="0" rtlCol="0" anchor="t"/>
+          <a:lstStyle/>
+          <a:p>
+            <a:pPr marL="0" indent="0">
+              <a:lnSpc>
+                <a:spcPct val="104000"/>
+              </a:lnSpc>
+              <a:buNone/>
+            </a:pPr>
+            <a:r>
+              <a:rPr lang="en-US" sz="1300" dirty="0">
+                <a:solidFill>
+                  <a:srgbClr val="33383F"/>
+                </a:solidFill>
+                <a:latin typeface="Calibri" pitchFamily="34" charset="0"/>
+                <a:ea typeface="Calibri" pitchFamily="34" charset="-122"/>
+                <a:cs typeface="Calibri" pitchFamily="34" charset="-120"/>
+              </a:rPr>
+              <a:t>сервер валидирует данные и хранит историю предсказаний</a:t>
+            </a:r>
+            <a:endParaRPr lang="en-US" sz="1300" dirty="0"/>
+          </a:p>
+        </p:txBody>
+      </p:sp>
+      <p:sp>
+        <p:nvSpPr>
+          <p:cNvPr id="18" name="Shape 14"/>
+          <p:cNvSpPr/>
+          <p:nvPr/>
+        </p:nvSpPr>
+        <p:spPr>
+          <a:xfrm>
+            <a:off x="8065008" y="2150000"/>
+            <a:ext cx="3474720" cy="3150000"/>
+          </a:xfrm>
+          <a:prstGeom prst="roundRect">
+            <a:avLst>
+              <a:gd name="adj" fmla="val 4500"/>
+            </a:avLst>
+          </a:prstGeom>
+          <a:solidFill>
+            <a:srgbClr val="F4FAFD"/>
+          </a:solidFill>
+          <a:ln w="12700">
+            <a:solidFill>
+              <a:srgbClr val="DCE6EC"/>
+            </a:solidFill>
+            <a:prstDash val="solid"/>
+          </a:ln>
+          <a:effectLst>
+            <a:outerShdw blurRad="88900" dist="25400" dir="5400000" algn="bl" rotWithShape="0">
+              <a:srgbClr val="B8C9D4">
+                <a:alpha val="22000"/>
+              </a:srgbClr>
+            </a:outerShdw>
+          </a:effectLst>
+        </p:spPr>
+      </p:sp>
+      <p:sp>
+        <p:nvSpPr>
+          <p:cNvPr id="19" name="Shape 15"/>
+          <p:cNvSpPr/>
+          <p:nvPr/>
+        </p:nvSpPr>
+        <p:spPr>
+          <a:xfrm>
+            <a:off x="8395008" y="2530000"/>
+            <a:ext cx="700000" cy="700000"/>
+          </a:xfrm>
+          <a:prstGeom prst="ellipse">
+            <a:avLst/>
+          </a:prstGeom>
+          <a:solidFill>
+            <a:srgbClr val="1F9BD8"/>
+          </a:solidFill>
+          <a:ln/>
+          <a:effectLst>
+            <a:outerShdw blurRad="88900" dist="25400" dir="5400000" algn="bl" rotWithShape="0">
+              <a:srgbClr val="B8C9D4">
+                <a:alpha val="22000"/>
+              </a:srgbClr>
+            </a:outerShdw>
+          </a:effectLst>
+        </p:spPr>
+      </p:sp>
+      <p:pic>
+        <p:nvPicPr>
+          <p:cNvPr id="20" name="Image 2" descr="icons/brain.png"/>
+          <p:cNvPicPr>
+            <a:picLocks noChangeAspect="1"/>
+          </p:cNvPicPr>
+          <p:nvPr/>
+        </p:nvPicPr>
+        <p:blipFill>
+          <a:blip r:embed="rId5"/>
+          <a:stretch>
+            <a:fillRect/>
+          </a:stretch>
+        </p:blipFill>
+        <p:spPr>
+          <a:xfrm>
+            <a:off x="8605008" y="2740000"/>
+            <a:ext cx="300000" cy="300000"/>
+          </a:xfrm>
+          <a:prstGeom prst="rect">
+            <a:avLst/>
+          </a:prstGeom>
+        </p:spPr>
+      </p:pic>
+      <p:sp>
+        <p:nvSpPr>
+          <p:cNvPr id="21" name="Text 16"/>
+          <p:cNvSpPr/>
+          <p:nvPr/>
+        </p:nvSpPr>
+        <p:spPr>
+          <a:xfrm>
+            <a:off x="8395008" y="3780000"/>
+            <a:ext cx="2814720" cy="420000"/>
+          </a:xfrm>
+          <a:prstGeom prst="rect">
+            <a:avLst/>
+          </a:prstGeom>
+          <a:noFill/>
+          <a:ln/>
+        </p:spPr>
+        <p:txBody>
+          <a:bodyPr wrap="square" lIns="0" tIns="0" rIns="0" bIns="0" rtlCol="0" anchor="t"/>
+          <a:lstStyle/>
+          <a:p>
+            <a:pPr marL="0" indent="0">
+              <a:buNone/>
+            </a:pPr>
+            <a:r>
+              <a:rPr lang="en-US" sz="1700" b="1" dirty="0">
+                <a:solidFill>
+                  <a:srgbClr val="111418"/>
+                </a:solidFill>
+                <a:latin typeface="Calibri" pitchFamily="34" charset="0"/>
+                <a:ea typeface="Calibri" pitchFamily="34" charset="-122"/>
+                <a:cs typeface="Calibri" pitchFamily="34" charset="-120"/>
+              </a:rPr>
+              <a:t>Тяжёлое — на сервере</a:t>
+            </a:r>
+            <a:endParaRPr lang="en-US" sz="1700" dirty="0"/>
+          </a:p>
+        </p:txBody>
+      </p:sp>
+      <p:sp>
+        <p:nvSpPr>
+          <p:cNvPr id="22" name="Text 17"/>
+          <p:cNvSpPr/>
+          <p:nvPr/>
+        </p:nvSpPr>
+        <p:spPr>
+          <a:xfrm>
+            <a:off x="8395008" y="4320000"/>
+            <a:ext cx="2814720" cy="560000"/>
+          </a:xfrm>
+          <a:prstGeom prst="rect">
+            <a:avLst/>
+          </a:prstGeom>
+          <a:noFill/>
+          <a:ln/>
+        </p:spPr>
+        <p:txBody>
+          <a:bodyPr wrap="square" lIns="0" tIns="0" rIns="0" bIns="0" rtlCol="0" anchor="t"/>
+          <a:lstStyle/>
+          <a:p>
+            <a:pPr marL="0" indent="0">
+              <a:lnSpc>
+                <a:spcPct val="104000"/>
+              </a:lnSpc>
+              <a:buNone/>
+            </a:pPr>
+            <a:r>
+              <a:rPr lang="en-US" sz="1300" dirty="0">
+                <a:solidFill>
+                  <a:srgbClr val="33383F"/>
+                </a:solidFill>
+                <a:latin typeface="Calibri" pitchFamily="34" charset="0"/>
+                <a:ea typeface="Calibri" pitchFamily="34" charset="-122"/>
+                <a:cs typeface="Calibri" pitchFamily="34" charset="-120"/>
+              </a:rPr>
+              <a:t>построение признаков и ML вынесены с клиента</a:t>
+            </a:r>
+            <a:endParaRPr lang="en-US" sz="1300" dirty="0"/>
+          </a:p>
+        </p:txBody>
+      </p:sp>
+    </p:spTree>
+  </p:cSld>
+  <p:clrMapOvr>
+    <a:masterClrMapping/>
+  </p:clrMapOvr>
+</p:sld>
+</file>
+
+<file path=ppt/slides/slide3.xml><?xml version="1.0" encoding="utf-8"?>
 <p:sld xmlns:a="http://schemas.openxmlformats.org/drawingml/2006/main" xmlns:r="http://schemas.openxmlformats.org/officeDocument/2006/relationships" xmlns:p="http://schemas.openxmlformats.org/presentationml/2006/main">
   <p:cSld>
     <p:bg>
@@ -3246,11 +4457,11 @@
           <a:bodyPr wrap="square" lIns="0" tIns="0" rIns="0" bIns="0" rtlCol="0" anchor="ctr"/>
           <a:lstStyle/>
           <a:p>
-            <a:pPr algn="l" indent="0" marL="0">
-              <a:buNone/>
-            </a:pPr>
-            <a:r>
-              <a:rPr lang="ru-RU" sz="1500" b="1" spc="250" kern="0" dirty="0">
+            <a:pPr marL="0" indent="0" algn="l">
+              <a:buNone/>
+            </a:pPr>
+            <a:r>
+              <a:rPr lang="ru-RU" sz="2000" b="1" kern="0" spc="250" dirty="0">
                 <a:solidFill>
                   <a:srgbClr val="1F9BD8"/>
                 </a:solidFill>
@@ -3284,7 +4495,7 @@
           <a:bodyPr wrap="square" lIns="0" tIns="0" rIns="0" bIns="0" rtlCol="0" anchor="ctr"/>
           <a:lstStyle/>
           <a:p>
-            <a:pPr algn="l" indent="0" marL="0">
+            <a:pPr marL="0" indent="0" algn="l">
               <a:buNone/>
             </a:pPr>
             <a:r>
@@ -3322,7 +4533,7 @@
           <a:bodyPr wrap="square" lIns="0" tIns="0" rIns="0" bIns="0" rtlCol="0" anchor="ctr"/>
           <a:lstStyle/>
           <a:p>
-            <a:pPr algn="r" indent="0" marL="0">
+            <a:pPr marL="0" indent="0" algn="r">
               <a:buNone/>
             </a:pPr>
             <a:r>
@@ -3347,8 +4558,8 @@
         </p:nvSpPr>
         <p:spPr>
           <a:xfrm>
-            <a:off x="3360000" y="1560000"/>
-            <a:ext cx="8260000" cy="3760000"/>
+            <a:off x="3360000" y="1559999"/>
+            <a:ext cx="6365000" cy="3934789"/>
           </a:xfrm>
           <a:prstGeom prst="roundRect">
             <a:avLst>
@@ -3387,11 +4598,11 @@
           <a:bodyPr wrap="square" lIns="0" tIns="0" rIns="0" bIns="0" rtlCol="0" anchor="ctr"/>
           <a:lstStyle/>
           <a:p>
-            <a:pPr algn="l" indent="0" marL="0">
-              <a:buNone/>
-            </a:pPr>
-            <a:r>
-              <a:rPr lang="ru-RU" sz="1150" b="1" spc="200" kern="0" dirty="0">
+            <a:pPr marL="0" indent="0" algn="l">
+              <a:buNone/>
+            </a:pPr>
+            <a:r>
+              <a:rPr lang="ru-RU" sz="1150" b="1" kern="0" spc="200" dirty="0">
                 <a:solidFill>
                   <a:srgbClr val="1F9BD8"/>
                 </a:solidFill>
@@ -3633,7 +4844,7 @@
           <p:nvPr/>
         </p:nvPicPr>
         <p:blipFill>
-          <a:blip r:embed="rId21"/>
+          <a:blip r:embed="rId2"/>
           <a:stretch>
             <a:fillRect/>
           </a:stretch>
@@ -4132,7 +5343,7 @@
           <p:nvPr/>
         </p:nvPicPr>
         <p:blipFill>
-          <a:blip r:embed="rId10"/>
+          <a:blip r:embed="rId3"/>
           <a:stretch>
             <a:fillRect/>
           </a:stretch>
@@ -4168,7 +5379,7 @@
           <a:bodyPr wrap="square" lIns="0" tIns="0" rIns="0" bIns="0" rtlCol="0" anchor="ctr"/>
           <a:lstStyle/>
           <a:p>
-            <a:pPr algn="ctr" indent="0" marL="0">
+            <a:pPr marL="0" indent="0" algn="ctr">
               <a:buNone/>
             </a:pPr>
             <a:r>
@@ -4206,7 +5417,7 @@
           <a:bodyPr wrap="square" lIns="0" tIns="0" rIns="0" bIns="0" rtlCol="0" anchor="ctr"/>
           <a:lstStyle/>
           <a:p>
-            <a:pPr algn="ctr" indent="0" marL="0">
+            <a:pPr marL="0" indent="0" algn="ctr">
               <a:buNone/>
             </a:pPr>
             <a:r>
@@ -4244,7 +5455,7 @@
           <a:bodyPr wrap="square" lIns="0" tIns="0" rIns="0" bIns="0" rtlCol="0" anchor="ctr"/>
           <a:lstStyle/>
           <a:p>
-            <a:pPr algn="ctr" indent="0" marL="0">
+            <a:pPr marL="0" indent="0" algn="ctr">
               <a:buNone/>
             </a:pPr>
             <a:r>
@@ -4282,7 +5493,7 @@
           <a:bodyPr wrap="square" lIns="0" tIns="0" rIns="0" bIns="0" rtlCol="0" anchor="ctr"/>
           <a:lstStyle/>
           <a:p>
-            <a:pPr algn="ctr" indent="0" marL="0">
+            <a:pPr marL="0" indent="0" algn="ctr">
               <a:buNone/>
             </a:pPr>
             <a:r>
@@ -4320,7 +5531,7 @@
           <a:bodyPr wrap="square" lIns="0" tIns="0" rIns="0" bIns="0" rtlCol="0" anchor="ctr"/>
           <a:lstStyle/>
           <a:p>
-            <a:pPr algn="ctr" indent="0" marL="0">
+            <a:pPr marL="0" indent="0" algn="ctr">
               <a:buNone/>
             </a:pPr>
             <a:r>
@@ -4358,7 +5569,7 @@
           <a:bodyPr wrap="square" lIns="0" tIns="0" rIns="0" bIns="0" rtlCol="0" anchor="ctr"/>
           <a:lstStyle/>
           <a:p>
-            <a:pPr algn="ctr" indent="0" marL="0">
+            <a:pPr marL="0" indent="0" algn="ctr">
               <a:buNone/>
             </a:pPr>
             <a:r>
@@ -4396,7 +5607,7 @@
           <a:bodyPr wrap="square" lIns="0" tIns="0" rIns="0" bIns="0" rtlCol="0" anchor="ctr"/>
           <a:lstStyle/>
           <a:p>
-            <a:pPr algn="ctr" indent="0" marL="0">
+            <a:pPr marL="0" indent="0" algn="ctr">
               <a:buNone/>
             </a:pPr>
             <a:r>
@@ -4434,7 +5645,7 @@
           <a:bodyPr wrap="square" lIns="0" tIns="0" rIns="0" bIns="0" rtlCol="0" anchor="ctr"/>
           <a:lstStyle/>
           <a:p>
-            <a:pPr algn="ctr" indent="0" marL="0">
+            <a:pPr marL="0" indent="0" algn="ctr">
               <a:buNone/>
             </a:pPr>
             <a:r>
@@ -4459,14 +5670,15 @@
 </p:sld>
 </file>
 
-<file path=ppt/slides/slide2.xml><?xml version="1.0" encoding="utf-8"?>
+<file path=ppt/slides/slide4.xml><?xml version="1.0" encoding="utf-8"?>
 <p:sld xmlns:a="http://schemas.openxmlformats.org/drawingml/2006/main" xmlns:r="http://schemas.openxmlformats.org/officeDocument/2006/relationships" xmlns:p="http://schemas.openxmlformats.org/presentationml/2006/main">
-  <p:cSld name="Slide 2">
+  <p:cSld name="Slide 3">
     <p:bg>
       <p:bgPr>
         <a:solidFill>
           <a:srgbClr val="FFFFFF"/>
         </a:solidFill>
+        <a:effectLst/>
       </p:bgPr>
     </p:bg>
     <p:spTree>
@@ -4504,7 +5716,7 @@
           <a:bodyPr wrap="square" lIns="0" tIns="0" rIns="0" bIns="0" rtlCol="0" anchor="ctr"/>
           <a:lstStyle/>
           <a:p>
-            <a:pPr algn="r" indent="0" marL="0">
+            <a:pPr marL="0" indent="0" algn="r">
               <a:buNone/>
             </a:pPr>
             <a:r>
@@ -4516,7 +5728,7 @@
                 <a:ea typeface="Cambria" pitchFamily="34" charset="-122"/>
                 <a:cs typeface="Cambria" pitchFamily="34" charset="-120"/>
               </a:rPr>
-              <a:t>2</a:t>
+              <a:t>4</a:t>
             </a:r>
             <a:endParaRPr lang="en-US" sz="3000" dirty="0"/>
           </a:p>
@@ -4543,11 +5755,11 @@
           <a:bodyPr wrap="square" lIns="0" tIns="0" rIns="0" bIns="0" rtlCol="0" anchor="ctr"/>
           <a:lstStyle/>
           <a:p>
-            <a:pPr indent="0" marL="0">
-              <a:buNone/>
-            </a:pPr>
-            <a:r>
-              <a:rPr lang="en-US" sz="1500" b="1" spc="250" kern="0" dirty="0">
+            <a:pPr marL="0" indent="0">
+              <a:buNone/>
+            </a:pPr>
+            <a:r>
+              <a:rPr lang="en-US" sz="2000" b="1" kern="0" spc="250" dirty="0">
                 <a:solidFill>
                   <a:srgbClr val="1F9BD8"/>
                 </a:solidFill>
@@ -4555,9 +5767,9 @@
                 <a:ea typeface="Calibri" pitchFamily="34" charset="-122"/>
                 <a:cs typeface="Calibri" pitchFamily="34" charset="-120"/>
               </a:rPr>
-              <a:t>АКТУАЛЬНОСТЬ</a:t>
-            </a:r>
-            <a:endParaRPr lang="en-US" sz="1500" dirty="0"/>
+              <a:t>ВЫБОР БД · 1/2</a:t>
+            </a:r>
+            <a:endParaRPr lang="en-US" sz="2000" dirty="0"/>
           </a:p>
         </p:txBody>
       </p:sp>
@@ -4582,7 +5794,7 @@
           <a:bodyPr wrap="square" lIns="0" tIns="0" rIns="0" bIns="0" rtlCol="0" anchor="ctr"/>
           <a:lstStyle/>
           <a:p>
-            <a:pPr indent="0" marL="0">
+            <a:pPr marL="0" indent="0">
               <a:buNone/>
             </a:pPr>
             <a:r>
@@ -4594,7 +5806,7 @@
                 <a:ea typeface="Cambria" pitchFamily="34" charset="-122"/>
                 <a:cs typeface="Cambria" pitchFamily="34" charset="-120"/>
               </a:rPr>
-              <a:t>Необходимость серверной части для телеметрии</a:t>
+              <a:t>Преимущества PostgreSQL</a:t>
             </a:r>
             <a:endParaRPr lang="en-US" sz="3000" dirty="0"/>
           </a:p>
@@ -4602,18 +5814,18 @@
       </p:sp>
       <p:sp>
         <p:nvSpPr>
-          <p:cNvPr id="8" name="Shape 6"/>
-          <p:cNvSpPr/>
-          <p:nvPr/>
-        </p:nvSpPr>
-        <p:spPr>
-          <a:xfrm>
-            <a:off x="640080" y="2150000"/>
-            <a:ext cx="3474720" cy="3150000"/>
+          <p:cNvPr id="7" name="Shape 5"/>
+          <p:cNvSpPr/>
+          <p:nvPr/>
+        </p:nvSpPr>
+        <p:spPr>
+          <a:xfrm>
+            <a:off x="877824" y="2231136"/>
+            <a:ext cx="5257800" cy="1600200"/>
           </a:xfrm>
           <a:prstGeom prst="roundRect">
             <a:avLst>
-              <a:gd name="adj" fmla="val 4500"/>
+              <a:gd name="adj" fmla="val 5143"/>
             </a:avLst>
           </a:prstGeom>
           <a:solidFill>
@@ -4626,7 +5838,7 @@
             <a:prstDash val="solid"/>
           </a:ln>
           <a:effectLst>
-            <a:outerShdw sx="100000" sy="100000" kx="0" ky="0" algn="bl" rotWithShape="0" blurRad="88900" dist="25400" dir="5400000">
+            <a:outerShdw blurRad="88900" dist="25400" dir="5400000" algn="bl" rotWithShape="0">
               <a:srgbClr val="B8C9D4">
                 <a:alpha val="22000"/>
               </a:srgbClr>
@@ -4636,14 +5848,14 @@
       </p:sp>
       <p:sp>
         <p:nvSpPr>
-          <p:cNvPr id="9" name="Shape 7"/>
-          <p:cNvSpPr/>
-          <p:nvPr/>
-        </p:nvSpPr>
-        <p:spPr>
-          <a:xfrm>
-            <a:off x="970080" y="2530000"/>
-            <a:ext cx="700000" cy="700000"/>
+          <p:cNvPr id="8" name="Shape 6"/>
+          <p:cNvSpPr/>
+          <p:nvPr/>
+        </p:nvSpPr>
+        <p:spPr>
+          <a:xfrm>
+            <a:off x="1115568" y="2505456"/>
+            <a:ext cx="548640" cy="548640"/>
           </a:xfrm>
           <a:prstGeom prst="ellipse">
             <a:avLst/>
@@ -4653,7 +5865,7 @@
           </a:solidFill>
           <a:ln/>
           <a:effectLst>
-            <a:outerShdw sx="100000" sy="100000" kx="0" ky="0" algn="bl" rotWithShape="0" blurRad="88900" dist="25400" dir="5400000">
+            <a:outerShdw blurRad="88900" dist="25400" dir="5400000" algn="bl" rotWithShape="0">
               <a:srgbClr val="B8C9D4">
                 <a:alpha val="22000"/>
               </a:srgbClr>
@@ -4663,22 +5875,22 @@
       </p:sp>
       <p:pic>
         <p:nvPicPr>
-          <p:cNvPr id="10" name="Image 0" descr="icons/database.png"/>
+          <p:cNvPr id="9" name="Image 0" descr="icons/check.png"/>
           <p:cNvPicPr>
             <a:picLocks noChangeAspect="1"/>
           </p:cNvPicPr>
           <p:nvPr/>
         </p:nvPicPr>
         <p:blipFill>
-          <a:blip r:embed="rId1"/>
+          <a:blip r:embed="rId3"/>
           <a:stretch>
             <a:fillRect/>
           </a:stretch>
         </p:blipFill>
         <p:spPr>
           <a:xfrm>
-            <a:off x="1180080" y="2740000"/>
-            <a:ext cx="300000" cy="300000"/>
+            <a:off x="1280160" y="2670048"/>
+            <a:ext cx="219456" cy="219456"/>
           </a:xfrm>
           <a:prstGeom prst="rect">
             <a:avLst/>
@@ -4687,14 +5899,53 @@
       </p:pic>
       <p:sp>
         <p:nvSpPr>
+          <p:cNvPr id="10" name="Text 7"/>
+          <p:cNvSpPr/>
+          <p:nvPr/>
+        </p:nvSpPr>
+        <p:spPr>
+          <a:xfrm>
+            <a:off x="1837944" y="2450592"/>
+            <a:ext cx="4114800" cy="365760"/>
+          </a:xfrm>
+          <a:prstGeom prst="rect">
+            <a:avLst/>
+          </a:prstGeom>
+          <a:noFill/>
+          <a:ln/>
+        </p:spPr>
+        <p:txBody>
+          <a:bodyPr wrap="square" lIns="0" tIns="0" rIns="0" bIns="0" rtlCol="0" anchor="ctr"/>
+          <a:lstStyle/>
+          <a:p>
+            <a:pPr marL="0" indent="0">
+              <a:buNone/>
+            </a:pPr>
+            <a:r>
+              <a:rPr lang="en-US" sz="1500" b="1" dirty="0">
+                <a:solidFill>
+                  <a:srgbClr val="111418"/>
+                </a:solidFill>
+                <a:latin typeface="Calibri" pitchFamily="34" charset="0"/>
+                <a:ea typeface="Calibri" pitchFamily="34" charset="-122"/>
+                <a:cs typeface="Calibri" pitchFamily="34" charset="-120"/>
+              </a:rPr>
+              <a:t>Надёжность и ACID</a:t>
+            </a:r>
+            <a:endParaRPr lang="en-US" sz="1500" dirty="0"/>
+          </a:p>
+        </p:txBody>
+      </p:sp>
+      <p:sp>
+        <p:nvSpPr>
           <p:cNvPr id="11" name="Text 8"/>
           <p:cNvSpPr/>
           <p:nvPr/>
         </p:nvSpPr>
         <p:spPr>
           <a:xfrm>
-            <a:off x="970080" y="3780000"/>
-            <a:ext cx="2814720" cy="420000"/>
+            <a:off x="1837944" y="2834640"/>
+            <a:ext cx="4160520" cy="868680"/>
           </a:xfrm>
           <a:prstGeom prst="rect">
             <a:avLst/>
@@ -4706,53 +5957,14 @@
           <a:bodyPr wrap="square" lIns="0" tIns="0" rIns="0" bIns="0" rtlCol="0" anchor="t"/>
           <a:lstStyle/>
           <a:p>
-            <a:pPr indent="0" marL="0">
-              <a:buNone/>
-            </a:pPr>
-            <a:r>
-              <a:rPr lang="en-US" sz="1700" b="1" dirty="0">
-                <a:solidFill>
-                  <a:srgbClr val="111418"/>
-                </a:solidFill>
-                <a:latin typeface="Calibri" pitchFamily="34" charset="0"/>
-                <a:ea typeface="Calibri" pitchFamily="34" charset="-122"/>
-                <a:cs typeface="Calibri" pitchFamily="34" charset="-120"/>
-              </a:rPr>
-              <a:t>Единое хранилище</a:t>
-            </a:r>
-            <a:endParaRPr lang="en-US" sz="1700" dirty="0"/>
-          </a:p>
-        </p:txBody>
-      </p:sp>
-      <p:sp>
-        <p:nvSpPr>
-          <p:cNvPr id="12" name="Text 9"/>
-          <p:cNvSpPr/>
-          <p:nvPr/>
-        </p:nvSpPr>
-        <p:spPr>
-          <a:xfrm>
-            <a:off x="970080" y="4320000"/>
-            <a:ext cx="2814720" cy="560000"/>
-          </a:xfrm>
-          <a:prstGeom prst="rect">
-            <a:avLst/>
-          </a:prstGeom>
-          <a:noFill/>
-          <a:ln/>
-        </p:spPr>
-        <p:txBody>
-          <a:bodyPr wrap="square" lIns="0" tIns="0" rIns="0" bIns="0" rtlCol="0" anchor="t"/>
-          <a:lstStyle/>
-          <a:p>
-            <a:pPr indent="0" marL="0">
+            <a:pPr marL="0" indent="0">
               <a:lnSpc>
-                <a:spcPct val="104000"/>
+                <a:spcPct val="105000"/>
               </a:lnSpc>
               <a:buNone/>
             </a:pPr>
             <a:r>
-              <a:rPr lang="en-US" sz="1300" dirty="0">
+              <a:rPr lang="en-US" sz="1200" dirty="0">
                 <a:solidFill>
                   <a:srgbClr val="33383F"/>
                 </a:solidFill>
@@ -4760,30 +5972,30 @@
                 <a:ea typeface="Calibri" pitchFamily="34" charset="-122"/>
                 <a:cs typeface="Calibri" pitchFamily="34" charset="-120"/>
               </a:rPr>
-              <a:t>события всех игроков и сессий в одной надёжной БД</a:t>
-            </a:r>
-            <a:endParaRPr lang="en-US" sz="1300" dirty="0"/>
-          </a:p>
-        </p:txBody>
-      </p:sp>
-      <p:sp>
-        <p:nvSpPr>
-          <p:cNvPr id="13" name="Shape 10"/>
-          <p:cNvSpPr/>
-          <p:nvPr/>
-        </p:nvSpPr>
-        <p:spPr>
-          <a:xfrm>
-            <a:off x="4352544" y="2150000"/>
-            <a:ext cx="3474720" cy="3150000"/>
+              <a:t>транзакции и целостность данных телеметрии гарантированы</a:t>
+            </a:r>
+            <a:endParaRPr lang="en-US" sz="1200" dirty="0"/>
+          </a:p>
+        </p:txBody>
+      </p:sp>
+      <p:sp>
+        <p:nvSpPr>
+          <p:cNvPr id="12" name="Shape 9"/>
+          <p:cNvSpPr/>
+          <p:nvPr/>
+        </p:nvSpPr>
+        <p:spPr>
+          <a:xfrm>
+            <a:off x="6364224" y="2231136"/>
+            <a:ext cx="5257800" cy="1600200"/>
           </a:xfrm>
           <a:prstGeom prst="roundRect">
             <a:avLst>
-              <a:gd name="adj" fmla="val 4500"/>
+              <a:gd name="adj" fmla="val 5143"/>
             </a:avLst>
           </a:prstGeom>
           <a:solidFill>
-            <a:srgbClr val="F4FAFD"/>
+            <a:srgbClr val="FFFFFF"/>
           </a:solidFill>
           <a:ln w="12700">
             <a:solidFill>
@@ -4792,7 +6004,7 @@
             <a:prstDash val="solid"/>
           </a:ln>
           <a:effectLst>
-            <a:outerShdw sx="100000" sy="100000" kx="0" ky="0" algn="bl" rotWithShape="0" blurRad="88900" dist="25400" dir="5400000">
+            <a:outerShdw blurRad="88900" dist="25400" dir="5400000" algn="bl" rotWithShape="0">
               <a:srgbClr val="B8C9D4">
                 <a:alpha val="22000"/>
               </a:srgbClr>
@@ -4802,14 +6014,14 @@
       </p:sp>
       <p:sp>
         <p:nvSpPr>
-          <p:cNvPr id="14" name="Shape 11"/>
-          <p:cNvSpPr/>
-          <p:nvPr/>
-        </p:nvSpPr>
-        <p:spPr>
-          <a:xfrm>
-            <a:off x="4682544" y="2530000"/>
-            <a:ext cx="700000" cy="700000"/>
+          <p:cNvPr id="13" name="Shape 10"/>
+          <p:cNvSpPr/>
+          <p:nvPr/>
+        </p:nvSpPr>
+        <p:spPr>
+          <a:xfrm>
+            <a:off x="6601968" y="2505456"/>
+            <a:ext cx="548640" cy="548640"/>
           </a:xfrm>
           <a:prstGeom prst="ellipse">
             <a:avLst/>
@@ -4819,7 +6031,7 @@
           </a:solidFill>
           <a:ln/>
           <a:effectLst>
-            <a:outerShdw sx="100000" sy="100000" kx="0" ky="0" algn="bl" rotWithShape="0" blurRad="88900" dist="25400" dir="5400000">
+            <a:outerShdw blurRad="88900" dist="25400" dir="5400000" algn="bl" rotWithShape="0">
               <a:srgbClr val="B8C9D4">
                 <a:alpha val="22000"/>
               </a:srgbClr>
@@ -4829,22 +6041,22 @@
       </p:sp>
       <p:pic>
         <p:nvPicPr>
-          <p:cNvPr id="15" name="Image 1" descr="icons/shield.png"/>
+          <p:cNvPr id="14" name="Image 1" descr="icons/layers.png"/>
           <p:cNvPicPr>
             <a:picLocks noChangeAspect="1"/>
           </p:cNvPicPr>
           <p:nvPr/>
         </p:nvPicPr>
         <p:blipFill>
-          <a:blip r:embed="rId2"/>
+          <a:blip r:embed="rId4"/>
           <a:stretch>
             <a:fillRect/>
           </a:stretch>
         </p:blipFill>
         <p:spPr>
           <a:xfrm>
-            <a:off x="4892544" y="2740000"/>
-            <a:ext cx="300000" cy="300000"/>
+            <a:off x="6766560" y="2670048"/>
+            <a:ext cx="219456" cy="219456"/>
           </a:xfrm>
           <a:prstGeom prst="rect">
             <a:avLst/>
@@ -4853,14 +6065,53 @@
       </p:pic>
       <p:sp>
         <p:nvSpPr>
+          <p:cNvPr id="15" name="Text 11"/>
+          <p:cNvSpPr/>
+          <p:nvPr/>
+        </p:nvSpPr>
+        <p:spPr>
+          <a:xfrm>
+            <a:off x="7324344" y="2450592"/>
+            <a:ext cx="4114800" cy="365760"/>
+          </a:xfrm>
+          <a:prstGeom prst="rect">
+            <a:avLst/>
+          </a:prstGeom>
+          <a:noFill/>
+          <a:ln/>
+        </p:spPr>
+        <p:txBody>
+          <a:bodyPr wrap="square" lIns="0" tIns="0" rIns="0" bIns="0" rtlCol="0" anchor="ctr"/>
+          <a:lstStyle/>
+          <a:p>
+            <a:pPr marL="0" indent="0">
+              <a:buNone/>
+            </a:pPr>
+            <a:r>
+              <a:rPr lang="en-US" sz="1500" b="1" dirty="0">
+                <a:solidFill>
+                  <a:srgbClr val="111418"/>
+                </a:solidFill>
+                <a:latin typeface="Calibri" pitchFamily="34" charset="0"/>
+                <a:ea typeface="Calibri" pitchFamily="34" charset="-122"/>
+                <a:cs typeface="Calibri" pitchFamily="34" charset="-120"/>
+              </a:rPr>
+              <a:t>JSONB из коробки</a:t>
+            </a:r>
+            <a:endParaRPr lang="en-US" sz="1500" dirty="0"/>
+          </a:p>
+        </p:txBody>
+      </p:sp>
+      <p:sp>
+        <p:nvSpPr>
           <p:cNvPr id="16" name="Text 12"/>
           <p:cNvSpPr/>
           <p:nvPr/>
         </p:nvSpPr>
         <p:spPr>
           <a:xfrm>
-            <a:off x="4682544" y="3780000"/>
-            <a:ext cx="2814720" cy="420000"/>
+            <a:off x="7324344" y="2834640"/>
+            <a:ext cx="4160520" cy="868680"/>
           </a:xfrm>
           <a:prstGeom prst="rect">
             <a:avLst/>
@@ -4872,53 +6123,14 @@
           <a:bodyPr wrap="square" lIns="0" tIns="0" rIns="0" bIns="0" rtlCol="0" anchor="t"/>
           <a:lstStyle/>
           <a:p>
-            <a:pPr indent="0" marL="0">
-              <a:buNone/>
-            </a:pPr>
-            <a:r>
-              <a:rPr lang="en-US" sz="1700" b="1" dirty="0">
-                <a:solidFill>
-                  <a:srgbClr val="111418"/>
-                </a:solidFill>
-                <a:latin typeface="Calibri" pitchFamily="34" charset="0"/>
-                <a:ea typeface="Calibri" pitchFamily="34" charset="-122"/>
-                <a:cs typeface="Calibri" pitchFamily="34" charset="-120"/>
-              </a:rPr>
-              <a:t>Источник правды</a:t>
-            </a:r>
-            <a:endParaRPr lang="en-US" sz="1700" dirty="0"/>
-          </a:p>
-        </p:txBody>
-      </p:sp>
-      <p:sp>
-        <p:nvSpPr>
-          <p:cNvPr id="17" name="Text 13"/>
-          <p:cNvSpPr/>
-          <p:nvPr/>
-        </p:nvSpPr>
-        <p:spPr>
-          <a:xfrm>
-            <a:off x="4682544" y="4320000"/>
-            <a:ext cx="2814720" cy="560000"/>
-          </a:xfrm>
-          <a:prstGeom prst="rect">
-            <a:avLst/>
-          </a:prstGeom>
-          <a:noFill/>
-          <a:ln/>
-        </p:spPr>
-        <p:txBody>
-          <a:bodyPr wrap="square" lIns="0" tIns="0" rIns="0" bIns="0" rtlCol="0" anchor="t"/>
-          <a:lstStyle/>
-          <a:p>
-            <a:pPr indent="0" marL="0">
+            <a:pPr marL="0" indent="0">
               <a:lnSpc>
-                <a:spcPct val="104000"/>
+                <a:spcPct val="105000"/>
               </a:lnSpc>
               <a:buNone/>
             </a:pPr>
             <a:r>
-              <a:rPr lang="en-US" sz="1300" dirty="0">
+              <a:rPr lang="en-US" sz="1200" dirty="0">
                 <a:solidFill>
                   <a:srgbClr val="33383F"/>
                 </a:solidFill>
@@ -4926,30 +6138,30 @@
                 <a:ea typeface="Calibri" pitchFamily="34" charset="-122"/>
                 <a:cs typeface="Calibri" pitchFamily="34" charset="-120"/>
               </a:rPr>
-              <a:t>сервер валидирует данные и хранит историю предсказаний</a:t>
-            </a:r>
-            <a:endParaRPr lang="en-US" sz="1300" dirty="0"/>
-          </a:p>
-        </p:txBody>
-      </p:sp>
-      <p:sp>
-        <p:nvSpPr>
-          <p:cNvPr id="18" name="Shape 14"/>
-          <p:cNvSpPr/>
-          <p:nvPr/>
-        </p:nvSpPr>
-        <p:spPr>
-          <a:xfrm>
-            <a:off x="8065008" y="2150000"/>
-            <a:ext cx="3474720" cy="3150000"/>
+              <a:t>гибкие parameters и state событий хранятся как индексируемый JSON</a:t>
+            </a:r>
+            <a:endParaRPr lang="en-US" sz="1200" dirty="0"/>
+          </a:p>
+        </p:txBody>
+      </p:sp>
+      <p:sp>
+        <p:nvSpPr>
+          <p:cNvPr id="17" name="Shape 13"/>
+          <p:cNvSpPr/>
+          <p:nvPr/>
+        </p:nvSpPr>
+        <p:spPr>
+          <a:xfrm>
+            <a:off x="877824" y="4014216"/>
+            <a:ext cx="5257800" cy="1600200"/>
           </a:xfrm>
           <a:prstGeom prst="roundRect">
             <a:avLst>
-              <a:gd name="adj" fmla="val 4500"/>
+              <a:gd name="adj" fmla="val 5143"/>
             </a:avLst>
           </a:prstGeom>
           <a:solidFill>
-            <a:srgbClr val="F4FAFD"/>
+            <a:srgbClr val="FFFFFF"/>
           </a:solidFill>
           <a:ln w="12700">
             <a:solidFill>
@@ -4958,7 +6170,7 @@
             <a:prstDash val="solid"/>
           </a:ln>
           <a:effectLst>
-            <a:outerShdw sx="100000" sy="100000" kx="0" ky="0" algn="bl" rotWithShape="0" blurRad="88900" dist="25400" dir="5400000">
+            <a:outerShdw blurRad="88900" dist="25400" dir="5400000" algn="bl" rotWithShape="0">
               <a:srgbClr val="B8C9D4">
                 <a:alpha val="22000"/>
               </a:srgbClr>
@@ -4968,14 +6180,14 @@
       </p:sp>
       <p:sp>
         <p:nvSpPr>
-          <p:cNvPr id="19" name="Shape 15"/>
-          <p:cNvSpPr/>
-          <p:nvPr/>
-        </p:nvSpPr>
-        <p:spPr>
-          <a:xfrm>
-            <a:off x="8395008" y="2530000"/>
-            <a:ext cx="700000" cy="700000"/>
+          <p:cNvPr id="18" name="Shape 14"/>
+          <p:cNvSpPr/>
+          <p:nvPr/>
+        </p:nvSpPr>
+        <p:spPr>
+          <a:xfrm>
+            <a:off x="1115568" y="4288536"/>
+            <a:ext cx="548640" cy="548640"/>
           </a:xfrm>
           <a:prstGeom prst="ellipse">
             <a:avLst/>
@@ -4985,7 +6197,7 @@
           </a:solidFill>
           <a:ln/>
           <a:effectLst>
-            <a:outerShdw sx="100000" sy="100000" kx="0" ky="0" algn="bl" rotWithShape="0" blurRad="88900" dist="25400" dir="5400000">
+            <a:outerShdw blurRad="88900" dist="25400" dir="5400000" algn="bl" rotWithShape="0">
               <a:srgbClr val="B8C9D4">
                 <a:alpha val="22000"/>
               </a:srgbClr>
@@ -4995,22 +6207,22 @@
       </p:sp>
       <p:pic>
         <p:nvPicPr>
-          <p:cNvPr id="20" name="Image 2" descr="icons/brain.png"/>
+          <p:cNvPr id="19" name="Image 2" descr="icons/bolt.png"/>
           <p:cNvPicPr>
             <a:picLocks noChangeAspect="1"/>
           </p:cNvPicPr>
           <p:nvPr/>
         </p:nvPicPr>
         <p:blipFill>
-          <a:blip r:embed="rId3"/>
+          <a:blip r:embed="rId5"/>
           <a:stretch>
             <a:fillRect/>
           </a:stretch>
         </p:blipFill>
         <p:spPr>
           <a:xfrm>
-            <a:off x="8605008" y="2740000"/>
-            <a:ext cx="300000" cy="300000"/>
+            <a:off x="1280160" y="4453128"/>
+            <a:ext cx="219456" cy="219456"/>
           </a:xfrm>
           <a:prstGeom prst="rect">
             <a:avLst/>
@@ -5019,14 +6231,53 @@
       </p:pic>
       <p:sp>
         <p:nvSpPr>
+          <p:cNvPr id="20" name="Text 15"/>
+          <p:cNvSpPr/>
+          <p:nvPr/>
+        </p:nvSpPr>
+        <p:spPr>
+          <a:xfrm>
+            <a:off x="1837944" y="4233672"/>
+            <a:ext cx="4114800" cy="365760"/>
+          </a:xfrm>
+          <a:prstGeom prst="rect">
+            <a:avLst/>
+          </a:prstGeom>
+          <a:noFill/>
+          <a:ln/>
+        </p:spPr>
+        <p:txBody>
+          <a:bodyPr wrap="square" lIns="0" tIns="0" rIns="0" bIns="0" rtlCol="0" anchor="ctr"/>
+          <a:lstStyle/>
+          <a:p>
+            <a:pPr marL="0" indent="0">
+              <a:buNone/>
+            </a:pPr>
+            <a:r>
+              <a:rPr lang="en-US" sz="1500" b="1" dirty="0">
+                <a:solidFill>
+                  <a:srgbClr val="111418"/>
+                </a:solidFill>
+                <a:latin typeface="Calibri" pitchFamily="34" charset="0"/>
+                <a:ea typeface="Calibri" pitchFamily="34" charset="-122"/>
+                <a:cs typeface="Calibri" pitchFamily="34" charset="-120"/>
+              </a:rPr>
+              <a:t>Производительность</a:t>
+            </a:r>
+            <a:endParaRPr lang="en-US" sz="1500" dirty="0"/>
+          </a:p>
+        </p:txBody>
+      </p:sp>
+      <p:sp>
+        <p:nvSpPr>
           <p:cNvPr id="21" name="Text 16"/>
           <p:cNvSpPr/>
           <p:nvPr/>
         </p:nvSpPr>
         <p:spPr>
           <a:xfrm>
-            <a:off x="8395008" y="3780000"/>
-            <a:ext cx="2814720" cy="420000"/>
+            <a:off x="1837944" y="4617720"/>
+            <a:ext cx="4160520" cy="868680"/>
           </a:xfrm>
           <a:prstGeom prst="rect">
             <a:avLst/>
@@ -5038,11 +6289,138 @@
           <a:bodyPr wrap="square" lIns="0" tIns="0" rIns="0" bIns="0" rtlCol="0" anchor="t"/>
           <a:lstStyle/>
           <a:p>
-            <a:pPr indent="0" marL="0">
-              <a:buNone/>
-            </a:pPr>
-            <a:r>
-              <a:rPr lang="en-US" sz="1700" b="1" dirty="0">
+            <a:pPr marL="0" indent="0">
+              <a:lnSpc>
+                <a:spcPct val="105000"/>
+              </a:lnSpc>
+              <a:buNone/>
+            </a:pPr>
+            <a:r>
+              <a:rPr lang="en-US" sz="1200" dirty="0">
+                <a:solidFill>
+                  <a:srgbClr val="33383F"/>
+                </a:solidFill>
+                <a:latin typeface="Calibri" pitchFamily="34" charset="0"/>
+                <a:ea typeface="Calibri" pitchFamily="34" charset="-122"/>
+                <a:cs typeface="Calibri" pitchFamily="34" charset="-120"/>
+              </a:rPr>
+              <a:t>индексы, быстрые вставки батчей и выборки по сессиям</a:t>
+            </a:r>
+            <a:endParaRPr lang="en-US" sz="1200" dirty="0"/>
+          </a:p>
+        </p:txBody>
+      </p:sp>
+      <p:sp>
+        <p:nvSpPr>
+          <p:cNvPr id="22" name="Shape 17"/>
+          <p:cNvSpPr/>
+          <p:nvPr/>
+        </p:nvSpPr>
+        <p:spPr>
+          <a:xfrm>
+            <a:off x="6364224" y="4014216"/>
+            <a:ext cx="5257800" cy="1600200"/>
+          </a:xfrm>
+          <a:prstGeom prst="roundRect">
+            <a:avLst>
+              <a:gd name="adj" fmla="val 5143"/>
+            </a:avLst>
+          </a:prstGeom>
+          <a:solidFill>
+            <a:srgbClr val="F4FAFD"/>
+          </a:solidFill>
+          <a:ln w="12700">
+            <a:solidFill>
+              <a:srgbClr val="DCE6EC"/>
+            </a:solidFill>
+            <a:prstDash val="solid"/>
+          </a:ln>
+          <a:effectLst>
+            <a:outerShdw blurRad="88900" dist="25400" dir="5400000" algn="bl" rotWithShape="0">
+              <a:srgbClr val="B8C9D4">
+                <a:alpha val="22000"/>
+              </a:srgbClr>
+            </a:outerShdw>
+          </a:effectLst>
+        </p:spPr>
+      </p:sp>
+      <p:sp>
+        <p:nvSpPr>
+          <p:cNvPr id="23" name="Shape 18"/>
+          <p:cNvSpPr/>
+          <p:nvPr/>
+        </p:nvSpPr>
+        <p:spPr>
+          <a:xfrm>
+            <a:off x="6601968" y="4288536"/>
+            <a:ext cx="548640" cy="548640"/>
+          </a:xfrm>
+          <a:prstGeom prst="ellipse">
+            <a:avLst/>
+          </a:prstGeom>
+          <a:solidFill>
+            <a:srgbClr val="1F9BD8"/>
+          </a:solidFill>
+          <a:ln/>
+          <a:effectLst>
+            <a:outerShdw blurRad="88900" dist="25400" dir="5400000" algn="bl" rotWithShape="0">
+              <a:srgbClr val="B8C9D4">
+                <a:alpha val="22000"/>
+              </a:srgbClr>
+            </a:outerShdw>
+          </a:effectLst>
+        </p:spPr>
+      </p:sp>
+      <p:pic>
+        <p:nvPicPr>
+          <p:cNvPr id="24" name="Image 3" descr="icons/shield.png"/>
+          <p:cNvPicPr>
+            <a:picLocks noChangeAspect="1"/>
+          </p:cNvPicPr>
+          <p:nvPr/>
+        </p:nvPicPr>
+        <p:blipFill>
+          <a:blip r:embed="rId6"/>
+          <a:stretch>
+            <a:fillRect/>
+          </a:stretch>
+        </p:blipFill>
+        <p:spPr>
+          <a:xfrm>
+            <a:off x="6766560" y="4453128"/>
+            <a:ext cx="219456" cy="219456"/>
+          </a:xfrm>
+          <a:prstGeom prst="rect">
+            <a:avLst/>
+          </a:prstGeom>
+        </p:spPr>
+      </p:pic>
+      <p:sp>
+        <p:nvSpPr>
+          <p:cNvPr id="25" name="Text 19"/>
+          <p:cNvSpPr/>
+          <p:nvPr/>
+        </p:nvSpPr>
+        <p:spPr>
+          <a:xfrm>
+            <a:off x="7324344" y="4233672"/>
+            <a:ext cx="4114800" cy="365760"/>
+          </a:xfrm>
+          <a:prstGeom prst="rect">
+            <a:avLst/>
+          </a:prstGeom>
+          <a:noFill/>
+          <a:ln/>
+        </p:spPr>
+        <p:txBody>
+          <a:bodyPr wrap="square" lIns="0" tIns="0" rIns="0" bIns="0" rtlCol="0" anchor="ctr"/>
+          <a:lstStyle/>
+          <a:p>
+            <a:pPr marL="0" indent="0">
+              <a:buNone/>
+            </a:pPr>
+            <a:r>
+              <a:rPr lang="en-US" sz="1500" b="1" dirty="0">
                 <a:solidFill>
                   <a:srgbClr val="111418"/>
                 </a:solidFill>
@@ -5050,22 +6428,22 @@
                 <a:ea typeface="Calibri" pitchFamily="34" charset="-122"/>
                 <a:cs typeface="Calibri" pitchFamily="34" charset="-120"/>
               </a:rPr>
-              <a:t>Тяжёлое — на сервере</a:t>
-            </a:r>
-            <a:endParaRPr lang="en-US" sz="1700" dirty="0"/>
-          </a:p>
-        </p:txBody>
-      </p:sp>
-      <p:sp>
-        <p:nvSpPr>
-          <p:cNvPr id="22" name="Text 17"/>
-          <p:cNvSpPr/>
-          <p:nvPr/>
-        </p:nvSpPr>
-        <p:spPr>
-          <a:xfrm>
-            <a:off x="8395008" y="4320000"/>
-            <a:ext cx="2814720" cy="560000"/>
+              <a:t>Открытая и зрелая</a:t>
+            </a:r>
+            <a:endParaRPr lang="en-US" sz="1500" dirty="0"/>
+          </a:p>
+        </p:txBody>
+      </p:sp>
+      <p:sp>
+        <p:nvSpPr>
+          <p:cNvPr id="26" name="Text 20"/>
+          <p:cNvSpPr/>
+          <p:nvPr/>
+        </p:nvSpPr>
+        <p:spPr>
+          <a:xfrm>
+            <a:off x="7324344" y="4617720"/>
+            <a:ext cx="4160520" cy="868680"/>
           </a:xfrm>
           <a:prstGeom prst="rect">
             <a:avLst/>
@@ -5077,14 +6455,14 @@
           <a:bodyPr wrap="square" lIns="0" tIns="0" rIns="0" bIns="0" rtlCol="0" anchor="t"/>
           <a:lstStyle/>
           <a:p>
-            <a:pPr indent="0" marL="0">
+            <a:pPr marL="0" indent="0">
               <a:lnSpc>
-                <a:spcPct val="104000"/>
+                <a:spcPct val="105000"/>
               </a:lnSpc>
               <a:buNone/>
             </a:pPr>
             <a:r>
-              <a:rPr lang="en-US" sz="1300" dirty="0">
+              <a:rPr lang="en-US" sz="1200" dirty="0">
                 <a:solidFill>
                   <a:srgbClr val="33383F"/>
                 </a:solidFill>
@@ -5092,9 +6470,9 @@
                 <a:ea typeface="Calibri" pitchFamily="34" charset="-122"/>
                 <a:cs typeface="Calibri" pitchFamily="34" charset="-120"/>
               </a:rPr>
-              <a:t>построение признаков и ML вынесены с клиента</a:t>
-            </a:r>
-            <a:endParaRPr lang="en-US" sz="1300" dirty="0"/>
+              <a:t>бесплатна, огромная экосистема, проверена в продакшене</a:t>
+            </a:r>
+            <a:endParaRPr lang="en-US" sz="1200" dirty="0"/>
           </a:p>
         </p:txBody>
       </p:sp>
@@ -5106,820 +6484,7 @@
 </p:sld>
 </file>
 
-<file path=ppt/slides/slide3.xml><?xml version="1.0" encoding="utf-8"?>
-<p:sld xmlns:a="http://schemas.openxmlformats.org/drawingml/2006/main" xmlns:r="http://schemas.openxmlformats.org/officeDocument/2006/relationships" xmlns:p="http://schemas.openxmlformats.org/presentationml/2006/main">
-  <p:cSld name="Slide 3">
-    <p:bg>
-      <p:bgPr>
-        <a:solidFill>
-          <a:srgbClr val="FFFFFF"/>
-        </a:solidFill>
-      </p:bgPr>
-    </p:bg>
-    <p:spTree>
-      <p:nvGrpSpPr>
-        <p:cNvPr id="1" name=""/>
-        <p:cNvGrpSpPr/>
-        <p:nvPr/>
-      </p:nvGrpSpPr>
-      <p:grpSpPr>
-        <a:xfrm>
-          <a:off x="0" y="0"/>
-          <a:ext cx="0" cy="0"/>
-          <a:chOff x="0" y="0"/>
-          <a:chExt cx="0" cy="0"/>
-        </a:xfrm>
-      </p:grpSpPr>
-      <p:sp>
-        <p:nvSpPr>
-          <p:cNvPr id="2" name="Text 0"/>
-          <p:cNvSpPr/>
-          <p:nvPr/>
-        </p:nvSpPr>
-        <p:spPr>
-          <a:xfrm>
-            <a:off x="10820095" y="384048"/>
-            <a:ext cx="822960" cy="640080"/>
-          </a:xfrm>
-          <a:prstGeom prst="rect">
-            <a:avLst/>
-          </a:prstGeom>
-          <a:noFill/>
-          <a:ln/>
-        </p:spPr>
-        <p:txBody>
-          <a:bodyPr wrap="square" lIns="0" tIns="0" rIns="0" bIns="0" rtlCol="0" anchor="ctr"/>
-          <a:lstStyle/>
-          <a:p>
-            <a:pPr algn="r" indent="0" marL="0">
-              <a:buNone/>
-            </a:pPr>
-            <a:r>
-              <a:rPr lang="en-US" sz="3000" b="1" dirty="0">
-                <a:solidFill>
-                  <a:srgbClr val="C6D6E0"/>
-                </a:solidFill>
-                <a:latin typeface="Cambria" pitchFamily="34" charset="0"/>
-                <a:ea typeface="Cambria" pitchFamily="34" charset="-122"/>
-                <a:cs typeface="Cambria" pitchFamily="34" charset="-120"/>
-              </a:rPr>
-              <a:t>4</a:t>
-            </a:r>
-            <a:endParaRPr lang="en-US" sz="3000" dirty="0"/>
-          </a:p>
-        </p:txBody>
-      </p:sp>
-      <p:sp>
-        <p:nvSpPr>
-          <p:cNvPr id="3" name="Text 1"/>
-          <p:cNvSpPr/>
-          <p:nvPr/>
-        </p:nvSpPr>
-        <p:spPr>
-          <a:xfrm>
-            <a:off x="640080" y="475488"/>
-            <a:ext cx="8229600" cy="274320"/>
-          </a:xfrm>
-          <a:prstGeom prst="rect">
-            <a:avLst/>
-          </a:prstGeom>
-          <a:noFill/>
-          <a:ln/>
-        </p:spPr>
-        <p:txBody>
-          <a:bodyPr wrap="square" lIns="0" tIns="0" rIns="0" bIns="0" rtlCol="0" anchor="ctr"/>
-          <a:lstStyle/>
-          <a:p>
-            <a:pPr indent="0" marL="0">
-              <a:buNone/>
-            </a:pPr>
-            <a:r>
-              <a:rPr lang="en-US" sz="1500" b="1" spc="250" kern="0" dirty="0">
-                <a:solidFill>
-                  <a:srgbClr val="1F9BD8"/>
-                </a:solidFill>
-                <a:latin typeface="Calibri" pitchFamily="34" charset="0"/>
-                <a:ea typeface="Calibri" pitchFamily="34" charset="-122"/>
-                <a:cs typeface="Calibri" pitchFamily="34" charset="-120"/>
-              </a:rPr>
-              <a:t>ВЫБОР БД · 1/2</a:t>
-            </a:r>
-            <a:endParaRPr lang="en-US" sz="1500" dirty="0"/>
-          </a:p>
-        </p:txBody>
-      </p:sp>
-      <p:sp>
-        <p:nvSpPr>
-          <p:cNvPr id="4" name="Text 2"/>
-          <p:cNvSpPr/>
-          <p:nvPr/>
-        </p:nvSpPr>
-        <p:spPr>
-          <a:xfrm>
-            <a:off x="640080" y="749808"/>
-            <a:ext cx="10362895" cy="777240"/>
-          </a:xfrm>
-          <a:prstGeom prst="rect">
-            <a:avLst/>
-          </a:prstGeom>
-          <a:noFill/>
-          <a:ln/>
-        </p:spPr>
-        <p:txBody>
-          <a:bodyPr wrap="square" lIns="0" tIns="0" rIns="0" bIns="0" rtlCol="0" anchor="ctr"/>
-          <a:lstStyle/>
-          <a:p>
-            <a:pPr indent="0" marL="0">
-              <a:buNone/>
-            </a:pPr>
-            <a:r>
-              <a:rPr lang="en-US" sz="3000" b="1" dirty="0">
-                <a:solidFill>
-                  <a:srgbClr val="111418"/>
-                </a:solidFill>
-                <a:latin typeface="Cambria" pitchFamily="34" charset="0"/>
-                <a:ea typeface="Cambria" pitchFamily="34" charset="-122"/>
-                <a:cs typeface="Cambria" pitchFamily="34" charset="-120"/>
-              </a:rPr>
-              <a:t>Преимущества PostgreSQL</a:t>
-            </a:r>
-            <a:endParaRPr lang="en-US" sz="3000" dirty="0"/>
-          </a:p>
-        </p:txBody>
-      </p:sp>
-      <p:sp>
-        <p:nvSpPr>
-          <p:cNvPr id="7" name="Shape 5"/>
-          <p:cNvSpPr/>
-          <p:nvPr/>
-        </p:nvSpPr>
-        <p:spPr>
-          <a:xfrm>
-            <a:off x="640080" y="1828800"/>
-            <a:ext cx="5257800" cy="1600200"/>
-          </a:xfrm>
-          <a:prstGeom prst="roundRect">
-            <a:avLst>
-              <a:gd name="adj" fmla="val 5143"/>
-            </a:avLst>
-          </a:prstGeom>
-          <a:solidFill>
-            <a:srgbClr val="F4FAFD"/>
-          </a:solidFill>
-          <a:ln w="12700">
-            <a:solidFill>
-              <a:srgbClr val="DCE6EC"/>
-            </a:solidFill>
-            <a:prstDash val="solid"/>
-          </a:ln>
-          <a:effectLst>
-            <a:outerShdw sx="100000" sy="100000" kx="0" ky="0" algn="bl" rotWithShape="0" blurRad="88900" dist="25400" dir="5400000">
-              <a:srgbClr val="B8C9D4">
-                <a:alpha val="22000"/>
-              </a:srgbClr>
-            </a:outerShdw>
-          </a:effectLst>
-        </p:spPr>
-      </p:sp>
-      <p:sp>
-        <p:nvSpPr>
-          <p:cNvPr id="8" name="Shape 6"/>
-          <p:cNvSpPr/>
-          <p:nvPr/>
-        </p:nvSpPr>
-        <p:spPr>
-          <a:xfrm>
-            <a:off x="877824" y="2103120"/>
-            <a:ext cx="548640" cy="548640"/>
-          </a:xfrm>
-          <a:prstGeom prst="ellipse">
-            <a:avLst/>
-          </a:prstGeom>
-          <a:solidFill>
-            <a:srgbClr val="1F9BD8"/>
-          </a:solidFill>
-          <a:ln/>
-          <a:effectLst>
-            <a:outerShdw sx="100000" sy="100000" kx="0" ky="0" algn="bl" rotWithShape="0" blurRad="88900" dist="25400" dir="5400000">
-              <a:srgbClr val="B8C9D4">
-                <a:alpha val="22000"/>
-              </a:srgbClr>
-            </a:outerShdw>
-          </a:effectLst>
-        </p:spPr>
-      </p:sp>
-      <p:pic>
-        <p:nvPicPr>
-          <p:cNvPr id="9" name="Image 0" descr="icons/check.png"/>
-          <p:cNvPicPr>
-            <a:picLocks noChangeAspect="1"/>
-          </p:cNvPicPr>
-          <p:nvPr/>
-        </p:nvPicPr>
-        <p:blipFill>
-          <a:blip r:embed="rId1"/>
-          <a:stretch>
-            <a:fillRect/>
-          </a:stretch>
-        </p:blipFill>
-        <p:spPr>
-          <a:xfrm>
-            <a:off x="1042416" y="2267712"/>
-            <a:ext cx="219456" cy="219456"/>
-          </a:xfrm>
-          <a:prstGeom prst="rect">
-            <a:avLst/>
-          </a:prstGeom>
-        </p:spPr>
-      </p:pic>
-      <p:sp>
-        <p:nvSpPr>
-          <p:cNvPr id="10" name="Text 7"/>
-          <p:cNvSpPr/>
-          <p:nvPr/>
-        </p:nvSpPr>
-        <p:spPr>
-          <a:xfrm>
-            <a:off x="1600200" y="2048256"/>
-            <a:ext cx="4114800" cy="365760"/>
-          </a:xfrm>
-          <a:prstGeom prst="rect">
-            <a:avLst/>
-          </a:prstGeom>
-          <a:noFill/>
-          <a:ln/>
-        </p:spPr>
-        <p:txBody>
-          <a:bodyPr wrap="square" lIns="0" tIns="0" rIns="0" bIns="0" rtlCol="0" anchor="ctr"/>
-          <a:lstStyle/>
-          <a:p>
-            <a:pPr indent="0" marL="0">
-              <a:buNone/>
-            </a:pPr>
-            <a:r>
-              <a:rPr lang="en-US" sz="1500" b="1" dirty="0">
-                <a:solidFill>
-                  <a:srgbClr val="111418"/>
-                </a:solidFill>
-                <a:latin typeface="Calibri" pitchFamily="34" charset="0"/>
-                <a:ea typeface="Calibri" pitchFamily="34" charset="-122"/>
-                <a:cs typeface="Calibri" pitchFamily="34" charset="-120"/>
-              </a:rPr>
-              <a:t>Надёжность и ACID</a:t>
-            </a:r>
-            <a:endParaRPr lang="en-US" sz="1500" dirty="0"/>
-          </a:p>
-        </p:txBody>
-      </p:sp>
-      <p:sp>
-        <p:nvSpPr>
-          <p:cNvPr id="11" name="Text 8"/>
-          <p:cNvSpPr/>
-          <p:nvPr/>
-        </p:nvSpPr>
-        <p:spPr>
-          <a:xfrm>
-            <a:off x="1600200" y="2432304"/>
-            <a:ext cx="4160520" cy="868680"/>
-          </a:xfrm>
-          <a:prstGeom prst="rect">
-            <a:avLst/>
-          </a:prstGeom>
-          <a:noFill/>
-          <a:ln/>
-        </p:spPr>
-        <p:txBody>
-          <a:bodyPr wrap="square" lIns="0" tIns="0" rIns="0" bIns="0" rtlCol="0" anchor="t"/>
-          <a:lstStyle/>
-          <a:p>
-            <a:pPr indent="0" marL="0">
-              <a:lnSpc>
-                <a:spcPct val="105000"/>
-              </a:lnSpc>
-              <a:buNone/>
-            </a:pPr>
-            <a:r>
-              <a:rPr lang="en-US" sz="1200" dirty="0">
-                <a:solidFill>
-                  <a:srgbClr val="33383F"/>
-                </a:solidFill>
-                <a:latin typeface="Calibri" pitchFamily="34" charset="0"/>
-                <a:ea typeface="Calibri" pitchFamily="34" charset="-122"/>
-                <a:cs typeface="Calibri" pitchFamily="34" charset="-120"/>
-              </a:rPr>
-              <a:t>транзакции и целостность данных телеметрии гарантированы</a:t>
-            </a:r>
-            <a:endParaRPr lang="en-US" sz="1200" dirty="0"/>
-          </a:p>
-        </p:txBody>
-      </p:sp>
-      <p:sp>
-        <p:nvSpPr>
-          <p:cNvPr id="12" name="Shape 9"/>
-          <p:cNvSpPr/>
-          <p:nvPr/>
-        </p:nvSpPr>
-        <p:spPr>
-          <a:xfrm>
-            <a:off x="6126480" y="1828800"/>
-            <a:ext cx="5257800" cy="1600200"/>
-          </a:xfrm>
-          <a:prstGeom prst="roundRect">
-            <a:avLst>
-              <a:gd name="adj" fmla="val 5143"/>
-            </a:avLst>
-          </a:prstGeom>
-          <a:solidFill>
-            <a:srgbClr val="FFFFFF"/>
-          </a:solidFill>
-          <a:ln w="12700">
-            <a:solidFill>
-              <a:srgbClr val="DCE6EC"/>
-            </a:solidFill>
-            <a:prstDash val="solid"/>
-          </a:ln>
-          <a:effectLst>
-            <a:outerShdw sx="100000" sy="100000" kx="0" ky="0" algn="bl" rotWithShape="0" blurRad="88900" dist="25400" dir="5400000">
-              <a:srgbClr val="B8C9D4">
-                <a:alpha val="22000"/>
-              </a:srgbClr>
-            </a:outerShdw>
-          </a:effectLst>
-        </p:spPr>
-      </p:sp>
-      <p:sp>
-        <p:nvSpPr>
-          <p:cNvPr id="13" name="Shape 10"/>
-          <p:cNvSpPr/>
-          <p:nvPr/>
-        </p:nvSpPr>
-        <p:spPr>
-          <a:xfrm>
-            <a:off x="6364224" y="2103120"/>
-            <a:ext cx="548640" cy="548640"/>
-          </a:xfrm>
-          <a:prstGeom prst="ellipse">
-            <a:avLst/>
-          </a:prstGeom>
-          <a:solidFill>
-            <a:srgbClr val="1F9BD8"/>
-          </a:solidFill>
-          <a:ln/>
-          <a:effectLst>
-            <a:outerShdw sx="100000" sy="100000" kx="0" ky="0" algn="bl" rotWithShape="0" blurRad="88900" dist="25400" dir="5400000">
-              <a:srgbClr val="B8C9D4">
-                <a:alpha val="22000"/>
-              </a:srgbClr>
-            </a:outerShdw>
-          </a:effectLst>
-        </p:spPr>
-      </p:sp>
-      <p:pic>
-        <p:nvPicPr>
-          <p:cNvPr id="14" name="Image 1" descr="icons/layers.png"/>
-          <p:cNvPicPr>
-            <a:picLocks noChangeAspect="1"/>
-          </p:cNvPicPr>
-          <p:nvPr/>
-        </p:nvPicPr>
-        <p:blipFill>
-          <a:blip r:embed="rId2"/>
-          <a:stretch>
-            <a:fillRect/>
-          </a:stretch>
-        </p:blipFill>
-        <p:spPr>
-          <a:xfrm>
-            <a:off x="6528816" y="2267712"/>
-            <a:ext cx="219456" cy="219456"/>
-          </a:xfrm>
-          <a:prstGeom prst="rect">
-            <a:avLst/>
-          </a:prstGeom>
-        </p:spPr>
-      </p:pic>
-      <p:sp>
-        <p:nvSpPr>
-          <p:cNvPr id="15" name="Text 11"/>
-          <p:cNvSpPr/>
-          <p:nvPr/>
-        </p:nvSpPr>
-        <p:spPr>
-          <a:xfrm>
-            <a:off x="7086600" y="2048256"/>
-            <a:ext cx="4114800" cy="365760"/>
-          </a:xfrm>
-          <a:prstGeom prst="rect">
-            <a:avLst/>
-          </a:prstGeom>
-          <a:noFill/>
-          <a:ln/>
-        </p:spPr>
-        <p:txBody>
-          <a:bodyPr wrap="square" lIns="0" tIns="0" rIns="0" bIns="0" rtlCol="0" anchor="ctr"/>
-          <a:lstStyle/>
-          <a:p>
-            <a:pPr indent="0" marL="0">
-              <a:buNone/>
-            </a:pPr>
-            <a:r>
-              <a:rPr lang="en-US" sz="1500" b="1" dirty="0">
-                <a:solidFill>
-                  <a:srgbClr val="111418"/>
-                </a:solidFill>
-                <a:latin typeface="Calibri" pitchFamily="34" charset="0"/>
-                <a:ea typeface="Calibri" pitchFamily="34" charset="-122"/>
-                <a:cs typeface="Calibri" pitchFamily="34" charset="-120"/>
-              </a:rPr>
-              <a:t>JSONB из коробки</a:t>
-            </a:r>
-            <a:endParaRPr lang="en-US" sz="1500" dirty="0"/>
-          </a:p>
-        </p:txBody>
-      </p:sp>
-      <p:sp>
-        <p:nvSpPr>
-          <p:cNvPr id="16" name="Text 12"/>
-          <p:cNvSpPr/>
-          <p:nvPr/>
-        </p:nvSpPr>
-        <p:spPr>
-          <a:xfrm>
-            <a:off x="7086600" y="2432304"/>
-            <a:ext cx="4160520" cy="868680"/>
-          </a:xfrm>
-          <a:prstGeom prst="rect">
-            <a:avLst/>
-          </a:prstGeom>
-          <a:noFill/>
-          <a:ln/>
-        </p:spPr>
-        <p:txBody>
-          <a:bodyPr wrap="square" lIns="0" tIns="0" rIns="0" bIns="0" rtlCol="0" anchor="t"/>
-          <a:lstStyle/>
-          <a:p>
-            <a:pPr indent="0" marL="0">
-              <a:lnSpc>
-                <a:spcPct val="105000"/>
-              </a:lnSpc>
-              <a:buNone/>
-            </a:pPr>
-            <a:r>
-              <a:rPr lang="en-US" sz="1200" dirty="0">
-                <a:solidFill>
-                  <a:srgbClr val="33383F"/>
-                </a:solidFill>
-                <a:latin typeface="Calibri" pitchFamily="34" charset="0"/>
-                <a:ea typeface="Calibri" pitchFamily="34" charset="-122"/>
-                <a:cs typeface="Calibri" pitchFamily="34" charset="-120"/>
-              </a:rPr>
-              <a:t>гибкие parameters и state событий хранятся как индексируемый JSON</a:t>
-            </a:r>
-            <a:endParaRPr lang="en-US" sz="1200" dirty="0"/>
-          </a:p>
-        </p:txBody>
-      </p:sp>
-      <p:sp>
-        <p:nvSpPr>
-          <p:cNvPr id="17" name="Shape 13"/>
-          <p:cNvSpPr/>
-          <p:nvPr/>
-        </p:nvSpPr>
-        <p:spPr>
-          <a:xfrm>
-            <a:off x="640080" y="3611880"/>
-            <a:ext cx="5257800" cy="1600200"/>
-          </a:xfrm>
-          <a:prstGeom prst="roundRect">
-            <a:avLst>
-              <a:gd name="adj" fmla="val 5143"/>
-            </a:avLst>
-          </a:prstGeom>
-          <a:solidFill>
-            <a:srgbClr val="FFFFFF"/>
-          </a:solidFill>
-          <a:ln w="12700">
-            <a:solidFill>
-              <a:srgbClr val="DCE6EC"/>
-            </a:solidFill>
-            <a:prstDash val="solid"/>
-          </a:ln>
-          <a:effectLst>
-            <a:outerShdw sx="100000" sy="100000" kx="0" ky="0" algn="bl" rotWithShape="0" blurRad="88900" dist="25400" dir="5400000">
-              <a:srgbClr val="B8C9D4">
-                <a:alpha val="22000"/>
-              </a:srgbClr>
-            </a:outerShdw>
-          </a:effectLst>
-        </p:spPr>
-      </p:sp>
-      <p:sp>
-        <p:nvSpPr>
-          <p:cNvPr id="18" name="Shape 14"/>
-          <p:cNvSpPr/>
-          <p:nvPr/>
-        </p:nvSpPr>
-        <p:spPr>
-          <a:xfrm>
-            <a:off x="877824" y="3886200"/>
-            <a:ext cx="548640" cy="548640"/>
-          </a:xfrm>
-          <a:prstGeom prst="ellipse">
-            <a:avLst/>
-          </a:prstGeom>
-          <a:solidFill>
-            <a:srgbClr val="1F9BD8"/>
-          </a:solidFill>
-          <a:ln/>
-          <a:effectLst>
-            <a:outerShdw sx="100000" sy="100000" kx="0" ky="0" algn="bl" rotWithShape="0" blurRad="88900" dist="25400" dir="5400000">
-              <a:srgbClr val="B8C9D4">
-                <a:alpha val="22000"/>
-              </a:srgbClr>
-            </a:outerShdw>
-          </a:effectLst>
-        </p:spPr>
-      </p:sp>
-      <p:pic>
-        <p:nvPicPr>
-          <p:cNvPr id="19" name="Image 2" descr="icons/bolt.png"/>
-          <p:cNvPicPr>
-            <a:picLocks noChangeAspect="1"/>
-          </p:cNvPicPr>
-          <p:nvPr/>
-        </p:nvPicPr>
-        <p:blipFill>
-          <a:blip r:embed="rId3"/>
-          <a:stretch>
-            <a:fillRect/>
-          </a:stretch>
-        </p:blipFill>
-        <p:spPr>
-          <a:xfrm>
-            <a:off x="1042416" y="4050792"/>
-            <a:ext cx="219456" cy="219456"/>
-          </a:xfrm>
-          <a:prstGeom prst="rect">
-            <a:avLst/>
-          </a:prstGeom>
-        </p:spPr>
-      </p:pic>
-      <p:sp>
-        <p:nvSpPr>
-          <p:cNvPr id="20" name="Text 15"/>
-          <p:cNvSpPr/>
-          <p:nvPr/>
-        </p:nvSpPr>
-        <p:spPr>
-          <a:xfrm>
-            <a:off x="1600200" y="3831336"/>
-            <a:ext cx="4114800" cy="365760"/>
-          </a:xfrm>
-          <a:prstGeom prst="rect">
-            <a:avLst/>
-          </a:prstGeom>
-          <a:noFill/>
-          <a:ln/>
-        </p:spPr>
-        <p:txBody>
-          <a:bodyPr wrap="square" lIns="0" tIns="0" rIns="0" bIns="0" rtlCol="0" anchor="ctr"/>
-          <a:lstStyle/>
-          <a:p>
-            <a:pPr indent="0" marL="0">
-              <a:buNone/>
-            </a:pPr>
-            <a:r>
-              <a:rPr lang="en-US" sz="1500" b="1" dirty="0">
-                <a:solidFill>
-                  <a:srgbClr val="111418"/>
-                </a:solidFill>
-                <a:latin typeface="Calibri" pitchFamily="34" charset="0"/>
-                <a:ea typeface="Calibri" pitchFamily="34" charset="-122"/>
-                <a:cs typeface="Calibri" pitchFamily="34" charset="-120"/>
-              </a:rPr>
-              <a:t>Производительность</a:t>
-            </a:r>
-            <a:endParaRPr lang="en-US" sz="1500" dirty="0"/>
-          </a:p>
-        </p:txBody>
-      </p:sp>
-      <p:sp>
-        <p:nvSpPr>
-          <p:cNvPr id="21" name="Text 16"/>
-          <p:cNvSpPr/>
-          <p:nvPr/>
-        </p:nvSpPr>
-        <p:spPr>
-          <a:xfrm>
-            <a:off x="1600200" y="4215384"/>
-            <a:ext cx="4160520" cy="868680"/>
-          </a:xfrm>
-          <a:prstGeom prst="rect">
-            <a:avLst/>
-          </a:prstGeom>
-          <a:noFill/>
-          <a:ln/>
-        </p:spPr>
-        <p:txBody>
-          <a:bodyPr wrap="square" lIns="0" tIns="0" rIns="0" bIns="0" rtlCol="0" anchor="t"/>
-          <a:lstStyle/>
-          <a:p>
-            <a:pPr indent="0" marL="0">
-              <a:lnSpc>
-                <a:spcPct val="105000"/>
-              </a:lnSpc>
-              <a:buNone/>
-            </a:pPr>
-            <a:r>
-              <a:rPr lang="en-US" sz="1200" dirty="0">
-                <a:solidFill>
-                  <a:srgbClr val="33383F"/>
-                </a:solidFill>
-                <a:latin typeface="Calibri" pitchFamily="34" charset="0"/>
-                <a:ea typeface="Calibri" pitchFamily="34" charset="-122"/>
-                <a:cs typeface="Calibri" pitchFamily="34" charset="-120"/>
-              </a:rPr>
-              <a:t>индексы, быстрые вставки батчей и выборки по сессиям</a:t>
-            </a:r>
-            <a:endParaRPr lang="en-US" sz="1200" dirty="0"/>
-          </a:p>
-        </p:txBody>
-      </p:sp>
-      <p:sp>
-        <p:nvSpPr>
-          <p:cNvPr id="22" name="Shape 17"/>
-          <p:cNvSpPr/>
-          <p:nvPr/>
-        </p:nvSpPr>
-        <p:spPr>
-          <a:xfrm>
-            <a:off x="6126480" y="3611880"/>
-            <a:ext cx="5257800" cy="1600200"/>
-          </a:xfrm>
-          <a:prstGeom prst="roundRect">
-            <a:avLst>
-              <a:gd name="adj" fmla="val 5143"/>
-            </a:avLst>
-          </a:prstGeom>
-          <a:solidFill>
-            <a:srgbClr val="F4FAFD"/>
-          </a:solidFill>
-          <a:ln w="12700">
-            <a:solidFill>
-              <a:srgbClr val="DCE6EC"/>
-            </a:solidFill>
-            <a:prstDash val="solid"/>
-          </a:ln>
-          <a:effectLst>
-            <a:outerShdw sx="100000" sy="100000" kx="0" ky="0" algn="bl" rotWithShape="0" blurRad="88900" dist="25400" dir="5400000">
-              <a:srgbClr val="B8C9D4">
-                <a:alpha val="22000"/>
-              </a:srgbClr>
-            </a:outerShdw>
-          </a:effectLst>
-        </p:spPr>
-      </p:sp>
-      <p:sp>
-        <p:nvSpPr>
-          <p:cNvPr id="23" name="Shape 18"/>
-          <p:cNvSpPr/>
-          <p:nvPr/>
-        </p:nvSpPr>
-        <p:spPr>
-          <a:xfrm>
-            <a:off x="6364224" y="3886200"/>
-            <a:ext cx="548640" cy="548640"/>
-          </a:xfrm>
-          <a:prstGeom prst="ellipse">
-            <a:avLst/>
-          </a:prstGeom>
-          <a:solidFill>
-            <a:srgbClr val="1F9BD8"/>
-          </a:solidFill>
-          <a:ln/>
-          <a:effectLst>
-            <a:outerShdw sx="100000" sy="100000" kx="0" ky="0" algn="bl" rotWithShape="0" blurRad="88900" dist="25400" dir="5400000">
-              <a:srgbClr val="B8C9D4">
-                <a:alpha val="22000"/>
-              </a:srgbClr>
-            </a:outerShdw>
-          </a:effectLst>
-        </p:spPr>
-      </p:sp>
-      <p:pic>
-        <p:nvPicPr>
-          <p:cNvPr id="24" name="Image 3" descr="icons/shield.png"/>
-          <p:cNvPicPr>
-            <a:picLocks noChangeAspect="1"/>
-          </p:cNvPicPr>
-          <p:nvPr/>
-        </p:nvPicPr>
-        <p:blipFill>
-          <a:blip r:embed="rId4"/>
-          <a:stretch>
-            <a:fillRect/>
-          </a:stretch>
-        </p:blipFill>
-        <p:spPr>
-          <a:xfrm>
-            <a:off x="6528816" y="4050792"/>
-            <a:ext cx="219456" cy="219456"/>
-          </a:xfrm>
-          <a:prstGeom prst="rect">
-            <a:avLst/>
-          </a:prstGeom>
-        </p:spPr>
-      </p:pic>
-      <p:sp>
-        <p:nvSpPr>
-          <p:cNvPr id="25" name="Text 19"/>
-          <p:cNvSpPr/>
-          <p:nvPr/>
-        </p:nvSpPr>
-        <p:spPr>
-          <a:xfrm>
-            <a:off x="7086600" y="3831336"/>
-            <a:ext cx="4114800" cy="365760"/>
-          </a:xfrm>
-          <a:prstGeom prst="rect">
-            <a:avLst/>
-          </a:prstGeom>
-          <a:noFill/>
-          <a:ln/>
-        </p:spPr>
-        <p:txBody>
-          <a:bodyPr wrap="square" lIns="0" tIns="0" rIns="0" bIns="0" rtlCol="0" anchor="ctr"/>
-          <a:lstStyle/>
-          <a:p>
-            <a:pPr indent="0" marL="0">
-              <a:buNone/>
-            </a:pPr>
-            <a:r>
-              <a:rPr lang="en-US" sz="1500" b="1" dirty="0">
-                <a:solidFill>
-                  <a:srgbClr val="111418"/>
-                </a:solidFill>
-                <a:latin typeface="Calibri" pitchFamily="34" charset="0"/>
-                <a:ea typeface="Calibri" pitchFamily="34" charset="-122"/>
-                <a:cs typeface="Calibri" pitchFamily="34" charset="-120"/>
-              </a:rPr>
-              <a:t>Открытая и зрелая</a:t>
-            </a:r>
-            <a:endParaRPr lang="en-US" sz="1500" dirty="0"/>
-          </a:p>
-        </p:txBody>
-      </p:sp>
-      <p:sp>
-        <p:nvSpPr>
-          <p:cNvPr id="26" name="Text 20"/>
-          <p:cNvSpPr/>
-          <p:nvPr/>
-        </p:nvSpPr>
-        <p:spPr>
-          <a:xfrm>
-            <a:off x="7086600" y="4215384"/>
-            <a:ext cx="4160520" cy="868680"/>
-          </a:xfrm>
-          <a:prstGeom prst="rect">
-            <a:avLst/>
-          </a:prstGeom>
-          <a:noFill/>
-          <a:ln/>
-        </p:spPr>
-        <p:txBody>
-          <a:bodyPr wrap="square" lIns="0" tIns="0" rIns="0" bIns="0" rtlCol="0" anchor="t"/>
-          <a:lstStyle/>
-          <a:p>
-            <a:pPr indent="0" marL="0">
-              <a:lnSpc>
-                <a:spcPct val="105000"/>
-              </a:lnSpc>
-              <a:buNone/>
-            </a:pPr>
-            <a:r>
-              <a:rPr lang="en-US" sz="1200" dirty="0">
-                <a:solidFill>
-                  <a:srgbClr val="33383F"/>
-                </a:solidFill>
-                <a:latin typeface="Calibri" pitchFamily="34" charset="0"/>
-                <a:ea typeface="Calibri" pitchFamily="34" charset="-122"/>
-                <a:cs typeface="Calibri" pitchFamily="34" charset="-120"/>
-              </a:rPr>
-              <a:t>бесплатна, огромная экосистема, проверена в продакшене</a:t>
-            </a:r>
-            <a:endParaRPr lang="en-US" sz="1200" dirty="0"/>
-          </a:p>
-        </p:txBody>
-      </p:sp>
-    </p:spTree>
-  </p:cSld>
-  <p:clrMapOvr>
-    <a:masterClrMapping/>
-  </p:clrMapOvr>
-</p:sld>
-</file>
-
-<file path=ppt/slides/slide4.xml><?xml version="1.0" encoding="utf-8"?>
+<file path=ppt/slides/slide5.xml><?xml version="1.0" encoding="utf-8"?>
 <p:sld xmlns:a="http://schemas.openxmlformats.org/drawingml/2006/main" xmlns:r="http://schemas.openxmlformats.org/officeDocument/2006/relationships" xmlns:p="http://schemas.openxmlformats.org/presentationml/2006/main">
   <p:cSld>
     <p:bg>
@@ -5965,11 +6530,11 @@
           <a:bodyPr wrap="square" lIns="0" tIns="0" rIns="0" bIns="0" rtlCol="0" anchor="ctr"/>
           <a:lstStyle/>
           <a:p>
-            <a:pPr algn="l" indent="0" marL="0">
-              <a:buNone/>
-            </a:pPr>
-            <a:r>
-              <a:rPr lang="ru-RU" sz="1500" b="1" kern="0" dirty="0">
+            <a:pPr marL="0" indent="0" algn="l">
+              <a:buNone/>
+            </a:pPr>
+            <a:r>
+              <a:rPr lang="ru-RU" sz="2000" b="1" kern="0" dirty="0">
                 <a:solidFill>
                   <a:srgbClr val="1F9BD8"/>
                 </a:solidFill>
@@ -6003,7 +6568,7 @@
           <a:bodyPr wrap="square" lIns="0" tIns="0" rIns="0" bIns="0" rtlCol="0" anchor="ctr"/>
           <a:lstStyle/>
           <a:p>
-            <a:pPr algn="l" indent="0" marL="0">
+            <a:pPr marL="0" indent="0" algn="l">
               <a:buNone/>
             </a:pPr>
             <a:r>
@@ -6041,7 +6606,7 @@
           <a:bodyPr wrap="square" lIns="0" tIns="0" rIns="0" bIns="0" rtlCol="0" anchor="ctr"/>
           <a:lstStyle/>
           <a:p>
-            <a:pPr algn="r" indent="0" marL="0">
+            <a:pPr marL="0" indent="0" algn="r">
               <a:buNone/>
             </a:pPr>
             <a:r>
@@ -6081,7 +6646,7 @@
             </a:solidFill>
           </a:ln>
           <a:effectLst>
-            <a:outerShdw sx="100000" sy="100000" kx="0" ky="0" algn="bl" rotWithShape="0" blurRad="70000" dist="18000" dir="5400000">
+            <a:outerShdw blurRad="70000" dist="18000" dir="5400000" algn="bl" rotWithShape="0">
               <a:srgbClr val="B8C9D4">
                 <a:alpha val="20000"/>
               </a:srgbClr>
@@ -6130,7 +6695,7 @@
           <a:bodyPr wrap="square" lIns="0" tIns="0" rIns="0" bIns="0" rtlCol="0" anchor="ctr"/>
           <a:lstStyle/>
           <a:p>
-            <a:pPr algn="l" indent="0" marL="0">
+            <a:pPr marL="0" indent="0" algn="l">
               <a:buNone/>
             </a:pPr>
             <a:r>
@@ -6168,7 +6733,7 @@
           <a:bodyPr wrap="square" lIns="0" tIns="0" rIns="0" bIns="0" rtlCol="0" anchor="ctr"/>
           <a:lstStyle/>
           <a:p>
-            <a:pPr algn="l" indent="0" marL="0">
+            <a:pPr marL="0" indent="0" algn="l">
               <a:buNone/>
             </a:pPr>
             <a:r>
@@ -6206,7 +6771,7 @@
           <a:bodyPr wrap="square" lIns="0" tIns="0" rIns="0" bIns="0" rtlCol="0" anchor="ctr"/>
           <a:lstStyle/>
           <a:p>
-            <a:pPr algn="r" indent="0" marL="0">
+            <a:pPr marL="0" indent="0" algn="r">
               <a:buNone/>
             </a:pPr>
             <a:r>
@@ -6264,7 +6829,7 @@
           <a:bodyPr wrap="square" lIns="0" tIns="0" rIns="0" bIns="0" rtlCol="0" anchor="ctr"/>
           <a:lstStyle/>
           <a:p>
-            <a:pPr algn="l" indent="0" marL="0">
+            <a:pPr marL="0" indent="0" algn="l">
               <a:buNone/>
             </a:pPr>
             <a:r>
@@ -6304,7 +6869,7 @@
             </a:solidFill>
           </a:ln>
           <a:effectLst>
-            <a:outerShdw sx="100000" sy="100000" kx="0" ky="0" algn="bl" rotWithShape="0" blurRad="70000" dist="18000" dir="5400000">
+            <a:outerShdw blurRad="70000" dist="18000" dir="5400000" algn="bl" rotWithShape="0">
               <a:srgbClr val="B8C9D4">
                 <a:alpha val="20000"/>
               </a:srgbClr>
@@ -6353,7 +6918,7 @@
           <a:bodyPr wrap="square" lIns="0" tIns="0" rIns="0" bIns="0" rtlCol="0" anchor="ctr"/>
           <a:lstStyle/>
           <a:p>
-            <a:pPr algn="l" indent="0" marL="0">
+            <a:pPr marL="0" indent="0" algn="l">
               <a:buNone/>
             </a:pPr>
             <a:r>
@@ -6391,7 +6956,7 @@
           <a:bodyPr wrap="square" lIns="0" tIns="0" rIns="0" bIns="0" rtlCol="0" anchor="ctr"/>
           <a:lstStyle/>
           <a:p>
-            <a:pPr algn="l" indent="0" marL="0">
+            <a:pPr marL="0" indent="0" algn="l">
               <a:buNone/>
             </a:pPr>
             <a:r>
@@ -6429,7 +6994,7 @@
           <a:bodyPr wrap="square" lIns="0" tIns="0" rIns="0" bIns="0" rtlCol="0" anchor="ctr"/>
           <a:lstStyle/>
           <a:p>
-            <a:pPr algn="r" indent="0" marL="0">
+            <a:pPr marL="0" indent="0" algn="r">
               <a:buNone/>
             </a:pPr>
             <a:r>
@@ -6487,7 +7052,7 @@
           <a:bodyPr wrap="square" lIns="0" tIns="0" rIns="0" bIns="0" rtlCol="0" anchor="ctr"/>
           <a:lstStyle/>
           <a:p>
-            <a:pPr algn="l" indent="0" marL="0">
+            <a:pPr marL="0" indent="0" algn="l">
               <a:buNone/>
             </a:pPr>
             <a:r>
@@ -6525,7 +7090,7 @@
           <a:bodyPr wrap="square" lIns="0" tIns="0" rIns="0" bIns="0" rtlCol="0" anchor="ctr"/>
           <a:lstStyle/>
           <a:p>
-            <a:pPr algn="r" indent="0" marL="0">
+            <a:pPr marL="0" indent="0" algn="r">
               <a:buNone/>
             </a:pPr>
             <a:r>
@@ -6583,7 +7148,7 @@
           <a:bodyPr wrap="square" lIns="0" tIns="0" rIns="0" bIns="0" rtlCol="0" anchor="ctr"/>
           <a:lstStyle/>
           <a:p>
-            <a:pPr algn="l" indent="0" marL="0">
+            <a:pPr marL="0" indent="0" algn="l">
               <a:buNone/>
             </a:pPr>
             <a:r>
@@ -6621,7 +7186,7 @@
           <a:bodyPr wrap="square" lIns="0" tIns="0" rIns="0" bIns="0" rtlCol="0" anchor="ctr"/>
           <a:lstStyle/>
           <a:p>
-            <a:pPr algn="r" indent="0" marL="0">
+            <a:pPr marL="0" indent="0" algn="r">
               <a:buNone/>
             </a:pPr>
             <a:r>
@@ -6679,7 +7244,7 @@
           <a:bodyPr wrap="square" lIns="0" tIns="0" rIns="0" bIns="0" rtlCol="0" anchor="ctr"/>
           <a:lstStyle/>
           <a:p>
-            <a:pPr algn="l" indent="0" marL="0">
+            <a:pPr marL="0" indent="0" algn="l">
               <a:buNone/>
             </a:pPr>
             <a:r>
@@ -6717,7 +7282,7 @@
           <a:bodyPr wrap="square" lIns="0" tIns="0" rIns="0" bIns="0" rtlCol="0" anchor="ctr"/>
           <a:lstStyle/>
           <a:p>
-            <a:pPr algn="r" indent="0" marL="0">
+            <a:pPr marL="0" indent="0" algn="r">
               <a:buNone/>
             </a:pPr>
             <a:r>
@@ -6775,7 +7340,7 @@
           <a:bodyPr wrap="square" lIns="0" tIns="0" rIns="0" bIns="0" rtlCol="0" anchor="ctr"/>
           <a:lstStyle/>
           <a:p>
-            <a:pPr algn="l" indent="0" marL="0">
+            <a:pPr marL="0" indent="0" algn="l">
               <a:buNone/>
             </a:pPr>
             <a:r>
@@ -6833,7 +7398,7 @@
           <a:bodyPr wrap="square" lIns="0" tIns="0" rIns="0" bIns="0" rtlCol="0" anchor="ctr"/>
           <a:lstStyle/>
           <a:p>
-            <a:pPr algn="l" indent="0" marL="0">
+            <a:pPr marL="0" indent="0" algn="l">
               <a:buNone/>
             </a:pPr>
             <a:r>
@@ -6891,7 +7456,7 @@
           <a:bodyPr wrap="square" lIns="0" tIns="0" rIns="0" bIns="0" rtlCol="0" anchor="ctr"/>
           <a:lstStyle/>
           <a:p>
-            <a:pPr algn="l" indent="0" marL="0">
+            <a:pPr marL="0" indent="0" algn="l">
               <a:buNone/>
             </a:pPr>
             <a:r>
@@ -6931,7 +7496,7 @@
             </a:solidFill>
           </a:ln>
           <a:effectLst>
-            <a:outerShdw sx="100000" sy="100000" kx="0" ky="0" algn="bl" rotWithShape="0" blurRad="70000" dist="18000" dir="5400000">
+            <a:outerShdw blurRad="70000" dist="18000" dir="5400000" algn="bl" rotWithShape="0">
               <a:srgbClr val="B8C9D4">
                 <a:alpha val="20000"/>
               </a:srgbClr>
@@ -6980,7 +7545,7 @@
           <a:bodyPr wrap="square" lIns="0" tIns="0" rIns="0" bIns="0" rtlCol="0" anchor="ctr"/>
           <a:lstStyle/>
           <a:p>
-            <a:pPr algn="l" indent="0" marL="0">
+            <a:pPr marL="0" indent="0" algn="l">
               <a:buNone/>
             </a:pPr>
             <a:r>
@@ -7018,7 +7583,7 @@
           <a:bodyPr wrap="square" lIns="0" tIns="0" rIns="0" bIns="0" rtlCol="0" anchor="ctr"/>
           <a:lstStyle/>
           <a:p>
-            <a:pPr algn="l" indent="0" marL="0">
+            <a:pPr marL="0" indent="0" algn="l">
               <a:buNone/>
             </a:pPr>
             <a:r>
@@ -7056,7 +7621,7 @@
           <a:bodyPr wrap="square" lIns="0" tIns="0" rIns="0" bIns="0" rtlCol="0" anchor="ctr"/>
           <a:lstStyle/>
           <a:p>
-            <a:pPr algn="r" indent="0" marL="0">
+            <a:pPr marL="0" indent="0" algn="r">
               <a:buNone/>
             </a:pPr>
             <a:r>
@@ -7114,7 +7679,7 @@
           <a:bodyPr wrap="square" lIns="0" tIns="0" rIns="0" bIns="0" rtlCol="0" anchor="ctr"/>
           <a:lstStyle/>
           <a:p>
-            <a:pPr algn="l" indent="0" marL="0">
+            <a:pPr marL="0" indent="0" algn="l">
               <a:buNone/>
             </a:pPr>
             <a:r>
@@ -7172,7 +7737,7 @@
           <a:bodyPr wrap="square" lIns="0" tIns="0" rIns="0" bIns="0" rtlCol="0" anchor="ctr"/>
           <a:lstStyle/>
           <a:p>
-            <a:pPr algn="l" indent="0" marL="0">
+            <a:pPr marL="0" indent="0" algn="l">
               <a:buNone/>
             </a:pPr>
             <a:r>
@@ -7230,7 +7795,7 @@
           <a:bodyPr wrap="square" lIns="0" tIns="0" rIns="0" bIns="0" rtlCol="0" anchor="ctr"/>
           <a:lstStyle/>
           <a:p>
-            <a:pPr algn="l" indent="0" marL="0">
+            <a:pPr marL="0" indent="0" algn="l">
               <a:buNone/>
             </a:pPr>
             <a:r>
@@ -7288,7 +7853,7 @@
           <a:bodyPr wrap="square" lIns="0" tIns="0" rIns="0" bIns="0" rtlCol="0" anchor="ctr"/>
           <a:lstStyle/>
           <a:p>
-            <a:pPr algn="l" indent="0" marL="0">
+            <a:pPr marL="0" indent="0" algn="l">
               <a:buNone/>
             </a:pPr>
             <a:r>
@@ -7346,7 +7911,7 @@
           <a:bodyPr wrap="square" lIns="0" tIns="0" rIns="0" bIns="0" rtlCol="0" anchor="ctr"/>
           <a:lstStyle/>
           <a:p>
-            <a:pPr algn="l" indent="0" marL="0">
+            <a:pPr marL="0" indent="0" algn="l">
               <a:buNone/>
             </a:pPr>
             <a:r>
@@ -7404,7 +7969,7 @@
           <a:bodyPr wrap="square" lIns="0" tIns="0" rIns="0" bIns="0" rtlCol="0" anchor="ctr"/>
           <a:lstStyle/>
           <a:p>
-            <a:pPr algn="l" indent="0" marL="0">
+            <a:pPr marL="0" indent="0" algn="l">
               <a:buNone/>
             </a:pPr>
             <a:r>
@@ -7444,7 +8009,7 @@
             </a:solidFill>
           </a:ln>
           <a:effectLst>
-            <a:outerShdw sx="100000" sy="100000" kx="0" ky="0" algn="bl" rotWithShape="0" blurRad="70000" dist="18000" dir="5400000">
+            <a:outerShdw blurRad="70000" dist="18000" dir="5400000" algn="bl" rotWithShape="0">
               <a:srgbClr val="B8C9D4">
                 <a:alpha val="20000"/>
               </a:srgbClr>
@@ -7493,7 +8058,7 @@
           <a:bodyPr wrap="square" lIns="0" tIns="0" rIns="0" bIns="0" rtlCol="0" anchor="ctr"/>
           <a:lstStyle/>
           <a:p>
-            <a:pPr algn="l" indent="0" marL="0">
+            <a:pPr marL="0" indent="0" algn="l">
               <a:buNone/>
             </a:pPr>
             <a:r>
@@ -7531,7 +8096,7 @@
           <a:bodyPr wrap="square" lIns="0" tIns="0" rIns="0" bIns="0" rtlCol="0" anchor="ctr"/>
           <a:lstStyle/>
           <a:p>
-            <a:pPr algn="l" indent="0" marL="0">
+            <a:pPr marL="0" indent="0" algn="l">
               <a:buNone/>
             </a:pPr>
             <a:r>
@@ -7569,7 +8134,7 @@
           <a:bodyPr wrap="square" lIns="0" tIns="0" rIns="0" bIns="0" rtlCol="0" anchor="ctr"/>
           <a:lstStyle/>
           <a:p>
-            <a:pPr algn="r" indent="0" marL="0">
+            <a:pPr marL="0" indent="0" algn="r">
               <a:buNone/>
             </a:pPr>
             <a:r>
@@ -7627,7 +8192,7 @@
           <a:bodyPr wrap="square" lIns="0" tIns="0" rIns="0" bIns="0" rtlCol="0" anchor="ctr"/>
           <a:lstStyle/>
           <a:p>
-            <a:pPr algn="l" indent="0" marL="0">
+            <a:pPr marL="0" indent="0" algn="l">
               <a:buNone/>
             </a:pPr>
             <a:r>
@@ -7665,7 +8230,7 @@
           <a:bodyPr wrap="square" lIns="0" tIns="0" rIns="0" bIns="0" rtlCol="0" anchor="ctr"/>
           <a:lstStyle/>
           <a:p>
-            <a:pPr algn="r" indent="0" marL="0">
+            <a:pPr marL="0" indent="0" algn="r">
               <a:buNone/>
             </a:pPr>
             <a:r>
@@ -7723,7 +8288,7 @@
           <a:bodyPr wrap="square" lIns="0" tIns="0" rIns="0" bIns="0" rtlCol="0" anchor="ctr"/>
           <a:lstStyle/>
           <a:p>
-            <a:pPr algn="l" indent="0" marL="0">
+            <a:pPr marL="0" indent="0" algn="l">
               <a:buNone/>
             </a:pPr>
             <a:r>
@@ -7761,7 +8326,7 @@
           <a:bodyPr wrap="square" lIns="0" tIns="0" rIns="0" bIns="0" rtlCol="0" anchor="ctr"/>
           <a:lstStyle/>
           <a:p>
-            <a:pPr algn="r" indent="0" marL="0">
+            <a:pPr marL="0" indent="0" algn="r">
               <a:buNone/>
             </a:pPr>
             <a:r>
@@ -7819,7 +8384,7 @@
           <a:bodyPr wrap="square" lIns="0" tIns="0" rIns="0" bIns="0" rtlCol="0" anchor="ctr"/>
           <a:lstStyle/>
           <a:p>
-            <a:pPr algn="l" indent="0" marL="0">
+            <a:pPr marL="0" indent="0" algn="l">
               <a:buNone/>
             </a:pPr>
             <a:r>
@@ -7877,7 +8442,7 @@
           <a:bodyPr wrap="square" lIns="0" tIns="0" rIns="0" bIns="0" rtlCol="0" anchor="ctr"/>
           <a:lstStyle/>
           <a:p>
-            <a:pPr algn="l" indent="0" marL="0">
+            <a:pPr marL="0" indent="0" algn="l">
               <a:buNone/>
             </a:pPr>
             <a:r>
@@ -7917,7 +8482,7 @@
             </a:solidFill>
           </a:ln>
           <a:effectLst>
-            <a:outerShdw sx="100000" sy="100000" kx="0" ky="0" algn="bl" rotWithShape="0" blurRad="70000" dist="18000" dir="5400000">
+            <a:outerShdw blurRad="70000" dist="18000" dir="5400000" algn="bl" rotWithShape="0">
               <a:srgbClr val="B8C9D4">
                 <a:alpha val="20000"/>
               </a:srgbClr>
@@ -7966,7 +8531,7 @@
           <a:bodyPr wrap="square" lIns="0" tIns="0" rIns="0" bIns="0" rtlCol="0" anchor="ctr"/>
           <a:lstStyle/>
           <a:p>
-            <a:pPr algn="l" indent="0" marL="0">
+            <a:pPr marL="0" indent="0" algn="l">
               <a:buNone/>
             </a:pPr>
             <a:r>
@@ -8004,7 +8569,7 @@
           <a:bodyPr wrap="square" lIns="0" tIns="0" rIns="0" bIns="0" rtlCol="0" anchor="ctr"/>
           <a:lstStyle/>
           <a:p>
-            <a:pPr algn="l" indent="0" marL="0">
+            <a:pPr marL="0" indent="0" algn="l">
               <a:buNone/>
             </a:pPr>
             <a:r>
@@ -8042,7 +8607,7 @@
           <a:bodyPr wrap="square" lIns="0" tIns="0" rIns="0" bIns="0" rtlCol="0" anchor="ctr"/>
           <a:lstStyle/>
           <a:p>
-            <a:pPr algn="r" indent="0" marL="0">
+            <a:pPr marL="0" indent="0" algn="r">
               <a:buNone/>
             </a:pPr>
             <a:r>
@@ -8100,7 +8665,7 @@
           <a:bodyPr wrap="square" lIns="0" tIns="0" rIns="0" bIns="0" rtlCol="0" anchor="ctr"/>
           <a:lstStyle/>
           <a:p>
-            <a:pPr algn="l" indent="0" marL="0">
+            <a:pPr marL="0" indent="0" algn="l">
               <a:buNone/>
             </a:pPr>
             <a:r>
@@ -8138,7 +8703,7 @@
           <a:bodyPr wrap="square" lIns="0" tIns="0" rIns="0" bIns="0" rtlCol="0" anchor="ctr"/>
           <a:lstStyle/>
           <a:p>
-            <a:pPr algn="r" indent="0" marL="0">
+            <a:pPr marL="0" indent="0" algn="r">
               <a:buNone/>
             </a:pPr>
             <a:r>
@@ -8196,7 +8761,7 @@
           <a:bodyPr wrap="square" lIns="0" tIns="0" rIns="0" bIns="0" rtlCol="0" anchor="ctr"/>
           <a:lstStyle/>
           <a:p>
-            <a:pPr algn="l" indent="0" marL="0">
+            <a:pPr marL="0" indent="0" algn="l">
               <a:buNone/>
             </a:pPr>
             <a:r>
@@ -8254,7 +8819,7 @@
           <a:bodyPr wrap="square" lIns="0" tIns="0" rIns="0" bIns="0" rtlCol="0" anchor="ctr"/>
           <a:lstStyle/>
           <a:p>
-            <a:pPr algn="l" indent="0" marL="0">
+            <a:pPr marL="0" indent="0" algn="l">
               <a:buNone/>
             </a:pPr>
             <a:r>
@@ -8312,7 +8877,7 @@
           <a:bodyPr wrap="square" lIns="0" tIns="0" rIns="0" bIns="0" rtlCol="0" anchor="ctr"/>
           <a:lstStyle/>
           <a:p>
-            <a:pPr algn="l" indent="0" marL="0">
+            <a:pPr marL="0" indent="0" algn="l">
               <a:buNone/>
             </a:pPr>
             <a:r>
@@ -8461,44 +9026,6 @@
           </a:ln>
         </p:spPr>
       </p:cxnSp>
-      <p:sp>
-        <p:nvSpPr>
-          <p:cNvPr id="183" name="T"/>
-          <p:cNvSpPr/>
-          <p:nvPr/>
-        </p:nvSpPr>
-        <p:spPr>
-          <a:xfrm>
-            <a:off x="640080" y="6360000"/>
-            <a:ext cx="10911840" cy="320000"/>
-          </a:xfrm>
-          <a:prstGeom prst="rect">
-            <a:avLst/>
-          </a:prstGeom>
-          <a:noFill/>
-          <a:ln/>
-        </p:spPr>
-        <p:txBody>
-          <a:bodyPr wrap="square" lIns="0" tIns="0" rIns="0" bIns="0" rtlCol="0" anchor="ctr"/>
-          <a:lstStyle/>
-          <a:p>
-            <a:pPr algn="l" indent="0" marL="0">
-              <a:buNone/>
-            </a:pPr>
-            <a:r>
-              <a:rPr lang="ru-RU" sz="1050" kern="0" dirty="0">
-                <a:solidFill>
-                  <a:srgbClr val="6B7480"/>
-                </a:solidFill>
-                <a:latin typeface="Calibri" pitchFamily="34" charset="0"/>
-                <a:ea typeface="Calibri" pitchFamily="34" charset="-122"/>
-                <a:cs typeface="Calibri" pitchFamily="34" charset="-120"/>
-              </a:rPr>
-              <a:t>Миграции применяются автоматически при старте (CREATE IF NOT EXISTS); схема профиля игры — единый контракт с ML.</a:t>
-            </a:r>
-          </a:p>
-        </p:txBody>
-      </p:sp>
     </p:spTree>
   </p:cSld>
   <p:clrMapOvr>
@@ -8507,7 +9034,7 @@
 </p:sld>
 </file>
 
-<file path=ppt/slides/slide5.xml><?xml version="1.0" encoding="utf-8"?>
+<file path=ppt/slides/slide6.xml><?xml version="1.0" encoding="utf-8"?>
 <p:sld xmlns:a="http://schemas.openxmlformats.org/drawingml/2006/main" xmlns:r="http://schemas.openxmlformats.org/officeDocument/2006/relationships" xmlns:p="http://schemas.openxmlformats.org/presentationml/2006/main">
   <p:cSld name="Slide 5">
     <p:bg>
@@ -8515,6 +9042,7 @@
         <a:solidFill>
           <a:srgbClr val="FFFFFF"/>
         </a:solidFill>
+        <a:effectLst/>
       </p:bgPr>
     </p:bg>
     <p:spTree>
@@ -8552,7 +9080,7 @@
           <a:bodyPr wrap="square" lIns="0" tIns="0" rIns="0" bIns="0" rtlCol="0" anchor="ctr"/>
           <a:lstStyle/>
           <a:p>
-            <a:pPr algn="r" indent="0" marL="0">
+            <a:pPr marL="0" indent="0" algn="r">
               <a:buNone/>
             </a:pPr>
             <a:r>
@@ -8591,11 +9119,11 @@
           <a:bodyPr wrap="square" lIns="0" tIns="0" rIns="0" bIns="0" rtlCol="0" anchor="ctr"/>
           <a:lstStyle/>
           <a:p>
-            <a:pPr indent="0" marL="0">
-              <a:buNone/>
-            </a:pPr>
-            <a:r>
-              <a:rPr lang="en-US" sz="1500" b="1" spc="250" kern="0" dirty="0">
+            <a:pPr marL="0" indent="0">
+              <a:buNone/>
+            </a:pPr>
+            <a:r>
+              <a:rPr lang="en-US" sz="2000" b="1" kern="0" spc="250" dirty="0">
                 <a:solidFill>
                   <a:srgbClr val="1F9BD8"/>
                 </a:solidFill>
@@ -8605,7 +9133,7 @@
               </a:rPr>
               <a:t>ВЫБОР ФРЕЙМВОРКА</a:t>
             </a:r>
-            <a:endParaRPr lang="en-US" sz="1500" dirty="0"/>
+            <a:endParaRPr lang="en-US" sz="2000" dirty="0"/>
           </a:p>
         </p:txBody>
       </p:sp>
@@ -8630,7 +9158,7 @@
           <a:bodyPr wrap="square" lIns="0" tIns="0" rIns="0" bIns="0" rtlCol="0" anchor="ctr"/>
           <a:lstStyle/>
           <a:p>
-            <a:pPr indent="0" marL="0">
+            <a:pPr marL="0" indent="0">
               <a:buNone/>
             </a:pPr>
             <a:r>
@@ -8656,7 +9184,7 @@
         </p:nvSpPr>
         <p:spPr>
           <a:xfrm>
-            <a:off x="640080" y="1828800"/>
+            <a:off x="1764205" y="1938528"/>
             <a:ext cx="2743200" cy="868680"/>
           </a:xfrm>
           <a:prstGeom prst="rect">
@@ -8669,7 +9197,7 @@
           <a:bodyPr wrap="square" lIns="0" tIns="0" rIns="0" bIns="0" rtlCol="0" anchor="ctr"/>
           <a:lstStyle/>
           <a:p>
-            <a:pPr algn="ctr" indent="0" marL="0">
+            <a:pPr marL="0" indent="0" algn="ctr">
               <a:buNone/>
             </a:pPr>
             <a:r>
@@ -8695,7 +9223,7 @@
         </p:nvSpPr>
         <p:spPr>
           <a:xfrm>
-            <a:off x="640080" y="2697480"/>
+            <a:off x="1764205" y="2807208"/>
             <a:ext cx="2743200" cy="457200"/>
           </a:xfrm>
           <a:prstGeom prst="rect">
@@ -8708,7 +9236,7 @@
           <a:bodyPr wrap="square" lIns="0" tIns="0" rIns="0" bIns="0" rtlCol="0" anchor="t"/>
           <a:lstStyle/>
           <a:p>
-            <a:pPr algn="ctr" indent="0" marL="0">
+            <a:pPr marL="0" indent="0" algn="ctr">
               <a:buNone/>
             </a:pPr>
             <a:r>
@@ -8734,7 +9262,7 @@
         </p:nvSpPr>
         <p:spPr>
           <a:xfrm>
-            <a:off x="3383280" y="1828800"/>
+            <a:off x="4507405" y="1938528"/>
             <a:ext cx="2743200" cy="868680"/>
           </a:xfrm>
           <a:prstGeom prst="rect">
@@ -8747,7 +9275,7 @@
           <a:bodyPr wrap="square" lIns="0" tIns="0" rIns="0" bIns="0" rtlCol="0" anchor="ctr"/>
           <a:lstStyle/>
           <a:p>
-            <a:pPr algn="ctr" indent="0" marL="0">
+            <a:pPr marL="0" indent="0" algn="ctr">
               <a:buNone/>
             </a:pPr>
             <a:r>
@@ -8773,7 +9301,7 @@
         </p:nvSpPr>
         <p:spPr>
           <a:xfrm>
-            <a:off x="3383280" y="2697480"/>
+            <a:off x="4507405" y="2807208"/>
             <a:ext cx="2743200" cy="457200"/>
           </a:xfrm>
           <a:prstGeom prst="rect">
@@ -8786,7 +9314,7 @@
           <a:bodyPr wrap="square" lIns="0" tIns="0" rIns="0" bIns="0" rtlCol="0" anchor="t"/>
           <a:lstStyle/>
           <a:p>
-            <a:pPr algn="ctr" indent="0" marL="0">
+            <a:pPr marL="0" indent="0" algn="ctr">
               <a:buNone/>
             </a:pPr>
             <a:r>
@@ -8812,7 +9340,7 @@
         </p:nvSpPr>
         <p:spPr>
           <a:xfrm>
-            <a:off x="6126480" y="1828800"/>
+            <a:off x="7250605" y="1938528"/>
             <a:ext cx="2743200" cy="868680"/>
           </a:xfrm>
           <a:prstGeom prst="rect">
@@ -8825,7 +9353,7 @@
           <a:bodyPr wrap="square" lIns="0" tIns="0" rIns="0" bIns="0" rtlCol="0" anchor="ctr"/>
           <a:lstStyle/>
           <a:p>
-            <a:pPr algn="ctr" indent="0" marL="0">
+            <a:pPr marL="0" indent="0" algn="ctr">
               <a:buNone/>
             </a:pPr>
             <a:r>
@@ -8851,7 +9379,7 @@
         </p:nvSpPr>
         <p:spPr>
           <a:xfrm>
-            <a:off x="6126480" y="2697480"/>
+            <a:off x="7250605" y="2807208"/>
             <a:ext cx="2743200" cy="457200"/>
           </a:xfrm>
           <a:prstGeom prst="rect">
@@ -8864,7 +9392,7 @@
           <a:bodyPr wrap="square" lIns="0" tIns="0" rIns="0" bIns="0" rtlCol="0" anchor="t"/>
           <a:lstStyle/>
           <a:p>
-            <a:pPr algn="ctr" indent="0" marL="0">
+            <a:pPr marL="0" indent="0" algn="ctr">
               <a:buNone/>
             </a:pPr>
             <a:r>
@@ -8890,7 +9418,7 @@
         </p:nvSpPr>
         <p:spPr>
           <a:xfrm>
-            <a:off x="640080" y="3246120"/>
+            <a:off x="646176" y="3472539"/>
             <a:ext cx="3474720" cy="2194560"/>
           </a:xfrm>
           <a:prstGeom prst="roundRect">
@@ -8908,7 +9436,7 @@
             <a:prstDash val="solid"/>
           </a:ln>
           <a:effectLst>
-            <a:outerShdw sx="100000" sy="100000" kx="0" ky="0" algn="bl" rotWithShape="0" blurRad="88900" dist="25400" dir="5400000">
+            <a:outerShdw blurRad="88900" dist="25400" dir="5400000" algn="bl" rotWithShape="0">
               <a:srgbClr val="B8C9D4">
                 <a:alpha val="22000"/>
               </a:srgbClr>
@@ -8924,7 +9452,7 @@
         </p:nvSpPr>
         <p:spPr>
           <a:xfrm>
-            <a:off x="877824" y="3502152"/>
+            <a:off x="883920" y="3728571"/>
             <a:ext cx="548640" cy="548640"/>
           </a:xfrm>
           <a:prstGeom prst="ellipse">
@@ -8935,7 +9463,7 @@
           </a:solidFill>
           <a:ln/>
           <a:effectLst>
-            <a:outerShdw sx="100000" sy="100000" kx="0" ky="0" algn="bl" rotWithShape="0" blurRad="88900" dist="25400" dir="5400000">
+            <a:outerShdw blurRad="88900" dist="25400" dir="5400000" algn="bl" rotWithShape="0">
               <a:srgbClr val="B8C9D4">
                 <a:alpha val="22000"/>
               </a:srgbClr>
@@ -8952,14 +9480,14 @@
           <p:nvPr/>
         </p:nvPicPr>
         <p:blipFill>
-          <a:blip r:embed="rId1"/>
+          <a:blip r:embed="rId3"/>
           <a:stretch>
             <a:fillRect/>
           </a:stretch>
         </p:blipFill>
         <p:spPr>
           <a:xfrm>
-            <a:off x="1042416" y="3666744"/>
+            <a:off x="1048512" y="3893163"/>
             <a:ext cx="219456" cy="219456"/>
           </a:xfrm>
           <a:prstGeom prst="rect">
@@ -8975,7 +9503,7 @@
         </p:nvSpPr>
         <p:spPr>
           <a:xfrm>
-            <a:off x="877824" y="4178808"/>
+            <a:off x="883920" y="4405227"/>
             <a:ext cx="3017520" cy="457200"/>
           </a:xfrm>
           <a:prstGeom prst="rect">
@@ -8988,7 +9516,7 @@
           <a:bodyPr wrap="square" lIns="0" tIns="0" rIns="0" bIns="0" rtlCol="0" anchor="ctr"/>
           <a:lstStyle/>
           <a:p>
-            <a:pPr indent="0" marL="0">
+            <a:pPr marL="0" indent="0">
               <a:buNone/>
             </a:pPr>
             <a:r>
@@ -9014,7 +9542,7 @@
         </p:nvSpPr>
         <p:spPr>
           <a:xfrm>
-            <a:off x="877824" y="4617720"/>
+            <a:off x="883920" y="4844139"/>
             <a:ext cx="3017520" cy="731520"/>
           </a:xfrm>
           <a:prstGeom prst="rect">
@@ -9027,7 +9555,7 @@
           <a:bodyPr wrap="square" lIns="0" tIns="0" rIns="0" bIns="0" rtlCol="0" anchor="t"/>
           <a:lstStyle/>
           <a:p>
-            <a:pPr indent="0" marL="0">
+            <a:pPr marL="0" indent="0">
               <a:lnSpc>
                 <a:spcPct val="103000"/>
               </a:lnSpc>
@@ -9056,7 +9584,7 @@
         </p:nvSpPr>
         <p:spPr>
           <a:xfrm>
-            <a:off x="4352544" y="3246120"/>
+            <a:off x="4358640" y="3472539"/>
             <a:ext cx="3474720" cy="2194560"/>
           </a:xfrm>
           <a:prstGeom prst="roundRect">
@@ -9074,7 +9602,7 @@
             <a:prstDash val="solid"/>
           </a:ln>
           <a:effectLst>
-            <a:outerShdw sx="100000" sy="100000" kx="0" ky="0" algn="bl" rotWithShape="0" blurRad="88900" dist="25400" dir="5400000">
+            <a:outerShdw blurRad="88900" dist="25400" dir="5400000" algn="bl" rotWithShape="0">
               <a:srgbClr val="B8C9D4">
                 <a:alpha val="22000"/>
               </a:srgbClr>
@@ -9090,7 +9618,7 @@
         </p:nvSpPr>
         <p:spPr>
           <a:xfrm>
-            <a:off x="4590288" y="3502152"/>
+            <a:off x="4596384" y="3728571"/>
             <a:ext cx="548640" cy="548640"/>
           </a:xfrm>
           <a:prstGeom prst="ellipse">
@@ -9101,7 +9629,7 @@
           </a:solidFill>
           <a:ln/>
           <a:effectLst>
-            <a:outerShdw sx="100000" sy="100000" kx="0" ky="0" algn="bl" rotWithShape="0" blurRad="88900" dist="25400" dir="5400000">
+            <a:outerShdw blurRad="88900" dist="25400" dir="5400000" algn="bl" rotWithShape="0">
               <a:srgbClr val="B8C9D4">
                 <a:alpha val="22000"/>
               </a:srgbClr>
@@ -9118,14 +9646,14 @@
           <p:nvPr/>
         </p:nvPicPr>
         <p:blipFill>
-          <a:blip r:embed="rId2"/>
+          <a:blip r:embed="rId4"/>
           <a:stretch>
             <a:fillRect/>
           </a:stretch>
         </p:blipFill>
         <p:spPr>
           <a:xfrm>
-            <a:off x="4754880" y="3666744"/>
+            <a:off x="4760976" y="3893163"/>
             <a:ext cx="219456" cy="219456"/>
           </a:xfrm>
           <a:prstGeom prst="rect">
@@ -9141,7 +9669,7 @@
         </p:nvSpPr>
         <p:spPr>
           <a:xfrm>
-            <a:off x="4590288" y="4178808"/>
+            <a:off x="4596384" y="4405227"/>
             <a:ext cx="3017520" cy="457200"/>
           </a:xfrm>
           <a:prstGeom prst="rect">
@@ -9154,7 +9682,7 @@
           <a:bodyPr wrap="square" lIns="0" tIns="0" rIns="0" bIns="0" rtlCol="0" anchor="ctr"/>
           <a:lstStyle/>
           <a:p>
-            <a:pPr indent="0" marL="0">
+            <a:pPr marL="0" indent="0">
               <a:buNone/>
             </a:pPr>
             <a:r>
@@ -9180,7 +9708,7 @@
         </p:nvSpPr>
         <p:spPr>
           <a:xfrm>
-            <a:off x="4590288" y="4617720"/>
+            <a:off x="4596384" y="4844139"/>
             <a:ext cx="3017520" cy="731520"/>
           </a:xfrm>
           <a:prstGeom prst="rect">
@@ -9193,7 +9721,7 @@
           <a:bodyPr wrap="square" lIns="0" tIns="0" rIns="0" bIns="0" rtlCol="0" anchor="t"/>
           <a:lstStyle/>
           <a:p>
-            <a:pPr indent="0" marL="0">
+            <a:pPr marL="0" indent="0">
               <a:lnSpc>
                 <a:spcPct val="103000"/>
               </a:lnSpc>
@@ -9222,7 +9750,7 @@
         </p:nvSpPr>
         <p:spPr>
           <a:xfrm>
-            <a:off x="8065008" y="3246120"/>
+            <a:off x="8071104" y="3472539"/>
             <a:ext cx="3474720" cy="2194560"/>
           </a:xfrm>
           <a:prstGeom prst="roundRect">
@@ -9240,7 +9768,7 @@
             <a:prstDash val="solid"/>
           </a:ln>
           <a:effectLst>
-            <a:outerShdw sx="100000" sy="100000" kx="0" ky="0" algn="bl" rotWithShape="0" blurRad="88900" dist="25400" dir="5400000">
+            <a:outerShdw blurRad="88900" dist="25400" dir="5400000" algn="bl" rotWithShape="0">
               <a:srgbClr val="B8C9D4">
                 <a:alpha val="22000"/>
               </a:srgbClr>
@@ -9256,7 +9784,7 @@
         </p:nvSpPr>
         <p:spPr>
           <a:xfrm>
-            <a:off x="8302752" y="3502152"/>
+            <a:off x="8308848" y="3728571"/>
             <a:ext cx="548640" cy="548640"/>
           </a:xfrm>
           <a:prstGeom prst="ellipse">
@@ -9267,7 +9795,7 @@
           </a:solidFill>
           <a:ln/>
           <a:effectLst>
-            <a:outerShdw sx="100000" sy="100000" kx="0" ky="0" algn="bl" rotWithShape="0" blurRad="88900" dist="25400" dir="5400000">
+            <a:outerShdw blurRad="88900" dist="25400" dir="5400000" algn="bl" rotWithShape="0">
               <a:srgbClr val="B8C9D4">
                 <a:alpha val="22000"/>
               </a:srgbClr>
@@ -9284,14 +9812,14 @@
           <p:nvPr/>
         </p:nvPicPr>
         <p:blipFill>
-          <a:blip r:embed="rId3"/>
+          <a:blip r:embed="rId5"/>
           <a:stretch>
             <a:fillRect/>
           </a:stretch>
         </p:blipFill>
         <p:spPr>
           <a:xfrm>
-            <a:off x="8467344" y="3666744"/>
+            <a:off x="8473440" y="3893163"/>
             <a:ext cx="219456" cy="219456"/>
           </a:xfrm>
           <a:prstGeom prst="rect">
@@ -9307,7 +9835,7 @@
         </p:nvSpPr>
         <p:spPr>
           <a:xfrm>
-            <a:off x="8302752" y="4178808"/>
+            <a:off x="8308848" y="4405227"/>
             <a:ext cx="3017520" cy="457200"/>
           </a:xfrm>
           <a:prstGeom prst="rect">
@@ -9320,7 +9848,7 @@
           <a:bodyPr wrap="square" lIns="0" tIns="0" rIns="0" bIns="0" rtlCol="0" anchor="ctr"/>
           <a:lstStyle/>
           <a:p>
-            <a:pPr indent="0" marL="0">
+            <a:pPr marL="0" indent="0">
               <a:buNone/>
             </a:pPr>
             <a:r>
@@ -9346,7 +9874,7 @@
         </p:nvSpPr>
         <p:spPr>
           <a:xfrm>
-            <a:off x="8302752" y="4617720"/>
+            <a:off x="8308848" y="4844139"/>
             <a:ext cx="3017520" cy="731520"/>
           </a:xfrm>
           <a:prstGeom prst="rect">
@@ -9359,7 +9887,7 @@
           <a:bodyPr wrap="square" lIns="0" tIns="0" rIns="0" bIns="0" rtlCol="0" anchor="t"/>
           <a:lstStyle/>
           <a:p>
-            <a:pPr indent="0" marL="0">
+            <a:pPr marL="0" indent="0">
               <a:lnSpc>
                 <a:spcPct val="103000"/>
               </a:lnSpc>
@@ -9388,7 +9916,7 @@
 </p:sld>
 </file>
 
-<file path=ppt/slides/slide6.xml><?xml version="1.0" encoding="utf-8"?>
+<file path=ppt/slides/slide7.xml><?xml version="1.0" encoding="utf-8"?>
 <p:sld xmlns:a="http://schemas.openxmlformats.org/drawingml/2006/main" xmlns:r="http://schemas.openxmlformats.org/officeDocument/2006/relationships" xmlns:p="http://schemas.openxmlformats.org/presentationml/2006/main">
   <p:cSld name="Slide 6">
     <p:bg>
@@ -9396,6 +9924,7 @@
         <a:solidFill>
           <a:srgbClr val="FFFFFF"/>
         </a:solidFill>
+        <a:effectLst/>
       </p:bgPr>
     </p:bg>
     <p:spTree>
@@ -9433,7 +9962,7 @@
           <a:bodyPr wrap="square" lIns="0" tIns="0" rIns="0" bIns="0" rtlCol="0" anchor="ctr"/>
           <a:lstStyle/>
           <a:p>
-            <a:pPr algn="r" indent="0" marL="0">
+            <a:pPr marL="0" indent="0" algn="r">
               <a:buNone/>
             </a:pPr>
             <a:r>
@@ -9472,11 +10001,11 @@
           <a:bodyPr wrap="square" lIns="0" tIns="0" rIns="0" bIns="0" rtlCol="0" anchor="ctr"/>
           <a:lstStyle/>
           <a:p>
-            <a:pPr indent="0" marL="0">
-              <a:buNone/>
-            </a:pPr>
-            <a:r>
-              <a:rPr lang="en-US" sz="1500" b="1" spc="250" kern="0" dirty="0">
+            <a:pPr marL="0" indent="0">
+              <a:buNone/>
+            </a:pPr>
+            <a:r>
+              <a:rPr lang="en-US" sz="2000" b="1" kern="0" spc="250" dirty="0">
                 <a:solidFill>
                   <a:srgbClr val="1F9BD8"/>
                 </a:solidFill>
@@ -9486,7 +10015,7 @@
               </a:rPr>
               <a:t>ЭНДПОИНТЫ</a:t>
             </a:r>
-            <a:endParaRPr lang="en-US" sz="1500" dirty="0"/>
+            <a:endParaRPr lang="en-US" sz="2000" dirty="0"/>
           </a:p>
         </p:txBody>
       </p:sp>
@@ -9511,7 +10040,7 @@
           <a:bodyPr wrap="square" lIns="0" tIns="0" rIns="0" bIns="0" rtlCol="0" anchor="ctr"/>
           <a:lstStyle/>
           <a:p>
-            <a:pPr indent="0" marL="0">
+            <a:pPr marL="0" indent="0">
               <a:buNone/>
             </a:pPr>
             <a:r>
@@ -9550,7 +10079,7 @@
           <a:bodyPr wrap="square" lIns="0" tIns="0" rIns="0" bIns="0" rtlCol="0" anchor="ctr"/>
           <a:lstStyle/>
           <a:p>
-            <a:pPr indent="0" marL="0">
+            <a:pPr marL="0" indent="0">
               <a:buNone/>
             </a:pPr>
             <a:r>
@@ -9594,7 +10123,7 @@
             <a:prstDash val="solid"/>
           </a:ln>
           <a:effectLst>
-            <a:outerShdw sx="100000" sy="100000" kx="0" ky="0" algn="bl" rotWithShape="0" blurRad="88900" dist="25400" dir="5400000">
+            <a:outerShdw blurRad="88900" dist="25400" dir="5400000" algn="bl" rotWithShape="0">
               <a:srgbClr val="B8C9D4">
                 <a:alpha val="22000"/>
               </a:srgbClr>
@@ -9645,7 +10174,7 @@
           <a:bodyPr wrap="square" lIns="0" tIns="0" rIns="0" bIns="0" rtlCol="0" anchor="ctr"/>
           <a:lstStyle/>
           <a:p>
-            <a:pPr algn="ctr" indent="0" marL="0">
+            <a:pPr marL="0" indent="0" algn="ctr">
               <a:buNone/>
             </a:pPr>
             <a:r>
@@ -9684,7 +10213,7 @@
           <a:bodyPr wrap="square" lIns="0" tIns="0" rIns="0" bIns="0" rtlCol="0" anchor="ctr"/>
           <a:lstStyle/>
           <a:p>
-            <a:pPr indent="0" marL="0">
+            <a:pPr marL="0" indent="0">
               <a:buNone/>
             </a:pPr>
             <a:r>
@@ -9723,7 +10252,7 @@
           <a:bodyPr wrap="square" lIns="0" tIns="0" rIns="0" bIns="0" rtlCol="0" anchor="ctr"/>
           <a:lstStyle/>
           <a:p>
-            <a:pPr indent="0" marL="0">
+            <a:pPr marL="0" indent="0">
               <a:buNone/>
             </a:pPr>
             <a:r>
@@ -9767,7 +10296,7 @@
             <a:prstDash val="solid"/>
           </a:ln>
           <a:effectLst>
-            <a:outerShdw sx="100000" sy="100000" kx="0" ky="0" algn="bl" rotWithShape="0" blurRad="88900" dist="25400" dir="5400000">
+            <a:outerShdw blurRad="88900" dist="25400" dir="5400000" algn="bl" rotWithShape="0">
               <a:srgbClr val="B8C9D4">
                 <a:alpha val="22000"/>
               </a:srgbClr>
@@ -9818,7 +10347,7 @@
           <a:bodyPr wrap="square" lIns="0" tIns="0" rIns="0" bIns="0" rtlCol="0" anchor="ctr"/>
           <a:lstStyle/>
           <a:p>
-            <a:pPr algn="ctr" indent="0" marL="0">
+            <a:pPr marL="0" indent="0" algn="ctr">
               <a:buNone/>
             </a:pPr>
             <a:r>
@@ -9857,7 +10386,7 @@
           <a:bodyPr wrap="square" lIns="0" tIns="0" rIns="0" bIns="0" rtlCol="0" anchor="ctr"/>
           <a:lstStyle/>
           <a:p>
-            <a:pPr indent="0" marL="0">
+            <a:pPr marL="0" indent="0">
               <a:buNone/>
             </a:pPr>
             <a:r>
@@ -9896,7 +10425,7 @@
           <a:bodyPr wrap="square" lIns="0" tIns="0" rIns="0" bIns="0" rtlCol="0" anchor="ctr"/>
           <a:lstStyle/>
           <a:p>
-            <a:pPr indent="0" marL="0">
+            <a:pPr marL="0" indent="0">
               <a:buNone/>
             </a:pPr>
             <a:r>
@@ -9940,7 +10469,7 @@
             <a:prstDash val="solid"/>
           </a:ln>
           <a:effectLst>
-            <a:outerShdw sx="100000" sy="100000" kx="0" ky="0" algn="bl" rotWithShape="0" blurRad="88900" dist="25400" dir="5400000">
+            <a:outerShdw blurRad="88900" dist="25400" dir="5400000" algn="bl" rotWithShape="0">
               <a:srgbClr val="B8C9D4">
                 <a:alpha val="22000"/>
               </a:srgbClr>
@@ -9991,7 +10520,7 @@
           <a:bodyPr wrap="square" lIns="0" tIns="0" rIns="0" bIns="0" rtlCol="0" anchor="ctr"/>
           <a:lstStyle/>
           <a:p>
-            <a:pPr algn="ctr" indent="0" marL="0">
+            <a:pPr marL="0" indent="0" algn="ctr">
               <a:buNone/>
             </a:pPr>
             <a:r>
@@ -10030,7 +10559,7 @@
           <a:bodyPr wrap="square" lIns="0" tIns="0" rIns="0" bIns="0" rtlCol="0" anchor="ctr"/>
           <a:lstStyle/>
           <a:p>
-            <a:pPr indent="0" marL="0">
+            <a:pPr marL="0" indent="0">
               <a:buNone/>
             </a:pPr>
             <a:r>
@@ -10069,7 +10598,7 @@
           <a:bodyPr wrap="square" lIns="0" tIns="0" rIns="0" bIns="0" rtlCol="0" anchor="ctr"/>
           <a:lstStyle/>
           <a:p>
-            <a:pPr indent="0" marL="0">
+            <a:pPr marL="0" indent="0">
               <a:buNone/>
             </a:pPr>
             <a:r>
@@ -10108,7 +10637,7 @@
           <a:bodyPr wrap="square" lIns="0" tIns="0" rIns="0" bIns="0" rtlCol="0" anchor="ctr"/>
           <a:lstStyle/>
           <a:p>
-            <a:pPr indent="0" marL="0">
+            <a:pPr marL="0" indent="0">
               <a:buNone/>
             </a:pPr>
             <a:r>
@@ -10152,7 +10681,7 @@
             <a:prstDash val="solid"/>
           </a:ln>
           <a:effectLst>
-            <a:outerShdw sx="100000" sy="100000" kx="0" ky="0" algn="bl" rotWithShape="0" blurRad="88900" dist="25400" dir="5400000">
+            <a:outerShdw blurRad="88900" dist="25400" dir="5400000" algn="bl" rotWithShape="0">
               <a:srgbClr val="B8C9D4">
                 <a:alpha val="22000"/>
               </a:srgbClr>
@@ -10203,7 +10732,7 @@
           <a:bodyPr wrap="square" lIns="0" tIns="0" rIns="0" bIns="0" rtlCol="0" anchor="ctr"/>
           <a:lstStyle/>
           <a:p>
-            <a:pPr algn="ctr" indent="0" marL="0">
+            <a:pPr marL="0" indent="0" algn="ctr">
               <a:buNone/>
             </a:pPr>
             <a:r>
@@ -10242,7 +10771,7 @@
           <a:bodyPr wrap="square" lIns="0" tIns="0" rIns="0" bIns="0" rtlCol="0" anchor="ctr"/>
           <a:lstStyle/>
           <a:p>
-            <a:pPr indent="0" marL="0">
+            <a:pPr marL="0" indent="0">
               <a:buNone/>
             </a:pPr>
             <a:r>
@@ -10281,7 +10810,7 @@
           <a:bodyPr wrap="square" lIns="0" tIns="0" rIns="0" bIns="0" rtlCol="0" anchor="ctr"/>
           <a:lstStyle/>
           <a:p>
-            <a:pPr indent="0" marL="0">
+            <a:pPr marL="0" indent="0">
               <a:buNone/>
             </a:pPr>
             <a:r>
@@ -10325,7 +10854,7 @@
             <a:prstDash val="solid"/>
           </a:ln>
           <a:effectLst>
-            <a:outerShdw sx="100000" sy="100000" kx="0" ky="0" algn="bl" rotWithShape="0" blurRad="88900" dist="25400" dir="5400000">
+            <a:outerShdw blurRad="88900" dist="25400" dir="5400000" algn="bl" rotWithShape="0">
               <a:srgbClr val="B8C9D4">
                 <a:alpha val="22000"/>
               </a:srgbClr>
@@ -10376,7 +10905,7 @@
           <a:bodyPr wrap="square" lIns="0" tIns="0" rIns="0" bIns="0" rtlCol="0" anchor="ctr"/>
           <a:lstStyle/>
           <a:p>
-            <a:pPr algn="ctr" indent="0" marL="0">
+            <a:pPr marL="0" indent="0" algn="ctr">
               <a:buNone/>
             </a:pPr>
             <a:r>
@@ -10415,7 +10944,7 @@
           <a:bodyPr wrap="square" lIns="0" tIns="0" rIns="0" bIns="0" rtlCol="0" anchor="ctr"/>
           <a:lstStyle/>
           <a:p>
-            <a:pPr indent="0" marL="0">
+            <a:pPr marL="0" indent="0">
               <a:buNone/>
             </a:pPr>
             <a:r>
@@ -10454,7 +10983,7 @@
           <a:bodyPr wrap="square" lIns="0" tIns="0" rIns="0" bIns="0" rtlCol="0" anchor="ctr"/>
           <a:lstStyle/>
           <a:p>
-            <a:pPr indent="0" marL="0">
+            <a:pPr marL="0" indent="0">
               <a:buNone/>
             </a:pPr>
             <a:r>
@@ -10498,7 +11027,7 @@
             <a:prstDash val="solid"/>
           </a:ln>
           <a:effectLst>
-            <a:outerShdw sx="100000" sy="100000" kx="0" ky="0" algn="bl" rotWithShape="0" blurRad="88900" dist="25400" dir="5400000">
+            <a:outerShdw blurRad="88900" dist="25400" dir="5400000" algn="bl" rotWithShape="0">
               <a:srgbClr val="B8C9D4">
                 <a:alpha val="22000"/>
               </a:srgbClr>
@@ -10549,7 +11078,7 @@
           <a:bodyPr wrap="square" lIns="0" tIns="0" rIns="0" bIns="0" rtlCol="0" anchor="ctr"/>
           <a:lstStyle/>
           <a:p>
-            <a:pPr algn="ctr" indent="0" marL="0">
+            <a:pPr marL="0" indent="0" algn="ctr">
               <a:buNone/>
             </a:pPr>
             <a:r>
@@ -10588,7 +11117,7 @@
           <a:bodyPr wrap="square" lIns="0" tIns="0" rIns="0" bIns="0" rtlCol="0" anchor="ctr"/>
           <a:lstStyle/>
           <a:p>
-            <a:pPr indent="0" marL="0">
+            <a:pPr marL="0" indent="0">
               <a:buNone/>
             </a:pPr>
             <a:r>
@@ -10627,7 +11156,7 @@
           <a:bodyPr wrap="square" lIns="0" tIns="0" rIns="0" bIns="0" rtlCol="0" anchor="ctr"/>
           <a:lstStyle/>
           <a:p>
-            <a:pPr indent="0" marL="0">
+            <a:pPr marL="0" indent="0">
               <a:buNone/>
             </a:pPr>
             <a:r>
@@ -10671,7 +11200,7 @@
             <a:prstDash val="solid"/>
           </a:ln>
           <a:effectLst>
-            <a:outerShdw sx="100000" sy="100000" kx="0" ky="0" algn="bl" rotWithShape="0" blurRad="88900" dist="25400" dir="5400000">
+            <a:outerShdw blurRad="88900" dist="25400" dir="5400000" algn="bl" rotWithShape="0">
               <a:srgbClr val="B8C9D4">
                 <a:alpha val="22000"/>
               </a:srgbClr>
@@ -10722,7 +11251,7 @@
           <a:bodyPr wrap="square" lIns="0" tIns="0" rIns="0" bIns="0" rtlCol="0" anchor="ctr"/>
           <a:lstStyle/>
           <a:p>
-            <a:pPr algn="ctr" indent="0" marL="0">
+            <a:pPr marL="0" indent="0" algn="ctr">
               <a:buNone/>
             </a:pPr>
             <a:r>
@@ -10761,7 +11290,7 @@
           <a:bodyPr wrap="square" lIns="0" tIns="0" rIns="0" bIns="0" rtlCol="0" anchor="ctr"/>
           <a:lstStyle/>
           <a:p>
-            <a:pPr indent="0" marL="0">
+            <a:pPr marL="0" indent="0">
               <a:buNone/>
             </a:pPr>
             <a:r>
@@ -10800,7 +11329,7 @@
           <a:bodyPr wrap="square" lIns="0" tIns="0" rIns="0" bIns="0" rtlCol="0" anchor="ctr"/>
           <a:lstStyle/>
           <a:p>
-            <a:pPr indent="0" marL="0">
+            <a:pPr marL="0" indent="0">
               <a:buNone/>
             </a:pPr>
             <a:r>
@@ -10844,7 +11373,7 @@
             <a:prstDash val="solid"/>
           </a:ln>
           <a:effectLst>
-            <a:outerShdw sx="100000" sy="100000" kx="0" ky="0" algn="bl" rotWithShape="0" blurRad="88900" dist="25400" dir="5400000">
+            <a:outerShdw blurRad="88900" dist="25400" dir="5400000" algn="bl" rotWithShape="0">
               <a:srgbClr val="B8C9D4">
                 <a:alpha val="22000"/>
               </a:srgbClr>
@@ -10873,7 +11402,7 @@
           <a:bodyPr wrap="square" lIns="0" tIns="0" rIns="0" bIns="0" rtlCol="0" anchor="ctr"/>
           <a:lstStyle/>
           <a:p>
-            <a:pPr indent="0" marL="0">
+            <a:pPr marL="0" indent="0">
               <a:lnSpc>
                 <a:spcPct val="103000"/>
               </a:lnSpc>
@@ -10888,14 +11417,8 @@
                 <a:ea typeface="Calibri" pitchFamily="34" charset="-122"/>
                 <a:cs typeface="Calibri" pitchFamily="34" charset="-120"/>
               </a:rPr>
-              <a:t xml:space="preserve">Роль служебных:  </a:t>
-            </a:r>
-            <a:pPr indent="0" marL="0">
-              <a:lnSpc>
-                <a:spcPct val="103000"/>
-              </a:lnSpc>
-              <a:buNone/>
-            </a:pPr>
+              <a:t>Роль служебных:  </a:t>
+            </a:r>
             <a:r>
               <a:rPr lang="en-US" sz="1200" dirty="0">
                 <a:solidFill>
@@ -10919,7 +11442,7 @@
 </p:sld>
 </file>
 
-<file path=ppt/slides/slide7.xml><?xml version="1.0" encoding="utf-8"?>
+<file path=ppt/slides/slide8.xml><?xml version="1.0" encoding="utf-8"?>
 <p:sld xmlns:a="http://schemas.openxmlformats.org/drawingml/2006/main" xmlns:r="http://schemas.openxmlformats.org/officeDocument/2006/relationships" xmlns:p="http://schemas.openxmlformats.org/presentationml/2006/main">
   <p:cSld name="Slide 7">
     <p:bg>
@@ -10927,6 +11450,7 @@
         <a:solidFill>
           <a:srgbClr val="FFFFFF"/>
         </a:solidFill>
+        <a:effectLst/>
       </p:bgPr>
     </p:bg>
     <p:spTree>
@@ -10964,7 +11488,7 @@
           <a:bodyPr wrap="square" lIns="0" tIns="0" rIns="0" bIns="0" rtlCol="0" anchor="ctr"/>
           <a:lstStyle/>
           <a:p>
-            <a:pPr algn="r" indent="0" marL="0">
+            <a:pPr marL="0" indent="0" algn="r">
               <a:buNone/>
             </a:pPr>
             <a:r>
@@ -11003,11 +11527,11 @@
           <a:bodyPr wrap="square" lIns="0" tIns="0" rIns="0" bIns="0" rtlCol="0" anchor="ctr"/>
           <a:lstStyle/>
           <a:p>
-            <a:pPr indent="0" marL="0">
-              <a:buNone/>
-            </a:pPr>
-            <a:r>
-              <a:rPr lang="en-US" sz="1500" b="1" spc="250" kern="0" dirty="0">
+            <a:pPr marL="0" indent="0">
+              <a:buNone/>
+            </a:pPr>
+            <a:r>
+              <a:rPr lang="en-US" sz="2000" b="1" kern="0" spc="250" dirty="0">
                 <a:solidFill>
                   <a:srgbClr val="1F9BD8"/>
                 </a:solidFill>
@@ -11017,7 +11541,7 @@
               </a:rPr>
               <a:t>СТРУКТУРА · 1/2</a:t>
             </a:r>
-            <a:endParaRPr lang="en-US" sz="1500" dirty="0"/>
+            <a:endParaRPr lang="en-US" sz="2000" dirty="0"/>
           </a:p>
         </p:txBody>
       </p:sp>
@@ -11042,7 +11566,7 @@
           <a:bodyPr wrap="square" lIns="0" tIns="0" rIns="0" bIns="0" rtlCol="0" anchor="ctr"/>
           <a:lstStyle/>
           <a:p>
-            <a:pPr indent="0" marL="0">
+            <a:pPr marL="0" indent="0">
               <a:buNone/>
             </a:pPr>
             <a:r>
@@ -11086,7 +11610,7 @@
             <a:prstDash val="solid"/>
           </a:ln>
           <a:effectLst>
-            <a:outerShdw sx="100000" sy="100000" kx="0" ky="0" algn="bl" rotWithShape="0" blurRad="88900" dist="25400" dir="5400000">
+            <a:outerShdw blurRad="88900" dist="25400" dir="5400000" algn="bl" rotWithShape="0">
               <a:srgbClr val="B8C9D4">
                 <a:alpha val="22000"/>
               </a:srgbClr>
@@ -11113,7 +11637,7 @@
           </a:solidFill>
           <a:ln/>
           <a:effectLst>
-            <a:outerShdw sx="100000" sy="100000" kx="0" ky="0" algn="bl" rotWithShape="0" blurRad="88900" dist="25400" dir="5400000">
+            <a:outerShdw blurRad="88900" dist="25400" dir="5400000" algn="bl" rotWithShape="0">
               <a:srgbClr val="B8C9D4">
                 <a:alpha val="22000"/>
               </a:srgbClr>
@@ -11130,7 +11654,7 @@
           <p:nvPr/>
         </p:nvPicPr>
         <p:blipFill>
-          <a:blip r:embed="rId1"/>
+          <a:blip r:embed="rId3"/>
           <a:stretch>
             <a:fillRect/>
           </a:stretch>
@@ -11166,7 +11690,7 @@
           <a:bodyPr wrap="square" lIns="0" tIns="0" rIns="0" bIns="0" rtlCol="0" anchor="ctr"/>
           <a:lstStyle/>
           <a:p>
-            <a:pPr indent="0" marL="0">
+            <a:pPr marL="0" indent="0">
               <a:buNone/>
             </a:pPr>
             <a:r>
@@ -11205,7 +11729,7 @@
           <a:bodyPr wrap="square" lIns="0" tIns="0" rIns="0" bIns="0" rtlCol="0" anchor="t"/>
           <a:lstStyle/>
           <a:p>
-            <a:pPr indent="0" marL="0">
+            <a:pPr marL="0" indent="0">
               <a:lnSpc>
                 <a:spcPct val="100000"/>
               </a:lnSpc>
@@ -11252,7 +11776,7 @@
             <a:prstDash val="solid"/>
           </a:ln>
           <a:effectLst>
-            <a:outerShdw sx="100000" sy="100000" kx="0" ky="0" algn="bl" rotWithShape="0" blurRad="88900" dist="25400" dir="5400000">
+            <a:outerShdw blurRad="88900" dist="25400" dir="5400000" algn="bl" rotWithShape="0">
               <a:srgbClr val="B8C9D4">
                 <a:alpha val="22000"/>
               </a:srgbClr>
@@ -11279,7 +11803,7 @@
           </a:solidFill>
           <a:ln/>
           <a:effectLst>
-            <a:outerShdw sx="100000" sy="100000" kx="0" ky="0" algn="bl" rotWithShape="0" blurRad="88900" dist="25400" dir="5400000">
+            <a:outerShdw blurRad="88900" dist="25400" dir="5400000" algn="bl" rotWithShape="0">
               <a:srgbClr val="B8C9D4">
                 <a:alpha val="22000"/>
               </a:srgbClr>
@@ -11296,7 +11820,7 @@
           <p:nvPr/>
         </p:nvPicPr>
         <p:blipFill>
-          <a:blip r:embed="rId2"/>
+          <a:blip r:embed="rId4"/>
           <a:stretch>
             <a:fillRect/>
           </a:stretch>
@@ -11332,7 +11856,7 @@
           <a:bodyPr wrap="square" lIns="0" tIns="0" rIns="0" bIns="0" rtlCol="0" anchor="ctr"/>
           <a:lstStyle/>
           <a:p>
-            <a:pPr indent="0" marL="0">
+            <a:pPr marL="0" indent="0">
               <a:buNone/>
             </a:pPr>
             <a:r>
@@ -11371,7 +11895,7 @@
           <a:bodyPr wrap="square" lIns="0" tIns="0" rIns="0" bIns="0" rtlCol="0" anchor="t"/>
           <a:lstStyle/>
           <a:p>
-            <a:pPr indent="0" marL="0">
+            <a:pPr marL="0" indent="0">
               <a:lnSpc>
                 <a:spcPct val="100000"/>
               </a:lnSpc>
@@ -11418,7 +11942,7 @@
             <a:prstDash val="solid"/>
           </a:ln>
           <a:effectLst>
-            <a:outerShdw sx="100000" sy="100000" kx="0" ky="0" algn="bl" rotWithShape="0" blurRad="88900" dist="25400" dir="5400000">
+            <a:outerShdw blurRad="88900" dist="25400" dir="5400000" algn="bl" rotWithShape="0">
               <a:srgbClr val="B8C9D4">
                 <a:alpha val="22000"/>
               </a:srgbClr>
@@ -11445,7 +11969,7 @@
           </a:solidFill>
           <a:ln/>
           <a:effectLst>
-            <a:outerShdw sx="100000" sy="100000" kx="0" ky="0" algn="bl" rotWithShape="0" blurRad="88900" dist="25400" dir="5400000">
+            <a:outerShdw blurRad="88900" dist="25400" dir="5400000" algn="bl" rotWithShape="0">
               <a:srgbClr val="B8C9D4">
                 <a:alpha val="22000"/>
               </a:srgbClr>
@@ -11462,7 +11986,7 @@
           <p:nvPr/>
         </p:nvPicPr>
         <p:blipFill>
-          <a:blip r:embed="rId3"/>
+          <a:blip r:embed="rId5"/>
           <a:stretch>
             <a:fillRect/>
           </a:stretch>
@@ -11498,7 +12022,7 @@
           <a:bodyPr wrap="square" lIns="0" tIns="0" rIns="0" bIns="0" rtlCol="0" anchor="ctr"/>
           <a:lstStyle/>
           <a:p>
-            <a:pPr indent="0" marL="0">
+            <a:pPr marL="0" indent="0">
               <a:buNone/>
             </a:pPr>
             <a:r>
@@ -11537,7 +12061,7 @@
           <a:bodyPr wrap="square" lIns="0" tIns="0" rIns="0" bIns="0" rtlCol="0" anchor="t"/>
           <a:lstStyle/>
           <a:p>
-            <a:pPr indent="0" marL="0">
+            <a:pPr marL="0" indent="0">
               <a:lnSpc>
                 <a:spcPct val="100000"/>
               </a:lnSpc>
@@ -11584,7 +12108,7 @@
             <a:prstDash val="solid"/>
           </a:ln>
           <a:effectLst>
-            <a:outerShdw sx="100000" sy="100000" kx="0" ky="0" algn="bl" rotWithShape="0" blurRad="88900" dist="25400" dir="5400000">
+            <a:outerShdw blurRad="88900" dist="25400" dir="5400000" algn="bl" rotWithShape="0">
               <a:srgbClr val="B8C9D4">
                 <a:alpha val="22000"/>
               </a:srgbClr>
@@ -11613,7 +12137,7 @@
           <a:bodyPr wrap="square" lIns="0" tIns="0" rIns="0" bIns="0" rtlCol="0" anchor="ctr"/>
           <a:lstStyle/>
           <a:p>
-            <a:pPr indent="0" marL="0">
+            <a:pPr marL="0" indent="0">
               <a:buNone/>
             </a:pPr>
             <a:r>
@@ -11652,7 +12176,7 @@
           <a:bodyPr wrap="square" lIns="0" tIns="0" rIns="0" bIns="0" rtlCol="0" anchor="ctr"/>
           <a:lstStyle/>
           <a:p>
-            <a:pPr indent="0" marL="0">
+            <a:pPr marL="0" indent="0">
               <a:lnSpc>
                 <a:spcPct val="105000"/>
               </a:lnSpc>
@@ -11672,7 +12196,7 @@
             <a:endParaRPr lang="en-US" sz="1300" dirty="0"/>
           </a:p>
           <a:p>
-            <a:pPr indent="0" marL="0">
+            <a:pPr marL="0" indent="0">
               <a:lnSpc>
                 <a:spcPct val="105000"/>
               </a:lnSpc>
@@ -11692,7 +12216,7 @@
             <a:endParaRPr lang="en-US" sz="1300" dirty="0"/>
           </a:p>
           <a:p>
-            <a:pPr indent="0" marL="0">
+            <a:pPr marL="0" indent="0">
               <a:lnSpc>
                 <a:spcPct val="105000"/>
               </a:lnSpc>
@@ -11713,7 +12237,7 @@
             <a:endParaRPr lang="en-US" sz="1300" dirty="0"/>
           </a:p>
           <a:p>
-            <a:pPr indent="0" marL="0">
+            <a:pPr marL="0" indent="0">
               <a:lnSpc>
                 <a:spcPct val="105000"/>
               </a:lnSpc>
@@ -11733,7 +12257,7 @@
             <a:endParaRPr lang="en-US" sz="1300" dirty="0"/>
           </a:p>
           <a:p>
-            <a:pPr indent="0" marL="0">
+            <a:pPr marL="0" indent="0">
               <a:lnSpc>
                 <a:spcPct val="105000"/>
               </a:lnSpc>
@@ -11753,7 +12277,7 @@
             <a:endParaRPr lang="en-US" sz="1300" dirty="0"/>
           </a:p>
           <a:p>
-            <a:pPr indent="0" marL="0">
+            <a:pPr marL="0" indent="0">
               <a:lnSpc>
                 <a:spcPct val="105000"/>
               </a:lnSpc>
@@ -11774,7 +12298,7 @@
             <a:endParaRPr lang="en-US" sz="1300" dirty="0"/>
           </a:p>
           <a:p>
-            <a:pPr indent="0" marL="0">
+            <a:pPr marL="0" indent="0">
               <a:lnSpc>
                 <a:spcPct val="105000"/>
               </a:lnSpc>
@@ -11794,7 +12318,7 @@
             <a:endParaRPr lang="en-US" sz="1300" dirty="0"/>
           </a:p>
           <a:p>
-            <a:pPr indent="0" marL="0">
+            <a:pPr marL="0" indent="0">
               <a:lnSpc>
                 <a:spcPct val="105000"/>
               </a:lnSpc>
@@ -11823,7 +12347,7 @@
 </p:sld>
 </file>
 
-<file path=ppt/slides/slide8.xml><?xml version="1.0" encoding="utf-8"?>
+<file path=ppt/slides/slide9.xml><?xml version="1.0" encoding="utf-8"?>
 <p:sld xmlns:a="http://schemas.openxmlformats.org/drawingml/2006/main" xmlns:r="http://schemas.openxmlformats.org/officeDocument/2006/relationships" xmlns:p="http://schemas.openxmlformats.org/presentationml/2006/main">
   <p:cSld name="Slide 8">
     <p:bg>
@@ -11831,6 +12355,7 @@
         <a:solidFill>
           <a:srgbClr val="FFFFFF"/>
         </a:solidFill>
+        <a:effectLst/>
       </p:bgPr>
     </p:bg>
     <p:spTree>
@@ -11868,7 +12393,7 @@
           <a:bodyPr wrap="square" lIns="0" tIns="0" rIns="0" bIns="0" rtlCol="0" anchor="ctr"/>
           <a:lstStyle/>
           <a:p>
-            <a:pPr algn="r" indent="0" marL="0">
+            <a:pPr marL="0" indent="0" algn="r">
               <a:buNone/>
             </a:pPr>
             <a:r>
@@ -11907,11 +12432,11 @@
           <a:bodyPr wrap="square" lIns="0" tIns="0" rIns="0" bIns="0" rtlCol="0" anchor="ctr"/>
           <a:lstStyle/>
           <a:p>
-            <a:pPr indent="0" marL="0">
-              <a:buNone/>
-            </a:pPr>
-            <a:r>
-              <a:rPr lang="en-US" sz="1500" b="1" spc="250" kern="0" dirty="0">
+            <a:pPr marL="0" indent="0">
+              <a:buNone/>
+            </a:pPr>
+            <a:r>
+              <a:rPr lang="en-US" sz="2000" b="1" kern="0" spc="250" dirty="0">
                 <a:solidFill>
                   <a:srgbClr val="1F9BD8"/>
                 </a:solidFill>
@@ -11921,7 +12446,7 @@
               </a:rPr>
               <a:t>СТРУКТУРА · 2/2</a:t>
             </a:r>
-            <a:endParaRPr lang="en-US" sz="1500" dirty="0"/>
+            <a:endParaRPr lang="en-US" sz="2000" dirty="0"/>
           </a:p>
         </p:txBody>
       </p:sp>
@@ -11946,7 +12471,7 @@
           <a:bodyPr wrap="square" lIns="0" tIns="0" rIns="0" bIns="0" rtlCol="0" anchor="ctr"/>
           <a:lstStyle/>
           <a:p>
-            <a:pPr indent="0" marL="0">
+            <a:pPr marL="0" indent="0">
               <a:buNone/>
             </a:pPr>
             <a:r>
@@ -11990,7 +12515,7 @@
             <a:prstDash val="solid"/>
           </a:ln>
           <a:effectLst>
-            <a:outerShdw sx="100000" sy="100000" kx="0" ky="0" algn="bl" rotWithShape="0" blurRad="88900" dist="25400" dir="5400000">
+            <a:outerShdw blurRad="88900" dist="25400" dir="5400000" algn="bl" rotWithShape="0">
               <a:srgbClr val="B8C9D4">
                 <a:alpha val="22000"/>
               </a:srgbClr>
@@ -12039,7 +12564,7 @@
           <a:bodyPr wrap="square" lIns="0" tIns="0" rIns="0" bIns="0" rtlCol="0" anchor="ctr"/>
           <a:lstStyle/>
           <a:p>
-            <a:pPr algn="ctr" indent="0" marL="0">
+            <a:pPr marL="0" indent="0" algn="ctr">
               <a:buNone/>
             </a:pPr>
             <a:r>
@@ -12076,7 +12601,7 @@
           </a:solidFill>
           <a:ln/>
           <a:effectLst>
-            <a:outerShdw sx="100000" sy="100000" kx="0" ky="0" algn="bl" rotWithShape="0" blurRad="88900" dist="25400" dir="5400000">
+            <a:outerShdw blurRad="88900" dist="25400" dir="5400000" algn="bl" rotWithShape="0">
               <a:srgbClr val="B8C9D4">
                 <a:alpha val="22000"/>
               </a:srgbClr>
@@ -12093,7 +12618,7 @@
           <p:nvPr/>
         </p:nvPicPr>
         <p:blipFill>
-          <a:blip r:embed="rId1"/>
+          <a:blip r:embed="rId3"/>
           <a:stretch>
             <a:fillRect/>
           </a:stretch>
@@ -12129,7 +12654,7 @@
           <a:bodyPr wrap="square" lIns="0" tIns="0" rIns="0" bIns="0" rtlCol="0" anchor="ctr"/>
           <a:lstStyle/>
           <a:p>
-            <a:pPr indent="0" marL="0">
+            <a:pPr marL="0" indent="0">
               <a:buNone/>
             </a:pPr>
             <a:r>
@@ -12168,7 +12693,7 @@
           <a:bodyPr wrap="square" lIns="0" tIns="0" rIns="0" bIns="0" rtlCol="0" anchor="ctr"/>
           <a:lstStyle/>
           <a:p>
-            <a:pPr indent="0" marL="0">
+            <a:pPr marL="0" indent="0">
               <a:lnSpc>
                 <a:spcPct val="100000"/>
               </a:lnSpc>
@@ -12210,7 +12735,7 @@
           <a:bodyPr wrap="square" lIns="0" tIns="0" rIns="0" bIns="0" rtlCol="0" anchor="ctr"/>
           <a:lstStyle/>
           <a:p>
-            <a:pPr algn="ctr" indent="0" marL="0">
+            <a:pPr marL="0" indent="0" algn="ctr">
               <a:buNone/>
             </a:pPr>
             <a:r>
@@ -12254,7 +12779,7 @@
             <a:prstDash val="solid"/>
           </a:ln>
           <a:effectLst>
-            <a:outerShdw sx="100000" sy="100000" kx="0" ky="0" algn="bl" rotWithShape="0" blurRad="88900" dist="25400" dir="5400000">
+            <a:outerShdw blurRad="88900" dist="25400" dir="5400000" algn="bl" rotWithShape="0">
               <a:srgbClr val="B8C9D4">
                 <a:alpha val="22000"/>
               </a:srgbClr>
@@ -12303,7 +12828,7 @@
           <a:bodyPr wrap="square" lIns="0" tIns="0" rIns="0" bIns="0" rtlCol="0" anchor="ctr"/>
           <a:lstStyle/>
           <a:p>
-            <a:pPr algn="ctr" indent="0" marL="0">
+            <a:pPr marL="0" indent="0" algn="ctr">
               <a:buNone/>
             </a:pPr>
             <a:r>
@@ -12340,7 +12865,7 @@
           </a:solidFill>
           <a:ln/>
           <a:effectLst>
-            <a:outerShdw sx="100000" sy="100000" kx="0" ky="0" algn="bl" rotWithShape="0" blurRad="88900" dist="25400" dir="5400000">
+            <a:outerShdw blurRad="88900" dist="25400" dir="5400000" algn="bl" rotWithShape="0">
               <a:srgbClr val="B8C9D4">
                 <a:alpha val="22000"/>
               </a:srgbClr>
@@ -12357,7 +12882,7 @@
           <p:nvPr/>
         </p:nvPicPr>
         <p:blipFill>
-          <a:blip r:embed="rId2"/>
+          <a:blip r:embed="rId4"/>
           <a:stretch>
             <a:fillRect/>
           </a:stretch>
@@ -12393,7 +12918,7 @@
           <a:bodyPr wrap="square" lIns="0" tIns="0" rIns="0" bIns="0" rtlCol="0" anchor="ctr"/>
           <a:lstStyle/>
           <a:p>
-            <a:pPr indent="0" marL="0">
+            <a:pPr marL="0" indent="0">
               <a:buNone/>
             </a:pPr>
             <a:r>
@@ -12432,7 +12957,7 @@
           <a:bodyPr wrap="square" lIns="0" tIns="0" rIns="0" bIns="0" rtlCol="0" anchor="ctr"/>
           <a:lstStyle/>
           <a:p>
-            <a:pPr indent="0" marL="0">
+            <a:pPr marL="0" indent="0">
               <a:lnSpc>
                 <a:spcPct val="100000"/>
               </a:lnSpc>
@@ -12474,7 +12999,7 @@
           <a:bodyPr wrap="square" lIns="0" tIns="0" rIns="0" bIns="0" rtlCol="0" anchor="ctr"/>
           <a:lstStyle/>
           <a:p>
-            <a:pPr algn="ctr" indent="0" marL="0">
+            <a:pPr marL="0" indent="0" algn="ctr">
               <a:buNone/>
             </a:pPr>
             <a:r>
@@ -12518,7 +13043,7 @@
             <a:prstDash val="solid"/>
           </a:ln>
           <a:effectLst>
-            <a:outerShdw sx="100000" sy="100000" kx="0" ky="0" algn="bl" rotWithShape="0" blurRad="88900" dist="25400" dir="5400000">
+            <a:outerShdw blurRad="88900" dist="25400" dir="5400000" algn="bl" rotWithShape="0">
               <a:srgbClr val="B8C9D4">
                 <a:alpha val="22000"/>
               </a:srgbClr>
@@ -12567,7 +13092,7 @@
           <a:bodyPr wrap="square" lIns="0" tIns="0" rIns="0" bIns="0" rtlCol="0" anchor="ctr"/>
           <a:lstStyle/>
           <a:p>
-            <a:pPr algn="ctr" indent="0" marL="0">
+            <a:pPr marL="0" indent="0" algn="ctr">
               <a:buNone/>
             </a:pPr>
             <a:r>
@@ -12604,7 +13129,7 @@
           </a:solidFill>
           <a:ln/>
           <a:effectLst>
-            <a:outerShdw sx="100000" sy="100000" kx="0" ky="0" algn="bl" rotWithShape="0" blurRad="88900" dist="25400" dir="5400000">
+            <a:outerShdw blurRad="88900" dist="25400" dir="5400000" algn="bl" rotWithShape="0">
               <a:srgbClr val="B8C9D4">
                 <a:alpha val="22000"/>
               </a:srgbClr>
@@ -12621,7 +13146,7 @@
           <p:nvPr/>
         </p:nvPicPr>
         <p:blipFill>
-          <a:blip r:embed="rId3"/>
+          <a:blip r:embed="rId5"/>
           <a:stretch>
             <a:fillRect/>
           </a:stretch>
@@ -12657,7 +13182,7 @@
           <a:bodyPr wrap="square" lIns="0" tIns="0" rIns="0" bIns="0" rtlCol="0" anchor="ctr"/>
           <a:lstStyle/>
           <a:p>
-            <a:pPr indent="0" marL="0">
+            <a:pPr marL="0" indent="0">
               <a:buNone/>
             </a:pPr>
             <a:r>
@@ -12696,7 +13221,7 @@
           <a:bodyPr wrap="square" lIns="0" tIns="0" rIns="0" bIns="0" rtlCol="0" anchor="ctr"/>
           <a:lstStyle/>
           <a:p>
-            <a:pPr indent="0" marL="0">
+            <a:pPr marL="0" indent="0">
               <a:lnSpc>
                 <a:spcPct val="100000"/>
               </a:lnSpc>
@@ -12738,7 +13263,7 @@
           <a:bodyPr wrap="square" lIns="0" tIns="0" rIns="0" bIns="0" rtlCol="0" anchor="ctr"/>
           <a:lstStyle/>
           <a:p>
-            <a:pPr algn="ctr" indent="0" marL="0">
+            <a:pPr marL="0" indent="0" algn="ctr">
               <a:buNone/>
             </a:pPr>
             <a:r>
@@ -12782,7 +13307,7 @@
             <a:prstDash val="solid"/>
           </a:ln>
           <a:effectLst>
-            <a:outerShdw sx="100000" sy="100000" kx="0" ky="0" algn="bl" rotWithShape="0" blurRad="88900" dist="25400" dir="5400000">
+            <a:outerShdw blurRad="88900" dist="25400" dir="5400000" algn="bl" rotWithShape="0">
               <a:srgbClr val="B8C9D4">
                 <a:alpha val="22000"/>
               </a:srgbClr>
@@ -12831,7 +13356,7 @@
           <a:bodyPr wrap="square" lIns="0" tIns="0" rIns="0" bIns="0" rtlCol="0" anchor="ctr"/>
           <a:lstStyle/>
           <a:p>
-            <a:pPr algn="ctr" indent="0" marL="0">
+            <a:pPr marL="0" indent="0" algn="ctr">
               <a:buNone/>
             </a:pPr>
             <a:r>
@@ -12868,7 +13393,7 @@
           </a:solidFill>
           <a:ln/>
           <a:effectLst>
-            <a:outerShdw sx="100000" sy="100000" kx="0" ky="0" algn="bl" rotWithShape="0" blurRad="88900" dist="25400" dir="5400000">
+            <a:outerShdw blurRad="88900" dist="25400" dir="5400000" algn="bl" rotWithShape="0">
               <a:srgbClr val="B8C9D4">
                 <a:alpha val="22000"/>
               </a:srgbClr>
@@ -12885,7 +13410,7 @@
           <p:nvPr/>
         </p:nvPicPr>
         <p:blipFill>
-          <a:blip r:embed="rId4"/>
+          <a:blip r:embed="rId6"/>
           <a:stretch>
             <a:fillRect/>
           </a:stretch>
@@ -12921,7 +13446,7 @@
           <a:bodyPr wrap="square" lIns="0" tIns="0" rIns="0" bIns="0" rtlCol="0" anchor="ctr"/>
           <a:lstStyle/>
           <a:p>
-            <a:pPr indent="0" marL="0">
+            <a:pPr marL="0" indent="0">
               <a:buNone/>
             </a:pPr>
             <a:r>
@@ -12960,7 +13485,7 @@
           <a:bodyPr wrap="square" lIns="0" tIns="0" rIns="0" bIns="0" rtlCol="0" anchor="ctr"/>
           <a:lstStyle/>
           <a:p>
-            <a:pPr indent="0" marL="0">
+            <a:pPr marL="0" indent="0">
               <a:lnSpc>
                 <a:spcPct val="100000"/>
               </a:lnSpc>
@@ -13002,7 +13527,7 @@
           <a:bodyPr wrap="square" lIns="0" tIns="0" rIns="0" bIns="0" rtlCol="0" anchor="ctr"/>
           <a:lstStyle/>
           <a:p>
-            <a:pPr algn="ctr" indent="0" marL="0">
+            <a:pPr marL="0" indent="0" algn="ctr">
               <a:buNone/>
             </a:pPr>
             <a:r>
@@ -13046,7 +13571,7 @@
             <a:prstDash val="solid"/>
           </a:ln>
           <a:effectLst>
-            <a:outerShdw sx="100000" sy="100000" kx="0" ky="0" algn="bl" rotWithShape="0" blurRad="88900" dist="25400" dir="5400000">
+            <a:outerShdw blurRad="88900" dist="25400" dir="5400000" algn="bl" rotWithShape="0">
               <a:srgbClr val="B8C9D4">
                 <a:alpha val="22000"/>
               </a:srgbClr>
@@ -13095,7 +13620,7 @@
           <a:bodyPr wrap="square" lIns="0" tIns="0" rIns="0" bIns="0" rtlCol="0" anchor="ctr"/>
           <a:lstStyle/>
           <a:p>
-            <a:pPr algn="ctr" indent="0" marL="0">
+            <a:pPr marL="0" indent="0" algn="ctr">
               <a:buNone/>
             </a:pPr>
             <a:r>
@@ -13132,7 +13657,7 @@
           </a:solidFill>
           <a:ln/>
           <a:effectLst>
-            <a:outerShdw sx="100000" sy="100000" kx="0" ky="0" algn="bl" rotWithShape="0" blurRad="88900" dist="25400" dir="5400000">
+            <a:outerShdw blurRad="88900" dist="25400" dir="5400000" algn="bl" rotWithShape="0">
               <a:srgbClr val="B8C9D4">
                 <a:alpha val="22000"/>
               </a:srgbClr>
@@ -13149,7 +13674,7 @@
           <p:nvPr/>
         </p:nvPicPr>
         <p:blipFill>
-          <a:blip r:embed="rId5"/>
+          <a:blip r:embed="rId7"/>
           <a:stretch>
             <a:fillRect/>
           </a:stretch>
@@ -13185,7 +13710,7 @@
           <a:bodyPr wrap="square" lIns="0" tIns="0" rIns="0" bIns="0" rtlCol="0" anchor="ctr"/>
           <a:lstStyle/>
           <a:p>
-            <a:pPr indent="0" marL="0">
+            <a:pPr marL="0" indent="0">
               <a:buNone/>
             </a:pPr>
             <a:r>
@@ -13224,7 +13749,7 @@
           <a:bodyPr wrap="square" lIns="0" tIns="0" rIns="0" bIns="0" rtlCol="0" anchor="ctr"/>
           <a:lstStyle/>
           <a:p>
-            <a:pPr indent="0" marL="0">
+            <a:pPr marL="0" indent="0">
               <a:lnSpc>
                 <a:spcPct val="100000"/>
               </a:lnSpc>
@@ -13242,824 +13767,6 @@
               <a:t>prediction сохранён, adaptation в ответе ingest</a:t>
             </a:r>
             <a:endParaRPr lang="en-US" sz="1150" dirty="0"/>
-          </a:p>
-        </p:txBody>
-      </p:sp>
-    </p:spTree>
-  </p:cSld>
-  <p:clrMapOvr>
-    <a:masterClrMapping/>
-  </p:clrMapOvr>
-</p:sld>
-</file>
-
-<file path=ppt/slides/slide9.xml><?xml version="1.0" encoding="utf-8"?>
-<p:sld xmlns:a="http://schemas.openxmlformats.org/drawingml/2006/main" xmlns:r="http://schemas.openxmlformats.org/officeDocument/2006/relationships" xmlns:p="http://schemas.openxmlformats.org/presentationml/2006/main">
-  <p:cSld name="Slide 9">
-    <p:bg>
-      <p:bgPr>
-        <a:solidFill>
-          <a:srgbClr val="FFFFFF"/>
-        </a:solidFill>
-      </p:bgPr>
-    </p:bg>
-    <p:spTree>
-      <p:nvGrpSpPr>
-        <p:cNvPr id="1" name=""/>
-        <p:cNvGrpSpPr/>
-        <p:nvPr/>
-      </p:nvGrpSpPr>
-      <p:grpSpPr>
-        <a:xfrm>
-          <a:off x="0" y="0"/>
-          <a:ext cx="0" cy="0"/>
-          <a:chOff x="0" y="0"/>
-          <a:chExt cx="0" cy="0"/>
-        </a:xfrm>
-      </p:grpSpPr>
-      <p:sp>
-        <p:nvSpPr>
-          <p:cNvPr id="2" name="Text 0"/>
-          <p:cNvSpPr/>
-          <p:nvPr/>
-        </p:nvSpPr>
-        <p:spPr>
-          <a:xfrm>
-            <a:off x="10820095" y="384048"/>
-            <a:ext cx="822960" cy="640080"/>
-          </a:xfrm>
-          <a:prstGeom prst="rect">
-            <a:avLst/>
-          </a:prstGeom>
-          <a:noFill/>
-          <a:ln/>
-        </p:spPr>
-        <p:txBody>
-          <a:bodyPr wrap="square" lIns="0" tIns="0" rIns="0" bIns="0" rtlCol="0" anchor="ctr"/>
-          <a:lstStyle/>
-          <a:p>
-            <a:pPr algn="r" indent="0" marL="0">
-              <a:buNone/>
-            </a:pPr>
-            <a:r>
-              <a:rPr lang="en-US" sz="3000" b="1" dirty="0">
-                <a:solidFill>
-                  <a:srgbClr val="C6D6E0"/>
-                </a:solidFill>
-                <a:latin typeface="Cambria" pitchFamily="34" charset="0"/>
-                <a:ea typeface="Cambria" pitchFamily="34" charset="-122"/>
-                <a:cs typeface="Cambria" pitchFamily="34" charset="-120"/>
-              </a:rPr>
-              <a:t>10</a:t>
-            </a:r>
-            <a:endParaRPr lang="en-US" sz="3000" dirty="0"/>
-          </a:p>
-        </p:txBody>
-      </p:sp>
-      <p:sp>
-        <p:nvSpPr>
-          <p:cNvPr id="3" name="Text 1"/>
-          <p:cNvSpPr/>
-          <p:nvPr/>
-        </p:nvSpPr>
-        <p:spPr>
-          <a:xfrm>
-            <a:off x="640080" y="475488"/>
-            <a:ext cx="8229600" cy="274320"/>
-          </a:xfrm>
-          <a:prstGeom prst="rect">
-            <a:avLst/>
-          </a:prstGeom>
-          <a:noFill/>
-          <a:ln/>
-        </p:spPr>
-        <p:txBody>
-          <a:bodyPr wrap="square" lIns="0" tIns="0" rIns="0" bIns="0" rtlCol="0" anchor="ctr"/>
-          <a:lstStyle/>
-          <a:p>
-            <a:pPr indent="0" marL="0">
-              <a:buNone/>
-            </a:pPr>
-            <a:r>
-              <a:rPr lang="en-US" sz="1500" b="1" spc="250" kern="0" dirty="0">
-                <a:solidFill>
-                  <a:srgbClr val="1F9BD8"/>
-                </a:solidFill>
-                <a:latin typeface="Calibri" pitchFamily="34" charset="0"/>
-                <a:ea typeface="Calibri" pitchFamily="34" charset="-122"/>
-                <a:cs typeface="Calibri" pitchFamily="34" charset="-120"/>
-              </a:rPr>
-              <a:t>ЗАДЕЛЫ НА БУДУЩЕЕ</a:t>
-            </a:r>
-            <a:endParaRPr lang="en-US" sz="1500" dirty="0"/>
-          </a:p>
-        </p:txBody>
-      </p:sp>
-      <p:sp>
-        <p:nvSpPr>
-          <p:cNvPr id="4" name="Text 2"/>
-          <p:cNvSpPr/>
-          <p:nvPr/>
-        </p:nvSpPr>
-        <p:spPr>
-          <a:xfrm>
-            <a:off x="640080" y="749808"/>
-            <a:ext cx="10362895" cy="777240"/>
-          </a:xfrm>
-          <a:prstGeom prst="rect">
-            <a:avLst/>
-          </a:prstGeom>
-          <a:noFill/>
-          <a:ln/>
-        </p:spPr>
-        <p:txBody>
-          <a:bodyPr wrap="square" lIns="0" tIns="0" rIns="0" bIns="0" rtlCol="0" anchor="ctr"/>
-          <a:lstStyle/>
-          <a:p>
-            <a:pPr indent="0" marL="0">
-              <a:buNone/>
-            </a:pPr>
-            <a:r>
-              <a:rPr lang="en-US" sz="3000" b="1" dirty="0">
-                <a:solidFill>
-                  <a:srgbClr val="111418"/>
-                </a:solidFill>
-                <a:latin typeface="Cambria" pitchFamily="34" charset="0"/>
-                <a:ea typeface="Cambria" pitchFamily="34" charset="-122"/>
-                <a:cs typeface="Cambria" pitchFamily="34" charset="-120"/>
-              </a:rPr>
-              <a:t>Заделы на будущее</a:t>
-            </a:r>
-            <a:endParaRPr lang="en-US" sz="3000" dirty="0"/>
-          </a:p>
-        </p:txBody>
-      </p:sp>
-      <p:sp>
-        <p:nvSpPr>
-          <p:cNvPr id="7" name="Shape 5"/>
-          <p:cNvSpPr/>
-          <p:nvPr/>
-        </p:nvSpPr>
-        <p:spPr>
-          <a:xfrm>
-            <a:off x="640080" y="1783080"/>
-            <a:ext cx="5212080" cy="1078992"/>
-          </a:xfrm>
-          <a:prstGeom prst="roundRect">
-            <a:avLst>
-              <a:gd name="adj" fmla="val 6780"/>
-            </a:avLst>
-          </a:prstGeom>
-          <a:solidFill>
-            <a:srgbClr val="F4FAFD"/>
-          </a:solidFill>
-          <a:ln w="12700">
-            <a:solidFill>
-              <a:srgbClr val="DCE6EC"/>
-            </a:solidFill>
-            <a:prstDash val="solid"/>
-          </a:ln>
-        </p:spPr>
-      </p:sp>
-      <p:sp>
-        <p:nvSpPr>
-          <p:cNvPr id="8" name="Shape 6"/>
-          <p:cNvSpPr/>
-          <p:nvPr/>
-        </p:nvSpPr>
-        <p:spPr>
-          <a:xfrm>
-            <a:off x="859536" y="2039112"/>
-            <a:ext cx="566928" cy="566928"/>
-          </a:xfrm>
-          <a:prstGeom prst="ellipse">
-            <a:avLst/>
-          </a:prstGeom>
-          <a:solidFill>
-            <a:srgbClr val="1F9BD8"/>
-          </a:solidFill>
-          <a:ln/>
-          <a:effectLst>
-            <a:outerShdw sx="100000" sy="100000" kx="0" ky="0" algn="bl" rotWithShape="0" blurRad="88900" dist="25400" dir="5400000">
-              <a:srgbClr val="B8C9D4">
-                <a:alpha val="22000"/>
-              </a:srgbClr>
-            </a:outerShdw>
-          </a:effectLst>
-        </p:spPr>
-      </p:sp>
-      <p:pic>
-        <p:nvPicPr>
-          <p:cNvPr id="9" name="Image 0" descr="icons/sliders.png"/>
-          <p:cNvPicPr>
-            <a:picLocks noChangeAspect="1"/>
-          </p:cNvPicPr>
-          <p:nvPr/>
-        </p:nvPicPr>
-        <p:blipFill>
-          <a:blip r:embed="rId1"/>
-          <a:stretch>
-            <a:fillRect/>
-          </a:stretch>
-        </p:blipFill>
-        <p:spPr>
-          <a:xfrm>
-            <a:off x="1029614" y="2209190"/>
-            <a:ext cx="226771" cy="226771"/>
-          </a:xfrm>
-          <a:prstGeom prst="rect">
-            <a:avLst/>
-          </a:prstGeom>
-        </p:spPr>
-      </p:pic>
-      <p:sp>
-        <p:nvSpPr>
-          <p:cNvPr id="10" name="Text 7"/>
-          <p:cNvSpPr/>
-          <p:nvPr/>
-        </p:nvSpPr>
-        <p:spPr>
-          <a:xfrm>
-            <a:off x="1664208" y="1947672"/>
-            <a:ext cx="4023360" cy="365760"/>
-          </a:xfrm>
-          <a:prstGeom prst="rect">
-            <a:avLst/>
-          </a:prstGeom>
-          <a:noFill/>
-          <a:ln/>
-        </p:spPr>
-        <p:txBody>
-          <a:bodyPr wrap="square" lIns="0" tIns="0" rIns="0" bIns="0" rtlCol="0" anchor="ctr"/>
-          <a:lstStyle/>
-          <a:p>
-            <a:pPr indent="0" marL="0">
-              <a:buNone/>
-            </a:pPr>
-            <a:r>
-              <a:rPr lang="en-US" sz="1450" b="1" dirty="0">
-                <a:solidFill>
-                  <a:srgbClr val="111418"/>
-                </a:solidFill>
-                <a:latin typeface="Calibri" pitchFamily="34" charset="0"/>
-                <a:ea typeface="Calibri" pitchFamily="34" charset="-122"/>
-                <a:cs typeface="Calibri" pitchFamily="34" charset="-120"/>
-              </a:rPr>
-              <a:t>Метрики и логирование</a:t>
-            </a:r>
-            <a:endParaRPr lang="en-US" sz="1450" dirty="0"/>
-          </a:p>
-        </p:txBody>
-      </p:sp>
-      <p:sp>
-        <p:nvSpPr>
-          <p:cNvPr id="11" name="Text 8"/>
-          <p:cNvSpPr/>
-          <p:nvPr/>
-        </p:nvSpPr>
-        <p:spPr>
-          <a:xfrm>
-            <a:off x="1664208" y="2313432"/>
-            <a:ext cx="4023360" cy="502920"/>
-          </a:xfrm>
-          <a:prstGeom prst="rect">
-            <a:avLst/>
-          </a:prstGeom>
-          <a:noFill/>
-          <a:ln/>
-        </p:spPr>
-        <p:txBody>
-          <a:bodyPr wrap="square" lIns="0" tIns="0" rIns="0" bIns="0" rtlCol="0" anchor="t"/>
-          <a:lstStyle/>
-          <a:p>
-            <a:pPr indent="0" marL="0">
-              <a:lnSpc>
-                <a:spcPct val="100000"/>
-              </a:lnSpc>
-              <a:buNone/>
-            </a:pPr>
-            <a:r>
-              <a:rPr lang="en-US" sz="1150" dirty="0">
-                <a:solidFill>
-                  <a:srgbClr val="33383F"/>
-                </a:solidFill>
-                <a:latin typeface="Calibri" pitchFamily="34" charset="0"/>
-                <a:ea typeface="Calibri" pitchFamily="34" charset="-122"/>
-                <a:cs typeface="Calibri" pitchFamily="34" charset="-120"/>
-              </a:rPr>
-              <a:t>latency /predict, fallback-rate, мониторинг нагрузки</a:t>
-            </a:r>
-            <a:endParaRPr lang="en-US" sz="1150" dirty="0"/>
-          </a:p>
-        </p:txBody>
-      </p:sp>
-      <p:sp>
-        <p:nvSpPr>
-          <p:cNvPr id="12" name="Shape 9"/>
-          <p:cNvSpPr/>
-          <p:nvPr/>
-        </p:nvSpPr>
-        <p:spPr>
-          <a:xfrm>
-            <a:off x="640080" y="3063240"/>
-            <a:ext cx="5212080" cy="1078992"/>
-          </a:xfrm>
-          <a:prstGeom prst="roundRect">
-            <a:avLst>
-              <a:gd name="adj" fmla="val 6780"/>
-            </a:avLst>
-          </a:prstGeom>
-          <a:solidFill>
-            <a:srgbClr val="F4FAFD"/>
-          </a:solidFill>
-          <a:ln w="12700">
-            <a:solidFill>
-              <a:srgbClr val="DCE6EC"/>
-            </a:solidFill>
-            <a:prstDash val="solid"/>
-          </a:ln>
-        </p:spPr>
-      </p:sp>
-      <p:sp>
-        <p:nvSpPr>
-          <p:cNvPr id="13" name="Shape 10"/>
-          <p:cNvSpPr/>
-          <p:nvPr/>
-        </p:nvSpPr>
-        <p:spPr>
-          <a:xfrm>
-            <a:off x="859536" y="3319272"/>
-            <a:ext cx="566928" cy="566928"/>
-          </a:xfrm>
-          <a:prstGeom prst="ellipse">
-            <a:avLst/>
-          </a:prstGeom>
-          <a:solidFill>
-            <a:srgbClr val="1F9BD8"/>
-          </a:solidFill>
-          <a:ln/>
-          <a:effectLst>
-            <a:outerShdw sx="100000" sy="100000" kx="0" ky="0" algn="bl" rotWithShape="0" blurRad="88900" dist="25400" dir="5400000">
-              <a:srgbClr val="B8C9D4">
-                <a:alpha val="22000"/>
-              </a:srgbClr>
-            </a:outerShdw>
-          </a:effectLst>
-        </p:spPr>
-      </p:sp>
-      <p:pic>
-        <p:nvPicPr>
-          <p:cNvPr id="14" name="Image 1" descr="icons/shield.png"/>
-          <p:cNvPicPr>
-            <a:picLocks noChangeAspect="1"/>
-          </p:cNvPicPr>
-          <p:nvPr/>
-        </p:nvPicPr>
-        <p:blipFill>
-          <a:blip r:embed="rId2"/>
-          <a:stretch>
-            <a:fillRect/>
-          </a:stretch>
-        </p:blipFill>
-        <p:spPr>
-          <a:xfrm>
-            <a:off x="1029614" y="3489350"/>
-            <a:ext cx="226771" cy="226771"/>
-          </a:xfrm>
-          <a:prstGeom prst="rect">
-            <a:avLst/>
-          </a:prstGeom>
-        </p:spPr>
-      </p:pic>
-      <p:sp>
-        <p:nvSpPr>
-          <p:cNvPr id="15" name="Text 11"/>
-          <p:cNvSpPr/>
-          <p:nvPr/>
-        </p:nvSpPr>
-        <p:spPr>
-          <a:xfrm>
-            <a:off x="1664208" y="3227832"/>
-            <a:ext cx="4023360" cy="365760"/>
-          </a:xfrm>
-          <a:prstGeom prst="rect">
-            <a:avLst/>
-          </a:prstGeom>
-          <a:noFill/>
-          <a:ln/>
-        </p:spPr>
-        <p:txBody>
-          <a:bodyPr wrap="square" lIns="0" tIns="0" rIns="0" bIns="0" rtlCol="0" anchor="ctr"/>
-          <a:lstStyle/>
-          <a:p>
-            <a:pPr indent="0" marL="0">
-              <a:buNone/>
-            </a:pPr>
-            <a:r>
-              <a:rPr lang="en-US" sz="1450" b="1" dirty="0">
-                <a:solidFill>
-                  <a:srgbClr val="111418"/>
-                </a:solidFill>
-                <a:latin typeface="Calibri" pitchFamily="34" charset="0"/>
-                <a:ea typeface="Calibri" pitchFamily="34" charset="-122"/>
-                <a:cs typeface="Calibri" pitchFamily="34" charset="-120"/>
-              </a:rPr>
-              <a:t>Политика отказов ML</a:t>
-            </a:r>
-            <a:endParaRPr lang="en-US" sz="1450" dirty="0"/>
-          </a:p>
-        </p:txBody>
-      </p:sp>
-      <p:sp>
-        <p:nvSpPr>
-          <p:cNvPr id="16" name="Text 12"/>
-          <p:cNvSpPr/>
-          <p:nvPr/>
-        </p:nvSpPr>
-        <p:spPr>
-          <a:xfrm>
-            <a:off x="1664208" y="3593592"/>
-            <a:ext cx="4023360" cy="502920"/>
-          </a:xfrm>
-          <a:prstGeom prst="rect">
-            <a:avLst/>
-          </a:prstGeom>
-          <a:noFill/>
-          <a:ln/>
-        </p:spPr>
-        <p:txBody>
-          <a:bodyPr wrap="square" lIns="0" tIns="0" rIns="0" bIns="0" rtlCol="0" anchor="t"/>
-          <a:lstStyle/>
-          <a:p>
-            <a:pPr indent="0" marL="0">
-              <a:lnSpc>
-                <a:spcPct val="100000"/>
-              </a:lnSpc>
-              <a:buNone/>
-            </a:pPr>
-            <a:r>
-              <a:rPr lang="en-US" sz="1150" dirty="0">
-                <a:solidFill>
-                  <a:srgbClr val="33383F"/>
-                </a:solidFill>
-                <a:latin typeface="Calibri" pitchFamily="34" charset="0"/>
-                <a:ea typeface="Calibri" pitchFamily="34" charset="-122"/>
-                <a:cs typeface="Calibri" pitchFamily="34" charset="-120"/>
-              </a:rPr>
-              <a:t>чёткий fallback или 503 при недоступности ML-сервиса</a:t>
-            </a:r>
-            <a:endParaRPr lang="en-US" sz="1150" dirty="0"/>
-          </a:p>
-        </p:txBody>
-      </p:sp>
-      <p:sp>
-        <p:nvSpPr>
-          <p:cNvPr id="17" name="Shape 13"/>
-          <p:cNvSpPr/>
-          <p:nvPr/>
-        </p:nvSpPr>
-        <p:spPr>
-          <a:xfrm>
-            <a:off x="640080" y="4343400"/>
-            <a:ext cx="5212080" cy="1078992"/>
-          </a:xfrm>
-          <a:prstGeom prst="roundRect">
-            <a:avLst>
-              <a:gd name="adj" fmla="val 6780"/>
-            </a:avLst>
-          </a:prstGeom>
-          <a:solidFill>
-            <a:srgbClr val="F4FAFD"/>
-          </a:solidFill>
-          <a:ln w="12700">
-            <a:solidFill>
-              <a:srgbClr val="DCE6EC"/>
-            </a:solidFill>
-            <a:prstDash val="solid"/>
-          </a:ln>
-        </p:spPr>
-      </p:sp>
-      <p:sp>
-        <p:nvSpPr>
-          <p:cNvPr id="18" name="Shape 14"/>
-          <p:cNvSpPr/>
-          <p:nvPr/>
-        </p:nvSpPr>
-        <p:spPr>
-          <a:xfrm>
-            <a:off x="859536" y="4599432"/>
-            <a:ext cx="566928" cy="566928"/>
-          </a:xfrm>
-          <a:prstGeom prst="ellipse">
-            <a:avLst/>
-          </a:prstGeom>
-          <a:solidFill>
-            <a:srgbClr val="1F9BD8"/>
-          </a:solidFill>
-          <a:ln/>
-          <a:effectLst>
-            <a:outerShdw sx="100000" sy="100000" kx="0" ky="0" algn="bl" rotWithShape="0" blurRad="88900" dist="25400" dir="5400000">
-              <a:srgbClr val="B8C9D4">
-                <a:alpha val="22000"/>
-              </a:srgbClr>
-            </a:outerShdw>
-          </a:effectLst>
-        </p:spPr>
-      </p:sp>
-      <p:pic>
-        <p:nvPicPr>
-          <p:cNvPr id="19" name="Image 2" descr="icons/container.png"/>
-          <p:cNvPicPr>
-            <a:picLocks noChangeAspect="1"/>
-          </p:cNvPicPr>
-          <p:nvPr/>
-        </p:nvPicPr>
-        <p:blipFill>
-          <a:blip r:embed="rId3"/>
-          <a:stretch>
-            <a:fillRect/>
-          </a:stretch>
-        </p:blipFill>
-        <p:spPr>
-          <a:xfrm>
-            <a:off x="1029614" y="4769510"/>
-            <a:ext cx="226771" cy="226771"/>
-          </a:xfrm>
-          <a:prstGeom prst="rect">
-            <a:avLst/>
-          </a:prstGeom>
-        </p:spPr>
-      </p:pic>
-      <p:sp>
-        <p:nvSpPr>
-          <p:cNvPr id="20" name="Text 15"/>
-          <p:cNvSpPr/>
-          <p:nvPr/>
-        </p:nvSpPr>
-        <p:spPr>
-          <a:xfrm>
-            <a:off x="1664208" y="4507992"/>
-            <a:ext cx="4023360" cy="365760"/>
-          </a:xfrm>
-          <a:prstGeom prst="rect">
-            <a:avLst/>
-          </a:prstGeom>
-          <a:noFill/>
-          <a:ln/>
-        </p:spPr>
-        <p:txBody>
-          <a:bodyPr wrap="square" lIns="0" tIns="0" rIns="0" bIns="0" rtlCol="0" anchor="ctr"/>
-          <a:lstStyle/>
-          <a:p>
-            <a:pPr indent="0" marL="0">
-              <a:buNone/>
-            </a:pPr>
-            <a:r>
-              <a:rPr lang="en-US" sz="1450" b="1" dirty="0">
-                <a:solidFill>
-                  <a:srgbClr val="111418"/>
-                </a:solidFill>
-                <a:latin typeface="Calibri" pitchFamily="34" charset="0"/>
-                <a:ea typeface="Calibri" pitchFamily="34" charset="-122"/>
-                <a:cs typeface="Calibri" pitchFamily="34" charset="-120"/>
-              </a:rPr>
-              <a:t>Масштабирование</a:t>
-            </a:r>
-            <a:endParaRPr lang="en-US" sz="1450" dirty="0"/>
-          </a:p>
-        </p:txBody>
-      </p:sp>
-      <p:sp>
-        <p:nvSpPr>
-          <p:cNvPr id="21" name="Text 16"/>
-          <p:cNvSpPr/>
-          <p:nvPr/>
-        </p:nvSpPr>
-        <p:spPr>
-          <a:xfrm>
-            <a:off x="1664208" y="4873752"/>
-            <a:ext cx="4023360" cy="502920"/>
-          </a:xfrm>
-          <a:prstGeom prst="rect">
-            <a:avLst/>
-          </a:prstGeom>
-          <a:noFill/>
-          <a:ln/>
-        </p:spPr>
-        <p:txBody>
-          <a:bodyPr wrap="square" lIns="0" tIns="0" rIns="0" bIns="0" rtlCol="0" anchor="t"/>
-          <a:lstStyle/>
-          <a:p>
-            <a:pPr indent="0" marL="0">
-              <a:lnSpc>
-                <a:spcPct val="100000"/>
-              </a:lnSpc>
-              <a:buNone/>
-            </a:pPr>
-            <a:r>
-              <a:rPr lang="en-US" sz="1150" dirty="0">
-                <a:solidFill>
-                  <a:srgbClr val="33383F"/>
-                </a:solidFill>
-                <a:latin typeface="Calibri" pitchFamily="34" charset="0"/>
-                <a:ea typeface="Calibri" pitchFamily="34" charset="-122"/>
-                <a:cs typeface="Calibri" pitchFamily="34" charset="-120"/>
-              </a:rPr>
-              <a:t>несколько воркеров backend, пул соединений, готовность к k8s</a:t>
-            </a:r>
-            <a:endParaRPr lang="en-US" sz="1150" dirty="0"/>
-          </a:p>
-        </p:txBody>
-      </p:sp>
-      <p:sp>
-        <p:nvSpPr>
-          <p:cNvPr id="22" name="Shape 17"/>
-          <p:cNvSpPr/>
-          <p:nvPr/>
-        </p:nvSpPr>
-        <p:spPr>
-          <a:xfrm>
-            <a:off x="6766560" y="1783080"/>
-            <a:ext cx="4785055" cy="4160520"/>
-          </a:xfrm>
-          <a:prstGeom prst="roundRect">
-            <a:avLst>
-              <a:gd name="adj" fmla="val 2198"/>
-            </a:avLst>
-          </a:prstGeom>
-          <a:solidFill>
-            <a:srgbClr val="0B5E88"/>
-          </a:solidFill>
-          <a:ln/>
-          <a:effectLst>
-            <a:outerShdw sx="100000" sy="100000" kx="0" ky="0" algn="bl" rotWithShape="0" blurRad="114300" dist="38100" dir="5400000">
-              <a:srgbClr val="9FB6C4">
-                <a:alpha val="28000"/>
-              </a:srgbClr>
-            </a:outerShdw>
-          </a:effectLst>
-        </p:spPr>
-      </p:sp>
-      <p:sp>
-        <p:nvSpPr>
-          <p:cNvPr id="23" name="Text 18"/>
-          <p:cNvSpPr/>
-          <p:nvPr/>
-        </p:nvSpPr>
-        <p:spPr>
-          <a:xfrm>
-            <a:off x="6766560" y="2057400"/>
-            <a:ext cx="4785055" cy="274320"/>
-          </a:xfrm>
-          <a:prstGeom prst="rect">
-            <a:avLst/>
-          </a:prstGeom>
-          <a:noFill/>
-          <a:ln/>
-        </p:spPr>
-        <p:txBody>
-          <a:bodyPr wrap="square" lIns="0" tIns="0" rIns="0" bIns="0" rtlCol="0" anchor="ctr"/>
-          <a:lstStyle/>
-          <a:p>
-            <a:pPr algn="ctr" indent="0" marL="0">
-              <a:buNone/>
-            </a:pPr>
-            <a:r>
-              <a:rPr lang="en-US" sz="1200" b="1" spc="200" kern="0" dirty="0">
-                <a:solidFill>
-                  <a:srgbClr val="8FD0EE"/>
-                </a:solidFill>
-                <a:latin typeface="Calibri" pitchFamily="34" charset="0"/>
-                <a:ea typeface="Calibri" pitchFamily="34" charset="-122"/>
-                <a:cs typeface="Calibri" pitchFamily="34" charset="-120"/>
-              </a:rPr>
-              <a:t>РЕПОЗИТОРИЙ ПРОЕКТА</a:t>
-            </a:r>
-            <a:endParaRPr lang="en-US" sz="1200" dirty="0"/>
-          </a:p>
-        </p:txBody>
-      </p:sp>
-      <p:sp>
-        <p:nvSpPr>
-          <p:cNvPr id="24" name="Shape 19"/>
-          <p:cNvSpPr/>
-          <p:nvPr/>
-        </p:nvSpPr>
-        <p:spPr>
-          <a:xfrm>
-            <a:off x="7924648" y="2468880"/>
-            <a:ext cx="2468880" cy="2468880"/>
-          </a:xfrm>
-          <a:prstGeom prst="roundRect">
-            <a:avLst>
-              <a:gd name="adj" fmla="val 2963"/>
-            </a:avLst>
-          </a:prstGeom>
-          <a:solidFill>
-            <a:srgbClr val="FFFFFF"/>
-          </a:solidFill>
-          <a:ln/>
-        </p:spPr>
-      </p:sp>
-      <p:pic>
-        <p:nvPicPr>
-          <p:cNvPr id="25" name="Image 3" descr="qr_git.png"/>
-          <p:cNvPicPr>
-            <a:picLocks noChangeAspect="1"/>
-          </p:cNvPicPr>
-          <p:nvPr/>
-        </p:nvPicPr>
-        <p:blipFill>
-          <a:blip r:embed="rId4"/>
-          <a:stretch>
-            <a:fillRect/>
-          </a:stretch>
-        </p:blipFill>
-        <p:spPr>
-          <a:xfrm>
-            <a:off x="8070952" y="2615184"/>
-            <a:ext cx="2176272" cy="2176272"/>
-          </a:xfrm>
-          <a:prstGeom prst="rect">
-            <a:avLst/>
-          </a:prstGeom>
-        </p:spPr>
-      </p:pic>
-      <p:sp>
-        <p:nvSpPr>
-          <p:cNvPr id="26" name="Text 20"/>
-          <p:cNvSpPr/>
-          <p:nvPr/>
-        </p:nvSpPr>
-        <p:spPr>
-          <a:xfrm>
-            <a:off x="6766560" y="5074920"/>
-            <a:ext cx="4785055" cy="365760"/>
-          </a:xfrm>
-          <a:prstGeom prst="rect">
-            <a:avLst/>
-          </a:prstGeom>
-          <a:noFill/>
-          <a:ln/>
-        </p:spPr>
-        <p:txBody>
-          <a:bodyPr wrap="square" lIns="0" tIns="0" rIns="0" bIns="0" rtlCol="0" anchor="ctr"/>
-          <a:lstStyle/>
-          <a:p>
-            <a:pPr algn="ctr" indent="0" marL="0">
-              <a:buNone/>
-            </a:pPr>
-            <a:r>
-              <a:rPr lang="en-US" sz="1150" b="1" dirty="0">
-                <a:solidFill>
-                  <a:srgbClr val="FFFFFF"/>
-                </a:solidFill>
-                <a:latin typeface="Calibri" pitchFamily="34" charset="0"/>
-                <a:ea typeface="Calibri" pitchFamily="34" charset="-122"/>
-                <a:cs typeface="Calibri" pitchFamily="34" charset="-120"/>
-              </a:rPr>
-              <a:t>github.com/Antizi/diplom-Game_Plugs_Ai</a:t>
-            </a:r>
-            <a:endParaRPr lang="en-US" sz="1150" dirty="0"/>
-          </a:p>
-        </p:txBody>
-      </p:sp>
-      <p:sp>
-        <p:nvSpPr>
-          <p:cNvPr id="27" name="Text 21"/>
-          <p:cNvSpPr/>
-          <p:nvPr/>
-        </p:nvSpPr>
-        <p:spPr>
-          <a:xfrm>
-            <a:off x="6766560" y="5440680"/>
-            <a:ext cx="4785055" cy="274320"/>
-          </a:xfrm>
-          <a:prstGeom prst="rect">
-            <a:avLst/>
-          </a:prstGeom>
-          <a:noFill/>
-          <a:ln/>
-        </p:spPr>
-        <p:txBody>
-          <a:bodyPr wrap="square" lIns="0" tIns="0" rIns="0" bIns="0" rtlCol="0" anchor="ctr"/>
-          <a:lstStyle/>
-          <a:p>
-            <a:pPr algn="ctr" indent="0" marL="0">
-              <a:buNone/>
-            </a:pPr>
-            <a:r>
-              <a:rPr lang="en-US" sz="1000" dirty="0">
-                <a:solidFill>
-                  <a:srgbClr val="9FD4EE"/>
-                </a:solidFill>
-                <a:latin typeface="Calibri" pitchFamily="34" charset="0"/>
-                <a:ea typeface="Calibri" pitchFamily="34" charset="-122"/>
-                <a:cs typeface="Calibri" pitchFamily="34" charset="-120"/>
-              </a:rPr>
-              <a:t>Наведите камеру телефона на QR-код</a:t>
-            </a:r>
-            <a:endParaRPr lang="en-US" sz="1000" dirty="0"/>
           </a:p>
         </p:txBody>
       </p:sp>
@@ -14364,4 +14071,299 @@
     </a:ext>
   </a:extLst>
 </a:theme>
+</file>
+
+<file path=ppt/theme/theme2.xml><?xml version="1.0" encoding="utf-8"?>
+<a:theme xmlns:a="http://schemas.openxmlformats.org/drawingml/2006/main" name="Тема Office">
+  <a:themeElements>
+    <a:clrScheme name="Стандартная">
+      <a:dk1>
+        <a:sysClr val="windowText" lastClr="000000"/>
+      </a:dk1>
+      <a:lt1>
+        <a:sysClr val="window" lastClr="FFFFFF"/>
+      </a:lt1>
+      <a:dk2>
+        <a:srgbClr val="44546A"/>
+      </a:dk2>
+      <a:lt2>
+        <a:srgbClr val="E7E6E6"/>
+      </a:lt2>
+      <a:accent1>
+        <a:srgbClr val="4472C4"/>
+      </a:accent1>
+      <a:accent2>
+        <a:srgbClr val="ED7D31"/>
+      </a:accent2>
+      <a:accent3>
+        <a:srgbClr val="A5A5A5"/>
+      </a:accent3>
+      <a:accent4>
+        <a:srgbClr val="FFC000"/>
+      </a:accent4>
+      <a:accent5>
+        <a:srgbClr val="5B9BD5"/>
+      </a:accent5>
+      <a:accent6>
+        <a:srgbClr val="70AD47"/>
+      </a:accent6>
+      <a:hlink>
+        <a:srgbClr val="0563C1"/>
+      </a:hlink>
+      <a:folHlink>
+        <a:srgbClr val="954F72"/>
+      </a:folHlink>
+    </a:clrScheme>
+    <a:fontScheme name="Стандартная">
+      <a:majorFont>
+        <a:latin typeface="Calibri Light" panose="020F0302020204030204"/>
+        <a:ea typeface=""/>
+        <a:cs typeface=""/>
+        <a:font script="Jpan" typeface="游ゴシック Light"/>
+        <a:font script="Hang" typeface="맑은 고딕"/>
+        <a:font script="Hans" typeface="等线 Light"/>
+        <a:font script="Hant" typeface="新細明體"/>
+        <a:font script="Arab" typeface="Times New Roman"/>
+        <a:font script="Hebr" typeface="Times New Roman"/>
+        <a:font script="Thai" typeface="Angsana New"/>
+        <a:font script="Ethi" typeface="Nyala"/>
+        <a:font script="Beng" typeface="Vrinda"/>
+        <a:font script="Gujr" typeface="Shruti"/>
+        <a:font script="Khmr" typeface="MoolBoran"/>
+        <a:font script="Knda" typeface="Tunga"/>
+        <a:font script="Guru" typeface="Raavi"/>
+        <a:font script="Cans" typeface="Euphemia"/>
+        <a:font script="Cher" typeface="Plantagenet Cherokee"/>
+        <a:font script="Yiii" typeface="Microsoft Yi Baiti"/>
+        <a:font script="Tibt" typeface="Microsoft Himalaya"/>
+        <a:font script="Thaa" typeface="MV Boli"/>
+        <a:font script="Deva" typeface="Mangal"/>
+        <a:font script="Telu" typeface="Gautami"/>
+        <a:font script="Taml" typeface="Latha"/>
+        <a:font script="Syrc" typeface="Estrangelo Edessa"/>
+        <a:font script="Orya" typeface="Kalinga"/>
+        <a:font script="Mlym" typeface="Kartika"/>
+        <a:font script="Laoo" typeface="DokChampa"/>
+        <a:font script="Sinh" typeface="Iskoola Pota"/>
+        <a:font script="Mong" typeface="Mongolian Baiti"/>
+        <a:font script="Viet" typeface="Times New Roman"/>
+        <a:font script="Uigh" typeface="Microsoft Uighur"/>
+        <a:font script="Geor" typeface="Sylfaen"/>
+        <a:font script="Armn" typeface="Arial"/>
+        <a:font script="Bugi" typeface="Leelawadee UI"/>
+        <a:font script="Bopo" typeface="Microsoft JhengHei"/>
+        <a:font script="Java" typeface="Javanese Text"/>
+        <a:font script="Lisu" typeface="Segoe UI"/>
+        <a:font script="Mymr" typeface="Myanmar Text"/>
+        <a:font script="Nkoo" typeface="Ebrima"/>
+        <a:font script="Olck" typeface="Nirmala UI"/>
+        <a:font script="Osma" typeface="Ebrima"/>
+        <a:font script="Phag" typeface="Phagspa"/>
+        <a:font script="Syrn" typeface="Estrangelo Edessa"/>
+        <a:font script="Syrj" typeface="Estrangelo Edessa"/>
+        <a:font script="Syre" typeface="Estrangelo Edessa"/>
+        <a:font script="Sora" typeface="Nirmala UI"/>
+        <a:font script="Tale" typeface="Microsoft Tai Le"/>
+        <a:font script="Talu" typeface="Microsoft New Tai Lue"/>
+        <a:font script="Tfng" typeface="Ebrima"/>
+      </a:majorFont>
+      <a:minorFont>
+        <a:latin typeface="Calibri" panose="020F0502020204030204"/>
+        <a:ea typeface=""/>
+        <a:cs typeface=""/>
+        <a:font script="Jpan" typeface="游ゴシック"/>
+        <a:font script="Hang" typeface="맑은 고딕"/>
+        <a:font script="Hans" typeface="等线"/>
+        <a:font script="Hant" typeface="新細明體"/>
+        <a:font script="Arab" typeface="Arial"/>
+        <a:font script="Hebr" typeface="Arial"/>
+        <a:font script="Thai" typeface="Cordia New"/>
+        <a:font script="Ethi" typeface="Nyala"/>
+        <a:font script="Beng" typeface="Vrinda"/>
+        <a:font script="Gujr" typeface="Shruti"/>
+        <a:font script="Khmr" typeface="DaunPenh"/>
+        <a:font script="Knda" typeface="Tunga"/>
+        <a:font script="Guru" typeface="Raavi"/>
+        <a:font script="Cans" typeface="Euphemia"/>
+        <a:font script="Cher" typeface="Plantagenet Cherokee"/>
+        <a:font script="Yiii" typeface="Microsoft Yi Baiti"/>
+        <a:font script="Tibt" typeface="Microsoft Himalaya"/>
+        <a:font script="Thaa" typeface="MV Boli"/>
+        <a:font script="Deva" typeface="Mangal"/>
+        <a:font script="Telu" typeface="Gautami"/>
+        <a:font script="Taml" typeface="Latha"/>
+        <a:font script="Syrc" typeface="Estrangelo Edessa"/>
+        <a:font script="Orya" typeface="Kalinga"/>
+        <a:font script="Mlym" typeface="Kartika"/>
+        <a:font script="Laoo" typeface="DokChampa"/>
+        <a:font script="Sinh" typeface="Iskoola Pota"/>
+        <a:font script="Mong" typeface="Mongolian Baiti"/>
+        <a:font script="Viet" typeface="Arial"/>
+        <a:font script="Uigh" typeface="Microsoft Uighur"/>
+        <a:font script="Geor" typeface="Sylfaen"/>
+        <a:font script="Armn" typeface="Arial"/>
+        <a:font script="Bugi" typeface="Leelawadee UI"/>
+        <a:font script="Bopo" typeface="Microsoft JhengHei"/>
+        <a:font script="Java" typeface="Javanese Text"/>
+        <a:font script="Lisu" typeface="Segoe UI"/>
+        <a:font script="Mymr" typeface="Myanmar Text"/>
+        <a:font script="Nkoo" typeface="Ebrima"/>
+        <a:font script="Olck" typeface="Nirmala UI"/>
+        <a:font script="Osma" typeface="Ebrima"/>
+        <a:font script="Phag" typeface="Phagspa"/>
+        <a:font script="Syrn" typeface="Estrangelo Edessa"/>
+        <a:font script="Syrj" typeface="Estrangelo Edessa"/>
+        <a:font script="Syre" typeface="Estrangelo Edessa"/>
+        <a:font script="Sora" typeface="Nirmala UI"/>
+        <a:font script="Tale" typeface="Microsoft Tai Le"/>
+        <a:font script="Talu" typeface="Microsoft New Tai Lue"/>
+        <a:font script="Tfng" typeface="Ebrima"/>
+      </a:minorFont>
+    </a:fontScheme>
+    <a:fmtScheme name="Стандартная">
+      <a:fillStyleLst>
+        <a:solidFill>
+          <a:schemeClr val="phClr"/>
+        </a:solidFill>
+        <a:gradFill rotWithShape="1">
+          <a:gsLst>
+            <a:gs pos="0">
+              <a:schemeClr val="phClr">
+                <a:lumMod val="110000"/>
+                <a:satMod val="105000"/>
+                <a:tint val="67000"/>
+              </a:schemeClr>
+            </a:gs>
+            <a:gs pos="50000">
+              <a:schemeClr val="phClr">
+                <a:lumMod val="105000"/>
+                <a:satMod val="103000"/>
+                <a:tint val="73000"/>
+              </a:schemeClr>
+            </a:gs>
+            <a:gs pos="100000">
+              <a:schemeClr val="phClr">
+                <a:lumMod val="105000"/>
+                <a:satMod val="109000"/>
+                <a:tint val="81000"/>
+              </a:schemeClr>
+            </a:gs>
+          </a:gsLst>
+          <a:lin ang="5400000" scaled="0"/>
+        </a:gradFill>
+        <a:gradFill rotWithShape="1">
+          <a:gsLst>
+            <a:gs pos="0">
+              <a:schemeClr val="phClr">
+                <a:satMod val="103000"/>
+                <a:lumMod val="102000"/>
+                <a:tint val="94000"/>
+              </a:schemeClr>
+            </a:gs>
+            <a:gs pos="50000">
+              <a:schemeClr val="phClr">
+                <a:satMod val="110000"/>
+                <a:lumMod val="100000"/>
+                <a:shade val="100000"/>
+              </a:schemeClr>
+            </a:gs>
+            <a:gs pos="100000">
+              <a:schemeClr val="phClr">
+                <a:lumMod val="99000"/>
+                <a:satMod val="120000"/>
+                <a:shade val="78000"/>
+              </a:schemeClr>
+            </a:gs>
+          </a:gsLst>
+          <a:lin ang="5400000" scaled="0"/>
+        </a:gradFill>
+      </a:fillStyleLst>
+      <a:lnStyleLst>
+        <a:ln w="6350" cap="flat" cmpd="sng" algn="ctr">
+          <a:solidFill>
+            <a:schemeClr val="phClr"/>
+          </a:solidFill>
+          <a:prstDash val="solid"/>
+          <a:miter lim="800000"/>
+        </a:ln>
+        <a:ln w="12700" cap="flat" cmpd="sng" algn="ctr">
+          <a:solidFill>
+            <a:schemeClr val="phClr"/>
+          </a:solidFill>
+          <a:prstDash val="solid"/>
+          <a:miter lim="800000"/>
+        </a:ln>
+        <a:ln w="19050" cap="flat" cmpd="sng" algn="ctr">
+          <a:solidFill>
+            <a:schemeClr val="phClr"/>
+          </a:solidFill>
+          <a:prstDash val="solid"/>
+          <a:miter lim="800000"/>
+        </a:ln>
+      </a:lnStyleLst>
+      <a:effectStyleLst>
+        <a:effectStyle>
+          <a:effectLst/>
+        </a:effectStyle>
+        <a:effectStyle>
+          <a:effectLst/>
+        </a:effectStyle>
+        <a:effectStyle>
+          <a:effectLst>
+            <a:outerShdw blurRad="57150" dist="19050" dir="5400000" algn="ctr" rotWithShape="0">
+              <a:srgbClr val="000000">
+                <a:alpha val="63000"/>
+              </a:srgbClr>
+            </a:outerShdw>
+          </a:effectLst>
+        </a:effectStyle>
+      </a:effectStyleLst>
+      <a:bgFillStyleLst>
+        <a:solidFill>
+          <a:schemeClr val="phClr"/>
+        </a:solidFill>
+        <a:solidFill>
+          <a:schemeClr val="phClr">
+            <a:tint val="95000"/>
+            <a:satMod val="170000"/>
+          </a:schemeClr>
+        </a:solidFill>
+        <a:gradFill rotWithShape="1">
+          <a:gsLst>
+            <a:gs pos="0">
+              <a:schemeClr val="phClr">
+                <a:tint val="93000"/>
+                <a:satMod val="150000"/>
+                <a:shade val="98000"/>
+                <a:lumMod val="102000"/>
+              </a:schemeClr>
+            </a:gs>
+            <a:gs pos="50000">
+              <a:schemeClr val="phClr">
+                <a:tint val="98000"/>
+                <a:satMod val="130000"/>
+                <a:shade val="90000"/>
+                <a:lumMod val="103000"/>
+              </a:schemeClr>
+            </a:gs>
+            <a:gs pos="100000">
+              <a:schemeClr val="phClr">
+                <a:shade val="63000"/>
+                <a:satMod val="120000"/>
+              </a:schemeClr>
+            </a:gs>
+          </a:gsLst>
+          <a:lin ang="5400000" scaled="0"/>
+        </a:gradFill>
+      </a:bgFillStyleLst>
+    </a:fmtScheme>
+  </a:themeElements>
+  <a:objectDefaults/>
+  <a:extraClrSchemeLst/>
+  <a:extLst>
+    <a:ext uri="{05A4C25C-085E-4340-85A3-A5531E510DB2}">
+      <thm15:themeFamily xmlns:thm15="http://schemas.microsoft.com/office/thememl/2012/main" name="Office Theme" id="{62F939B6-93AF-4DB8-9C6B-D6C7DFDC589F}" vid="{4A3C46E8-61CC-4603-A589-7422A47A8E4A}"/>
+    </a:ext>
+  </a:extLst>
+</a:theme>
 </file>